--- a/docs/content/one_way_anova_2/one_way_anova_2_lecture.pptx
+++ b/docs/content/one_way_anova_2/one_way_anova_2_lecture.pptx
@@ -3357,7 +3357,7 @@
             </a:pPr>
             <a:r>
               <a:rPr/>
-              <a:t>2026-09-04</a:t>
+              <a:t>2026-09-08</a:t>
             </a:r>
           </a:p>
         </p:txBody>

--- a/docs/content/one_way_anova_2/one_way_anova_2_lecture.pptx
+++ b/docs/content/one_way_anova_2/one_way_anova_2_lecture.pptx
@@ -3357,7 +3357,7 @@
             </a:pPr>
             <a:r>
               <a:rPr/>
-              <a:t>2026-09-08</a:t>
+              <a:t>2026-09-10</a:t>
             </a:r>
           </a:p>
         </p:txBody>

--- a/docs/content/one_way_anova_2/one_way_anova_2_lecture.pptx
+++ b/docs/content/one_way_anova_2/one_way_anova_2_lecture.pptx
@@ -3357,7 +3357,7 @@
             </a:pPr>
             <a:r>
               <a:rPr/>
-              <a:t>2026-09-10</a:t>
+              <a:t>2026-09-14</a:t>
             </a:r>
           </a:p>
         </p:txBody>

--- a/docs/content/one_way_anova_2/one_way_anova_2_lecture.pptx
+++ b/docs/content/one_way_anova_2/one_way_anova_2_lecture.pptx
@@ -3357,7 +3357,7 @@
             </a:pPr>
             <a:r>
               <a:rPr/>
-              <a:t>2026-09-14</a:t>
+              <a:t>2026-09-21</a:t>
             </a:r>
           </a:p>
         </p:txBody>

--- a/docs/content/one_way_anova_2/one_way_anova_2_lecture.pptx
+++ b/docs/content/one_way_anova_2/one_way_anova_2_lecture.pptx
@@ -3357,7 +3357,7 @@
             </a:pPr>
             <a:r>
               <a:rPr/>
-              <a:t>2026-09-21</a:t>
+              <a:t>2026-09-22</a:t>
             </a:r>
           </a:p>
         </p:txBody>

--- a/docs/content/one_way_anova_2/one_way_anova_2_lecture.pptx
+++ b/docs/content/one_way_anova_2/one_way_anova_2_lecture.pptx
@@ -3357,7 +3357,7 @@
             </a:pPr>
             <a:r>
               <a:rPr/>
-              <a:t>2026-09-22</a:t>
+              <a:t>2026-09-23</a:t>
             </a:r>
           </a:p>
         </p:txBody>

--- a/docs/content/one_way_anova_2/one_way_anova_2_lecture.pptx
+++ b/docs/content/one_way_anova_2/one_way_anova_2_lecture.pptx
@@ -3357,7 +3357,7 @@
             </a:pPr>
             <a:r>
               <a:rPr/>
-              <a:t>2026-09-23</a:t>
+              <a:t>2026-09-24</a:t>
             </a:r>
           </a:p>
         </p:txBody>

--- a/docs/content/one_way_anova_2/one_way_anova_2_lecture.pptx
+++ b/docs/content/one_way_anova_2/one_way_anova_2_lecture.pptx
@@ -3357,7 +3357,7 @@
             </a:pPr>
             <a:r>
               <a:rPr/>
-              <a:t>2026-09-24</a:t>
+              <a:t>2026-09-29</a:t>
             </a:r>
           </a:p>
         </p:txBody>

--- a/docs/content/one_way_anova_2/one_way_anova_2_lecture.pptx
+++ b/docs/content/one_way_anova_2/one_way_anova_2_lecture.pptx
@@ -3357,7 +3357,7 @@
             </a:pPr>
             <a:r>
               <a:rPr/>
-              <a:t>2026-09-29</a:t>
+              <a:t>2026-10-01</a:t>
             </a:r>
           </a:p>
         </p:txBody>

--- a/docs/content/one_way_anova_2/one_way_anova_2_lecture.pptx
+++ b/docs/content/one_way_anova_2/one_way_anova_2_lecture.pptx
@@ -3357,7 +3357,7 @@
             </a:pPr>
             <a:r>
               <a:rPr/>
-              <a:t>2026-10-01</a:t>
+              <a:t>2026-10-05</a:t>
             </a:r>
           </a:p>
         </p:txBody>
@@ -4904,8 +4904,8 @@
         </p:blipFill>
         <p:spPr bwMode="auto">
           <a:xfrm>
-            <a:off x="127000" y="1562100"/>
-            <a:ext cx="4432300" cy="2730500"/>
+            <a:off x="127000" y="1930400"/>
+            <a:ext cx="4432300" cy="1981200"/>
           </a:xfrm>
           <a:prstGeom prst="rect">
             <a:avLst/>

--- a/docs/content/one_way_anova_2/one_way_anova_2_lecture.pptx
+++ b/docs/content/one_way_anova_2/one_way_anova_2_lecture.pptx
@@ -3357,7 +3357,7 @@
             </a:pPr>
             <a:r>
               <a:rPr/>
-              <a:t>2026-10-05</a:t>
+              <a:t>2026-10-08</a:t>
             </a:r>
           </a:p>
         </p:txBody>

--- a/docs/content/one_way_anova_2/one_way_anova_2_lecture.pptx
+++ b/docs/content/one_way_anova_2/one_way_anova_2_lecture.pptx
@@ -3357,7 +3357,7 @@
             </a:pPr>
             <a:r>
               <a:rPr/>
-              <a:t>2026-10-08</a:t>
+              <a:t>2026-10-09</a:t>
             </a:r>
           </a:p>
         </p:txBody>

--- a/docs/content/one_way_anova_2/one_way_anova_2_lecture.pptx
+++ b/docs/content/one_way_anova_2/one_way_anova_2_lecture.pptx
@@ -23,6 +23,14 @@
     <p:sldId id="271" r:id="rId17"/>
     <p:sldId id="272" r:id="rId18"/>
     <p:sldId id="273" r:id="rId19"/>
+    <p:sldId id="274" r:id="rId20"/>
+    <p:sldId id="275" r:id="rId21"/>
+    <p:sldId id="276" r:id="rId22"/>
+    <p:sldId id="277" r:id="rId23"/>
+    <p:sldId id="278" r:id="rId24"/>
+    <p:sldId id="279" r:id="rId25"/>
+    <p:sldId id="280" r:id="rId26"/>
+    <p:sldId id="281" r:id="rId27"/>
   </p:sldIdLst>
   <p:sldSz cx="9144000" cy="5143500" type="screen16x9"/>
   <p:notesSz cx="6858000" cy="9144000"/>
@@ -3296,7 +3304,7 @@
             </a:pPr>
             <a:r>
               <a:rPr/>
-              <a:t>Lecture 14 — One-Way ANOVA II: Running &amp; Reporting the Test</a:t>
+              <a:t>Lecture 20 — One-Way ANOVA II: Assumptions, then Follow-Up Tests</a:t>
             </a:r>
           </a:p>
         </p:txBody>
@@ -3326,7 +3334,7 @@
             </a:pPr>
             <a:r>
               <a:rPr/>
-              <a:t>Reading the F table, finding which groups differ, and writing it up</a:t>
+              <a:t>Earning the p-value, and finding out which species actually differ</a:t>
             </a:r>
             <a:br/>
             <a:br/>
@@ -3357,7 +3365,7 @@
             </a:pPr>
             <a:r>
               <a:rPr/>
-              <a:t>2026-10-09</a:t>
+              <a:t>2026-10-19</a:t>
             </a:r>
           </a:p>
         </p:txBody>
@@ -3409,7 +3417,7 @@
             </a:pPr>
             <a:r>
               <a:rPr/>
-              <a:t>🛑 Pause — Do Activity Parts 7–8 Now</a:t>
+              <a:t>Equal Variance — Levene’s Test</a:t>
             </a:r>
           </a:p>
         </p:txBody>
@@ -3429,50 +3437,49 @@
           <a:bodyPr/>
           <a:lstStyle/>
           <a:p>
-            <a:pPr lvl="0" indent="0" marL="0">
-              <a:buNone/>
-            </a:pPr>
-            <a:r>
-              <a:rPr/>
-              <a:t>Run </a:t>
-            </a:r>
-            <a:r>
-              <a:rPr>
-                <a:latin typeface="Courier"/>
-              </a:rPr>
-              <a:t>aov()</a:t>
-            </a:r>
-            <a:r>
-              <a:rPr/>
-              <a:t> + </a:t>
-            </a:r>
-            <a:r>
-              <a:rPr>
-                <a:latin typeface="Courier"/>
-              </a:rPr>
-              <a:t>summary()</a:t>
-            </a:r>
-            <a:r>
-              <a:rPr/>
-              <a:t>, then </a:t>
-            </a:r>
-            <a:r>
-              <a:rPr>
-                <a:latin typeface="Courier"/>
-              </a:rPr>
-              <a:t>car::Anova(type = "II")</a:t>
-            </a:r>
-            <a:r>
-              <a:rPr/>
-              <a:t>. Predict the F and </a:t>
-            </a:r>
-            <a:r>
-              <a:rPr i="1"/>
+            <a:pPr lvl="0" indent="0" marL="1270000">
+              <a:buNone/>
+            </a:pPr>
+            <a:r>
+              <a:rPr sz="2000" b="1"/>
+              <a:t>Note</a:t>
+            </a:r>
+          </a:p>
+          <a:p>
+            <a:pPr lvl="0" indent="0" marL="1270000">
+              <a:buNone/>
+            </a:pPr>
+            <a:r>
+              <a:rPr sz="2000" b="1"/>
+              <a:t>🔮 Predict first:</a:t>
+            </a:r>
+            <a:r>
+              <a:rPr sz="2000"/>
+              <a:t> given those sds, will Levene’s test call the variances </a:t>
+            </a:r>
+            <a:r>
+              <a:rPr sz="2000" b="1"/>
+              <a:t>equal</a:t>
+            </a:r>
+            <a:r>
+              <a:rPr sz="2000"/>
+              <a:t> (</a:t>
+            </a:r>
+            <a:r>
+              <a:rPr sz="2000" i="1"/>
               <a:t>p</a:t>
             </a:r>
             <a:r>
-              <a:rPr/>
-              <a:t> before you read them, and confirm both tables agree.</a:t>
+              <a:rPr sz="2000"/>
+              <a:t> &gt; 0.05) or </a:t>
+            </a:r>
+            <a:r>
+              <a:rPr sz="2000" b="1"/>
+              <a:t>unequal</a:t>
+            </a:r>
+            <a:r>
+              <a:rPr sz="2000"/>
+              <a:t>?</a:t>
             </a:r>
           </a:p>
         </p:txBody>
@@ -3501,77 +3508,163 @@
       </p:grpSpPr>
       <p:sp>
         <p:nvSpPr>
-          <p:cNvPr id="2" name="Title 1"/>
-          <p:cNvSpPr>
-            <a:spLocks noGrp="1"/>
-          </p:cNvSpPr>
-          <p:nvPr>
-            <p:ph type="title"/>
-          </p:nvPr>
-        </p:nvSpPr>
-        <p:spPr>
-          <a:xfrm>
-            <a:off x="0" y="0"/>
-            <a:ext cx="9144000" cy="582780"/>
-          </a:xfrm>
-        </p:spPr>
+          <p:cNvPr id="3" name="Content Placeholder 2"/>
+          <p:cNvSpPr>
+            <a:spLocks noGrp="1"/>
+          </p:cNvSpPr>
+          <p:nvPr>
+            <p:ph idx="1" sz="half"/>
+          </p:nvPr>
+        </p:nvSpPr>
+        <p:spPr/>
         <p:txBody>
           <a:bodyPr/>
           <a:lstStyle/>
           <a:p>
+            <a:pPr lvl="0" indent="0">
+              <a:buNone/>
+            </a:pPr>
+            <a:r>
+              <a:rPr>
+                <a:solidFill>
+                  <a:srgbClr val="5E5E5E"/>
+                </a:solidFill>
+                <a:latin typeface="Courier"/>
+              </a:rPr>
+              <a:t># H0: all groups have equal variance ------------------</a:t>
+            </a:r>
+            <a:br/>
+            <a:r>
+              <a:rPr>
+                <a:solidFill>
+                  <a:srgbClr val="4758AB"/>
+                </a:solidFill>
+                <a:latin typeface="Courier"/>
+              </a:rPr>
+              <a:t>leveneTest</a:t>
+            </a:r>
+            <a:r>
+              <a:rPr>
+                <a:solidFill>
+                  <a:srgbClr val="003B4F"/>
+                </a:solidFill>
+                <a:latin typeface="Courier"/>
+              </a:rPr>
+              <a:t>(body_mass_g </a:t>
+            </a:r>
+            <a:r>
+              <a:rPr>
+                <a:solidFill>
+                  <a:srgbClr val="5E5E5E"/>
+                </a:solidFill>
+                <a:latin typeface="Courier"/>
+              </a:rPr>
+              <a:t>~</a:t>
+            </a:r>
+            <a:r>
+              <a:rPr>
+                <a:solidFill>
+                  <a:srgbClr val="003B4F"/>
+                </a:solidFill>
+                <a:latin typeface="Courier"/>
+              </a:rPr>
+              <a:t> species, </a:t>
+            </a:r>
+            <a:r>
+              <a:rPr>
+                <a:solidFill>
+                  <a:srgbClr val="657422"/>
+                </a:solidFill>
+                <a:latin typeface="Courier"/>
+              </a:rPr>
+              <a:t>data =</a:t>
+            </a:r>
+            <a:r>
+              <a:rPr>
+                <a:solidFill>
+                  <a:srgbClr val="003B4F"/>
+                </a:solidFill>
+                <a:latin typeface="Courier"/>
+              </a:rPr>
+              <a:t> penguins_df)</a:t>
+            </a:r>
+          </a:p>
+          <a:p>
+            <a:pPr lvl="0" indent="0">
+              <a:buNone/>
+            </a:pPr>
+            <a:r>
+              <a:rPr>
+                <a:latin typeface="Courier"/>
+              </a:rPr>
+              <a:t>Levene's Test for Homogeneity of Variance (center = median)
+       Df F value   Pr(&gt;F)   
+group   2  5.1203 0.006445 **
+      339                    
+---
+Signif. codes:  0 '***' 0.001 '**' 0.01 '*' 0.05 '.' 0.1 ' ' 1</a:t>
+            </a:r>
+          </a:p>
+        </p:txBody>
+      </p:sp>
+      <p:sp>
+        <p:nvSpPr>
+          <p:cNvPr id="4" name="Content Placeholder 3"/>
+          <p:cNvSpPr>
+            <a:spLocks noGrp="1"/>
+          </p:cNvSpPr>
+          <p:nvPr>
+            <p:ph idx="2" sz="half"/>
+          </p:nvPr>
+        </p:nvSpPr>
+        <p:spPr/>
+        <p:txBody>
+          <a:bodyPr/>
+          <a:lstStyle/>
+          <a:p>
             <a:pPr lvl="0" indent="0" marL="0">
               <a:buNone/>
             </a:pPr>
             <a:r>
-              <a:rPr/>
-              <a:t>🧩 Chunk 2 of 2 · Which Groups Differ? Post-Hoc with emmeans</a:t>
-            </a:r>
-          </a:p>
-        </p:txBody>
-      </p:sp>
-      <p:sp>
-        <p:nvSpPr>
-          <p:cNvPr id="3" name="Content Placeholder 2"/>
-          <p:cNvSpPr>
-            <a:spLocks noGrp="1"/>
-          </p:cNvSpPr>
-          <p:nvPr>
-            <p:ph idx="1"/>
-          </p:nvPr>
-        </p:nvSpPr>
-        <p:spPr/>
-        <p:txBody>
-          <a:bodyPr/>
-          <a:lstStyle/>
+              <a:rPr b="1"/>
+              <a:t>F = 5.12, </a:t>
+            </a:r>
+            <a:r>
+              <a:rPr b="1" i="1"/>
+              <a:t>p</a:t>
+            </a:r>
+            <a:r>
+              <a:rPr b="1"/>
+              <a:t> = 0.0064</a:t>
+            </a:r>
+          </a:p>
           <a:p>
             <a:pPr lvl="0" indent="0" marL="0">
               <a:buNone/>
             </a:pPr>
             <a:r>
+              <a:rPr i="1"/>
+              <a:t>p</a:t>
+            </a:r>
+            <a:r>
+              <a:rPr/>
+              <a:t> &lt; 0.05 → </a:t>
+            </a:r>
+            <a:r>
               <a:rPr b="1"/>
-              <a:t>We will cover:</a:t>
-            </a:r>
-            <a:r>
-              <a:rPr/>
-              <a:t> ANOVA says “some differ” — </a:t>
-            </a:r>
-            <a:r>
-              <a:rPr>
-                <a:latin typeface="Courier"/>
-              </a:rPr>
-              <a:t>emmeans</a:t>
-            </a:r>
-            <a:r>
-              <a:rPr/>
-              <a:t> says </a:t>
-            </a:r>
-            <a:r>
-              <a:rPr i="1"/>
-              <a:t>which</a:t>
-            </a:r>
-            <a:r>
-              <a:rPr/>
-              <a:t>, with the comparisons properly adjusted.</a:t>
+              <a:t>reject H₀</a:t>
+            </a:r>
+            <a:r>
+              <a:rPr/>
+              <a:t> → the variances are </a:t>
+            </a:r>
+            <a:r>
+              <a:rPr b="1"/>
+              <a:t>not</a:t>
+            </a:r>
+            <a:r>
+              <a:rPr/>
+              <a:t> equal.</a:t>
             </a:r>
           </a:p>
           <a:p>
@@ -3580,7 +3673,7 @@
             </a:pPr>
             <a:r>
               <a:rPr sz="2000" b="1"/>
-              <a:t>Tip</a:t>
+              <a:t>Important</a:t>
             </a:r>
           </a:p>
           <a:p>
@@ -3588,12 +3681,16 @@
               <a:buNone/>
             </a:pPr>
             <a:r>
+              <a:rPr sz="2000"/>
+              <a:t>So the classic ANOVA we ran last lecture has a </a:t>
+            </a:r>
+            <a:r>
               <a:rPr sz="2000" b="1"/>
-              <a:t>🖐 After this chunk: Activity Parts 9–11</a:t>
+              <a:t>violated assumption</a:t>
             </a:r>
             <a:r>
               <a:rPr sz="2000"/>
-              <a:t> (pairwise tests, letters, plot, report).</a:t>
+              <a:t>. This is not a mistake in the slides — it is what this data set does. Real data does this constantly.</a:t>
             </a:r>
           </a:p>
         </p:txBody>
@@ -3633,8 +3730,11 @@
         <p:spPr>
           <a:xfrm>
             <a:off x="0" y="0"/>
-            <a:ext cx="9144000" cy="582780"/>
+            <a:ext cx="9144000" cy="602780"/>
           </a:xfrm>
+          <a:solidFill>
+            <a:srgbClr val="1A1A2E"/>
+          </a:solidFill>
         </p:spPr>
         <p:txBody>
           <a:bodyPr/>
@@ -3645,7 +3745,7 @@
             </a:pPr>
             <a:r>
               <a:rPr/>
-              <a:t>Post-Hoc — Pairwise Comparisons with emmeans</a:t>
+              <a:t>When Equal Variance Fails — Welch’s ANOVA</a:t>
             </a:r>
           </a:p>
         </p:txBody>
@@ -3657,13 +3757,217 @@
             <a:spLocks noGrp="1"/>
           </p:cNvSpPr>
           <p:nvPr>
-            <p:ph idx="1"/>
+            <p:ph idx="1" sz="half"/>
           </p:nvPr>
         </p:nvSpPr>
         <p:spPr/>
         <p:txBody>
           <a:bodyPr/>
           <a:lstStyle/>
+          <a:p>
+            <a:pPr lvl="0" indent="0">
+              <a:buNone/>
+            </a:pPr>
+            <a:r>
+              <a:rPr>
+                <a:solidFill>
+                  <a:srgbClr val="5E5E5E"/>
+                </a:solidFill>
+                <a:latin typeface="Courier"/>
+              </a:rPr>
+              <a:t># Does not assume equal variances ---------------------</a:t>
+            </a:r>
+            <a:br/>
+            <a:r>
+              <a:rPr>
+                <a:solidFill>
+                  <a:srgbClr val="4758AB"/>
+                </a:solidFill>
+                <a:latin typeface="Courier"/>
+              </a:rPr>
+              <a:t>oneway.test</a:t>
+            </a:r>
+            <a:r>
+              <a:rPr>
+                <a:solidFill>
+                  <a:srgbClr val="003B4F"/>
+                </a:solidFill>
+                <a:latin typeface="Courier"/>
+              </a:rPr>
+              <a:t>(body_mass_g </a:t>
+            </a:r>
+            <a:r>
+              <a:rPr>
+                <a:solidFill>
+                  <a:srgbClr val="5E5E5E"/>
+                </a:solidFill>
+                <a:latin typeface="Courier"/>
+              </a:rPr>
+              <a:t>~</a:t>
+            </a:r>
+            <a:r>
+              <a:rPr>
+                <a:solidFill>
+                  <a:srgbClr val="003B4F"/>
+                </a:solidFill>
+                <a:latin typeface="Courier"/>
+              </a:rPr>
+              <a:t> species,</a:t>
+            </a:r>
+            <a:br/>
+            <a:r>
+              <a:rPr>
+                <a:solidFill>
+                  <a:srgbClr val="003B4F"/>
+                </a:solidFill>
+                <a:latin typeface="Courier"/>
+              </a:rPr>
+              <a:t>            </a:t>
+            </a:r>
+            <a:r>
+              <a:rPr>
+                <a:solidFill>
+                  <a:srgbClr val="657422"/>
+                </a:solidFill>
+                <a:latin typeface="Courier"/>
+              </a:rPr>
+              <a:t>data =</a:t>
+            </a:r>
+            <a:r>
+              <a:rPr>
+                <a:solidFill>
+                  <a:srgbClr val="003B4F"/>
+                </a:solidFill>
+                <a:latin typeface="Courier"/>
+              </a:rPr>
+              <a:t> penguins_df,</a:t>
+            </a:r>
+            <a:br/>
+            <a:r>
+              <a:rPr>
+                <a:solidFill>
+                  <a:srgbClr val="003B4F"/>
+                </a:solidFill>
+                <a:latin typeface="Courier"/>
+              </a:rPr>
+              <a:t>            </a:t>
+            </a:r>
+            <a:r>
+              <a:rPr>
+                <a:solidFill>
+                  <a:srgbClr val="657422"/>
+                </a:solidFill>
+                <a:latin typeface="Courier"/>
+              </a:rPr>
+              <a:t>var.equal =</a:t>
+            </a:r>
+            <a:r>
+              <a:rPr>
+                <a:solidFill>
+                  <a:srgbClr val="003B4F"/>
+                </a:solidFill>
+                <a:latin typeface="Courier"/>
+              </a:rPr>
+              <a:t> </a:t>
+            </a:r>
+            <a:r>
+              <a:rPr>
+                <a:solidFill>
+                  <a:srgbClr val="8F5902"/>
+                </a:solidFill>
+                <a:latin typeface="Courier"/>
+              </a:rPr>
+              <a:t>FALSE</a:t>
+            </a:r>
+            <a:r>
+              <a:rPr>
+                <a:solidFill>
+                  <a:srgbClr val="003B4F"/>
+                </a:solidFill>
+                <a:latin typeface="Courier"/>
+              </a:rPr>
+              <a:t>)</a:t>
+            </a:r>
+          </a:p>
+          <a:p>
+            <a:pPr lvl="0" indent="0">
+              <a:buNone/>
+            </a:pPr>
+            <a:r>
+              <a:rPr>
+                <a:latin typeface="Courier"/>
+              </a:rPr>
+              <a:t>
+    One-way analysis of means (not assuming equal variances)
+data:  body_mass_g and species
+F = 317.57, num df = 2.00, denom df = 189.48, p-value &lt;
+2.2e-16</a:t>
+            </a:r>
+          </a:p>
+        </p:txBody>
+      </p:sp>
+      <p:sp>
+        <p:nvSpPr>
+          <p:cNvPr id="4" name="Content Placeholder 3"/>
+          <p:cNvSpPr>
+            <a:spLocks noGrp="1"/>
+          </p:cNvSpPr>
+          <p:nvPr>
+            <p:ph idx="2" sz="half"/>
+          </p:nvPr>
+        </p:nvSpPr>
+        <p:spPr/>
+        <p:txBody>
+          <a:bodyPr/>
+          <a:lstStyle/>
+          <a:p>
+            <a:pPr lvl="0"/>
+            <a:r>
+              <a:rPr b="1"/>
+              <a:t>F = 317.6</a:t>
+            </a:r>
+            <a:r>
+              <a:rPr/>
+              <a:t>, num df 2, </a:t>
+            </a:r>
+            <a:r>
+              <a:rPr b="1"/>
+              <a:t>denom df 189.5</a:t>
+            </a:r>
+            <a:r>
+              <a:rPr/>
+              <a:t>, </a:t>
+            </a:r>
+            <a:r>
+              <a:rPr i="1"/>
+              <a:t>p</a:t>
+            </a:r>
+            <a:r>
+              <a:rPr/>
+              <a:t> &lt; 0.001</a:t>
+            </a:r>
+          </a:p>
+          <a:p>
+            <a:pPr lvl="0"/>
+            <a:r>
+              <a:rPr/>
+              <a:t>Fractional denominator df is Welch’s signature — it is the same correction as Welch’s </a:t>
+            </a:r>
+            <a:r>
+              <a:rPr i="1"/>
+              <a:t>t</a:t>
+            </a:r>
+            <a:r>
+              <a:rPr/>
+              <a:t>-test, which is R’s default </a:t>
+            </a:r>
+            <a:r>
+              <a:rPr>
+                <a:latin typeface="Courier"/>
+              </a:rPr>
+              <a:t>t.test()</a:t>
+            </a:r>
+          </a:p>
           <a:p>
             <a:pPr lvl="0" indent="0" marL="1270000">
               <a:buNone/>
@@ -3679,19 +3983,40 @@
             </a:pPr>
             <a:r>
               <a:rPr sz="2000" b="1"/>
-              <a:t>🔮 Predict first:</a:t>
-            </a:r>
+              <a:t>✅ The decision</a:t>
+            </a:r>
+          </a:p>
+          <a:p>
+            <a:pPr lvl="0" indent="0" marL="1270000">
+              <a:buNone/>
+            </a:pPr>
             <a:r>
               <a:rPr sz="2000"/>
-              <a:t> From the boxplot, predict — will </a:t>
+              <a:t>Levene says unequal → </a:t>
             </a:r>
             <a:r>
               <a:rPr sz="2000" b="1"/>
-              <a:t>all three</a:t>
+              <a:t>report the Welch F</a:t>
             </a:r>
             <a:r>
               <a:rPr sz="2000"/>
-              <a:t> species differ from each other, or will two be statistically tied?</a:t>
+              <a:t>. The conclusion does not change (both </a:t>
+            </a:r>
+            <a:r>
+              <a:rPr sz="2000" i="1"/>
+              <a:t>p</a:t>
+            </a:r>
+            <a:r>
+              <a:rPr sz="2000"/>
+              <a:t> are far below 0.001) but the </a:t>
+            </a:r>
+            <a:r>
+              <a:rPr sz="2000" i="1"/>
+              <a:t>honest</a:t>
+            </a:r>
+            <a:r>
+              <a:rPr sz="2000"/>
+              <a:t> test is the Welch one.</a:t>
             </a:r>
           </a:p>
         </p:txBody>
@@ -3720,202 +4045,338 @@
       </p:grpSpPr>
       <p:sp>
         <p:nvSpPr>
-          <p:cNvPr id="3" name="Content Placeholder 2"/>
-          <p:cNvSpPr>
-            <a:spLocks noGrp="1"/>
-          </p:cNvSpPr>
-          <p:nvPr>
-            <p:ph idx="1" sz="half"/>
-          </p:nvPr>
-        </p:nvSpPr>
-        <p:spPr/>
+          <p:cNvPr id="2" name="Title 1"/>
+          <p:cNvSpPr>
+            <a:spLocks noGrp="1"/>
+          </p:cNvSpPr>
+          <p:nvPr>
+            <p:ph type="title"/>
+          </p:nvPr>
+        </p:nvSpPr>
+        <p:spPr>
+          <a:xfrm>
+            <a:off x="0" y="0"/>
+            <a:ext cx="9144000" cy="582780"/>
+          </a:xfrm>
+        </p:spPr>
         <p:txBody>
           <a:bodyPr/>
           <a:lstStyle/>
           <a:p>
-            <a:pPr lvl="0" indent="0">
-              <a:buNone/>
-            </a:pPr>
-            <a:r>
-              <a:rPr>
-                <a:solidFill>
-                  <a:srgbClr val="5E5E5E"/>
-                </a:solidFill>
-                <a:latin typeface="Courier"/>
-              </a:rPr>
-              <a:t># Estimated marginal means + Tukey-adjusted pairs -----</a:t>
-            </a:r>
-            <a:br/>
-            <a:r>
-              <a:rPr>
-                <a:solidFill>
-                  <a:srgbClr val="003B4F"/>
-                </a:solidFill>
-                <a:latin typeface="Courier"/>
-              </a:rPr>
-              <a:t>mass_emm &lt;- </a:t>
-            </a:r>
-            <a:r>
-              <a:rPr>
-                <a:solidFill>
-                  <a:srgbClr val="4758AB"/>
-                </a:solidFill>
-                <a:latin typeface="Courier"/>
-              </a:rPr>
-              <a:t>emmeans</a:t>
-            </a:r>
-            <a:r>
-              <a:rPr>
-                <a:solidFill>
-                  <a:srgbClr val="003B4F"/>
-                </a:solidFill>
-                <a:latin typeface="Courier"/>
-              </a:rPr>
-              <a:t>(mass_model, pairwise </a:t>
-            </a:r>
-            <a:r>
-              <a:rPr>
-                <a:solidFill>
-                  <a:srgbClr val="5E5E5E"/>
-                </a:solidFill>
-                <a:latin typeface="Courier"/>
-              </a:rPr>
-              <a:t>~</a:t>
-            </a:r>
-            <a:r>
-              <a:rPr>
-                <a:solidFill>
-                  <a:srgbClr val="003B4F"/>
-                </a:solidFill>
-                <a:latin typeface="Courier"/>
-              </a:rPr>
-              <a:t> species)</a:t>
-            </a:r>
-            <a:br/>
-            <a:br/>
-            <a:r>
-              <a:rPr>
-                <a:solidFill>
-                  <a:srgbClr val="003B4F"/>
-                </a:solidFill>
-                <a:latin typeface="Courier"/>
-              </a:rPr>
-              <a:t>mass_emm</a:t>
-            </a:r>
-            <a:r>
-              <a:rPr>
-                <a:solidFill>
-                  <a:srgbClr val="5E5E5E"/>
-                </a:solidFill>
-                <a:latin typeface="Courier"/>
-              </a:rPr>
-              <a:t>$</a:t>
-            </a:r>
-            <a:r>
-              <a:rPr>
-                <a:solidFill>
-                  <a:srgbClr val="003B4F"/>
-                </a:solidFill>
-                <a:latin typeface="Courier"/>
-              </a:rPr>
-              <a:t>contrasts</a:t>
-            </a:r>
-          </a:p>
-          <a:p>
-            <a:pPr lvl="0" indent="0">
-              <a:buNone/>
-            </a:pPr>
-            <a:r>
-              <a:rPr>
-                <a:latin typeface="Courier"/>
-              </a:rPr>
-              <a:t> contrast           estimate   SE  df t.ratio p.value
- Adelie - Chinstrap    -32.4 67.5 339  -0.480  0.8807
- Adelie - Gentoo     -1375.4 56.1 339 -24.495 &lt;0.0001
- Chinstrap - Gentoo  -1342.9 69.9 339 -19.224 &lt;0.0001
-P value adjustment: tukey method for comparing a family of 3 estimates </a:t>
-            </a:r>
-          </a:p>
-        </p:txBody>
-      </p:sp>
-      <p:sp>
-        <p:nvSpPr>
-          <p:cNvPr id="4" name="Content Placeholder 3"/>
-          <p:cNvSpPr>
-            <a:spLocks noGrp="1"/>
-          </p:cNvSpPr>
-          <p:nvPr>
-            <p:ph idx="2" sz="half"/>
-          </p:nvPr>
-        </p:nvSpPr>
-        <p:spPr/>
-        <p:txBody>
-          <a:bodyPr/>
-          <a:lstStyle/>
-          <a:p>
             <a:pPr lvl="0" indent="0" marL="0">
               <a:buNone/>
             </a:pPr>
             <a:r>
-              <a:rPr b="1"/>
-              <a:t>Reading it:</a:t>
-            </a:r>
-          </a:p>
-          <a:p>
-            <a:pPr lvl="0"/>
-            <a:r>
-              <a:rPr>
-                <a:latin typeface="Courier"/>
-              </a:rPr>
-              <a:t>emmeans(..., pairwise ~ species)</a:t>
-            </a:r>
-            <a:r>
-              <a:rPr/>
-              <a:t> gives each group’s mean </a:t>
-            </a:r>
-            <a:r>
-              <a:rPr b="1"/>
-              <a:t>and</a:t>
-            </a:r>
-            <a:r>
-              <a:rPr/>
-              <a:t> every pairwise comparison</a:t>
-            </a:r>
-          </a:p>
-          <a:p>
-            <a:pPr lvl="0"/>
-            <a:r>
-              <a:rPr/>
-              <a:t>The </a:t>
-            </a:r>
-            <a:r>
-              <a:rPr i="1"/>
-              <a:t>p</a:t>
-            </a:r>
-            <a:r>
-              <a:rPr/>
-              <a:t>-values are </a:t>
-            </a:r>
-            <a:r>
-              <a:rPr b="1"/>
-              <a:t>Tukey-adjusted</a:t>
-            </a:r>
-            <a:r>
-              <a:rPr/>
-              <a:t> — they already correct for multiple comparisons, so the family-wise error stays at 0.05</a:t>
-            </a:r>
-          </a:p>
-          <a:p>
-            <a:pPr lvl="0" indent="0" marL="0">
-              <a:buNone/>
-            </a:pPr>
-            <a:r>
-              <a:rPr/>
-              <a:t>📖 W&amp;S §15.4 — planned vs. unplanned comparisons</a:t>
-            </a:r>
-          </a:p>
-        </p:txBody>
-      </p:sp>
+              <a:rPr/>
+              <a:t>A Decision Table You Can Keep</a:t>
+            </a:r>
+          </a:p>
+        </p:txBody>
+      </p:sp>
+      <p:graphicFrame>
+        <p:nvGraphicFramePr>
+          <p:cNvPr id="6" name="Content Placeholder 5"/>
+          <p:cNvGraphicFramePr>
+            <a:graphicFrameLocks noGrp="1"/>
+          </p:cNvGraphicFramePr>
+          <p:nvPr>
+            <p:ph idx="1"/>
+          </p:nvPr>
+        </p:nvGraphicFramePr>
+        <p:xfrm>
+          <a:off x="0" y="609600"/>
+          <a:ext cx="9080500" cy="3911600"/>
+        </p:xfrm>
+        <a:graphic>
+          <a:graphicData uri="http://schemas.openxmlformats.org/drawingml/2006/table">
+            <a:tbl>
+              <a:tblPr firstRow="1" bandRow="1">
+                <a:tableStyleId>{5C22544A-7EE6-4342-B048-85BDC9FD1C3A}</a:tableStyleId>
+              </a:tblPr>
+              <a:tblGrid>
+                <a:gridCol w="1638300"/>
+                <a:gridCol w="1993900"/>
+                <a:gridCol w="2717800"/>
+                <a:gridCol w="2717800"/>
+              </a:tblGrid>
+              <a:tr h="0">
+                <a:tc>
+                  <a:txBody>
+                    <a:bodyPr/>
+                    <a:lstStyle/>
+                    <a:p>
+                      <a:pPr lvl="0" indent="0" marL="0">
+                        <a:buNone/>
+                      </a:pPr>
+                      <a:r>
+                        <a:rPr/>
+                        <a:t>Check</a:t>
+                      </a:r>
+                    </a:p>
+                  </a:txBody>
+                  <a:tcPr/>
+                </a:tc>
+                <a:tc>
+                  <a:txBody>
+                    <a:bodyPr/>
+                    <a:lstStyle/>
+                    <a:p>
+                      <a:pPr lvl="0" indent="0" marL="0">
+                        <a:buNone/>
+                      </a:pPr>
+                      <a:r>
+                        <a:rPr/>
+                        <a:t>Result here</a:t>
+                      </a:r>
+                    </a:p>
+                  </a:txBody>
+                  <a:tcPr/>
+                </a:tc>
+                <a:tc>
+                  <a:txBody>
+                    <a:bodyPr/>
+                    <a:lstStyle/>
+                    <a:p>
+                      <a:pPr lvl="0" indent="0" marL="0">
+                        <a:buNone/>
+                      </a:pPr>
+                      <a:r>
+                        <a:rPr/>
+                        <a:t>What it means</a:t>
+                      </a:r>
+                    </a:p>
+                  </a:txBody>
+                  <a:tcPr/>
+                </a:tc>
+                <a:tc>
+                  <a:txBody>
+                    <a:bodyPr/>
+                    <a:lstStyle/>
+                    <a:p>
+                      <a:pPr lvl="0" indent="0" marL="0">
+                        <a:buNone/>
+                      </a:pPr>
+                      <a:r>
+                        <a:rPr/>
+                        <a:t>What to run</a:t>
+                      </a:r>
+                    </a:p>
+                  </a:txBody>
+                  <a:tcPr/>
+                </a:tc>
+              </a:tr>
+              <a:tr h="0">
+                <a:tc>
+                  <a:txBody>
+                    <a:bodyPr/>
+                    <a:lstStyle/>
+                    <a:p>
+                      <a:pPr lvl="0" indent="0" marL="0">
+                        <a:buNone/>
+                      </a:pPr>
+                      <a:r>
+                        <a:rPr/>
+                        <a:t>QQ + Shapiro</a:t>
+                      </a:r>
+                    </a:p>
+                  </a:txBody>
+                </a:tc>
+                <a:tc>
+                  <a:txBody>
+                    <a:bodyPr/>
+                    <a:lstStyle/>
+                    <a:p>
+                      <a:pPr lvl="0" indent="0" marL="0">
+                        <a:buNone/>
+                      </a:pPr>
+                      <a:r>
+                        <a:rPr i="1"/>
+                        <a:t>p</a:t>
+                      </a:r>
+                      <a:r>
+                        <a:rPr/>
+                        <a:t> = 0.051, plot fine</a:t>
+                      </a:r>
+                    </a:p>
+                  </a:txBody>
+                </a:tc>
+                <a:tc>
+                  <a:txBody>
+                    <a:bodyPr/>
+                    <a:lstStyle/>
+                    <a:p>
+                      <a:pPr lvl="0" indent="0" marL="0">
+                        <a:buNone/>
+                      </a:pPr>
+                      <a:r>
+                        <a:rPr/>
+                        <a:t>residuals ~normal</a:t>
+                      </a:r>
+                    </a:p>
+                  </a:txBody>
+                </a:tc>
+                <a:tc>
+                  <a:txBody>
+                    <a:bodyPr/>
+                    <a:lstStyle/>
+                    <a:p>
+                      <a:pPr lvl="0" indent="0" marL="0">
+                        <a:buNone/>
+                      </a:pPr>
+                      <a:r>
+                        <a:rPr/>
+                        <a:t>fine either way</a:t>
+                      </a:r>
+                    </a:p>
+                  </a:txBody>
+                </a:tc>
+              </a:tr>
+              <a:tr h="0">
+                <a:tc>
+                  <a:txBody>
+                    <a:bodyPr/>
+                    <a:lstStyle/>
+                    <a:p>
+                      <a:pPr lvl="0" indent="0" marL="0">
+                        <a:buNone/>
+                      </a:pPr>
+                      <a:r>
+                        <a:rPr/>
+                        <a:t>Levene</a:t>
+                      </a:r>
+                    </a:p>
+                  </a:txBody>
+                </a:tc>
+                <a:tc>
+                  <a:txBody>
+                    <a:bodyPr/>
+                    <a:lstStyle/>
+                    <a:p>
+                      <a:pPr lvl="0" indent="0" marL="0">
+                        <a:buNone/>
+                      </a:pPr>
+                      <a:r>
+                        <a:rPr i="1"/>
+                        <a:t>p</a:t>
+                      </a:r>
+                      <a:r>
+                        <a:rPr/>
+                        <a:t> = 0.0064</a:t>
+                      </a:r>
+                    </a:p>
+                  </a:txBody>
+                </a:tc>
+                <a:tc>
+                  <a:txBody>
+                    <a:bodyPr/>
+                    <a:lstStyle/>
+                    <a:p>
+                      <a:pPr lvl="0" indent="0" marL="0">
+                        <a:buNone/>
+                      </a:pPr>
+                      <a:r>
+                        <a:rPr/>
+                        <a:t>variances </a:t>
+                      </a:r>
+                      <a:r>
+                        <a:rPr b="1"/>
+                        <a:t>unequal</a:t>
+                      </a:r>
+                    </a:p>
+                  </a:txBody>
+                </a:tc>
+                <a:tc>
+                  <a:txBody>
+                    <a:bodyPr/>
+                    <a:lstStyle/>
+                    <a:p>
+                      <a:pPr lvl="0" indent="0" marL="0">
+                        <a:buNone/>
+                      </a:pPr>
+                      <a:r>
+                        <a:rPr>
+                          <a:latin typeface="Courier"/>
+                        </a:rPr>
+                        <a:t>oneway.test(var.equal = FALSE)</a:t>
+                      </a:r>
+                    </a:p>
+                  </a:txBody>
+                </a:tc>
+              </a:tr>
+              <a:tr h="0">
+                <a:tc>
+                  <a:txBody>
+                    <a:bodyPr/>
+                    <a:lstStyle/>
+                    <a:p>
+                      <a:pPr lvl="0" indent="0" marL="0">
+                        <a:buNone/>
+                      </a:pPr>
+                      <a:r>
+                        <a:rPr/>
+                        <a:t>Both fail badly</a:t>
+                      </a:r>
+                    </a:p>
+                  </a:txBody>
+                </a:tc>
+                <a:tc>
+                  <a:txBody>
+                    <a:bodyPr/>
+                    <a:lstStyle/>
+                    <a:p>
+                      <a:pPr lvl="0" indent="0" marL="0">
+                        <a:buNone/>
+                      </a:pPr>
+                      <a:r>
+                        <a:rPr/>
+                        <a:t>—</a:t>
+                      </a:r>
+                    </a:p>
+                  </a:txBody>
+                </a:tc>
+                <a:tc>
+                  <a:txBody>
+                    <a:bodyPr/>
+                    <a:lstStyle/>
+                    <a:p>
+                      <a:pPr lvl="0" indent="0" marL="0">
+                        <a:buNone/>
+                      </a:pPr>
+                      <a:r>
+                        <a:rPr/>
+                        <a:t>normality </a:t>
+                      </a:r>
+                      <a:r>
+                        <a:rPr b="1"/>
+                        <a:t>and</a:t>
+                      </a:r>
+                      <a:r>
+                        <a:rPr/>
+                        <a:t> variance gone</a:t>
+                      </a:r>
+                    </a:p>
+                  </a:txBody>
+                </a:tc>
+                <a:tc>
+                  <a:txBody>
+                    <a:bodyPr/>
+                    <a:lstStyle/>
+                    <a:p>
+                      <a:pPr lvl="0" indent="0" marL="0">
+                        <a:buNone/>
+                      </a:pPr>
+                      <a:r>
+                        <a:rPr/>
+                        <a:t>Kruskal-Wallis (rank-based)</a:t>
+                      </a:r>
+                    </a:p>
+                  </a:txBody>
+                </a:tc>
+              </a:tr>
+            </a:tbl>
+          </a:graphicData>
+        </a:graphic>
+      </p:graphicFrame>
     </p:spTree>
   </p:cSld>
 </p:sld>
@@ -3940,214 +4401,18 @@
       </p:grpSpPr>
       <p:sp>
         <p:nvSpPr>
-          <p:cNvPr id="2" name="Title 1"/>
-          <p:cNvSpPr>
-            <a:spLocks noGrp="1"/>
-          </p:cNvSpPr>
-          <p:nvPr>
-            <p:ph type="title"/>
-          </p:nvPr>
-        </p:nvSpPr>
-        <p:spPr>
-          <a:xfrm>
-            <a:off x="0" y="0"/>
-            <a:ext cx="9144000" cy="602780"/>
-          </a:xfrm>
-          <a:solidFill>
-            <a:srgbClr val="1A1A2E"/>
-          </a:solidFill>
-        </p:spPr>
+          <p:cNvPr id="3" name="Content Placeholder 2"/>
+          <p:cNvSpPr>
+            <a:spLocks noGrp="1"/>
+          </p:cNvSpPr>
+          <p:nvPr>
+            <p:ph idx="1"/>
+          </p:nvPr>
+        </p:nvSpPr>
+        <p:spPr/>
         <p:txBody>
           <a:bodyPr/>
           <a:lstStyle/>
-          <a:p>
-            <a:pPr lvl="0" indent="0" marL="0">
-              <a:buNone/>
-            </a:pPr>
-            <a:r>
-              <a:rPr/>
-              <a:t>Compact Letter Display — Who Shares a Letter?</a:t>
-            </a:r>
-          </a:p>
-        </p:txBody>
-      </p:sp>
-      <p:sp>
-        <p:nvSpPr>
-          <p:cNvPr id="3" name="Content Placeholder 2"/>
-          <p:cNvSpPr>
-            <a:spLocks noGrp="1"/>
-          </p:cNvSpPr>
-          <p:nvPr>
-            <p:ph idx="1" sz="half"/>
-          </p:nvPr>
-        </p:nvSpPr>
-        <p:spPr/>
-        <p:txBody>
-          <a:bodyPr/>
-          <a:lstStyle/>
-          <a:p>
-            <a:pPr lvl="0" indent="0">
-              <a:buNone/>
-            </a:pPr>
-            <a:r>
-              <a:rPr>
-                <a:solidFill>
-                  <a:srgbClr val="5E5E5E"/>
-                </a:solidFill>
-                <a:latin typeface="Courier"/>
-              </a:rPr>
-              <a:t># Groups that SHARE a letter are NOT different --------</a:t>
-            </a:r>
-            <a:br/>
-            <a:r>
-              <a:rPr>
-                <a:solidFill>
-                  <a:srgbClr val="003B4F"/>
-                </a:solidFill>
-                <a:latin typeface="Courier"/>
-              </a:rPr>
-              <a:t>multcomp</a:t>
-            </a:r>
-            <a:r>
-              <a:rPr>
-                <a:solidFill>
-                  <a:srgbClr val="5E5E5E"/>
-                </a:solidFill>
-                <a:latin typeface="Courier"/>
-              </a:rPr>
-              <a:t>::</a:t>
-            </a:r>
-            <a:r>
-              <a:rPr>
-                <a:solidFill>
-                  <a:srgbClr val="4758AB"/>
-                </a:solidFill>
-                <a:latin typeface="Courier"/>
-              </a:rPr>
-              <a:t>cld</a:t>
-            </a:r>
-            <a:r>
-              <a:rPr>
-                <a:solidFill>
-                  <a:srgbClr val="003B4F"/>
-                </a:solidFill>
-                <a:latin typeface="Courier"/>
-              </a:rPr>
-              <a:t>(mass_emm</a:t>
-            </a:r>
-            <a:r>
-              <a:rPr>
-                <a:solidFill>
-                  <a:srgbClr val="5E5E5E"/>
-                </a:solidFill>
-                <a:latin typeface="Courier"/>
-              </a:rPr>
-              <a:t>$</a:t>
-            </a:r>
-            <a:r>
-              <a:rPr>
-                <a:solidFill>
-                  <a:srgbClr val="003B4F"/>
-                </a:solidFill>
-                <a:latin typeface="Courier"/>
-              </a:rPr>
-              <a:t>emmeans, </a:t>
-            </a:r>
-            <a:r>
-              <a:rPr>
-                <a:solidFill>
-                  <a:srgbClr val="657422"/>
-                </a:solidFill>
-                <a:latin typeface="Courier"/>
-              </a:rPr>
-              <a:t>Letters =</a:t>
-            </a:r>
-            <a:r>
-              <a:rPr>
-                <a:solidFill>
-                  <a:srgbClr val="003B4F"/>
-                </a:solidFill>
-                <a:latin typeface="Courier"/>
-              </a:rPr>
-              <a:t> letters)</a:t>
-            </a:r>
-          </a:p>
-          <a:p>
-            <a:pPr lvl="0" indent="0">
-              <a:buNone/>
-            </a:pPr>
-            <a:r>
-              <a:rPr>
-                <a:latin typeface="Courier"/>
-              </a:rPr>
-              <a:t> species   emmean   SE  df lower.CL upper.CL .group
- Adelie      3701 37.6 339     3627     3775  a    
- Chinstrap   3733 56.1 339     3623     3843  a    
- Gentoo      5076 41.7 339     4994     5158   b   
-Confidence level used: 0.95 
-P value adjustment: tukey method for comparing a family of 3 estimates 
-significance level used: alpha = 0.05 
-NOTE: If two or more means share the same grouping symbol,
-      then we cannot show them to be different.
-      But we also did not show them to be the same. </a:t>
-            </a:r>
-          </a:p>
-        </p:txBody>
-      </p:sp>
-      <p:sp>
-        <p:nvSpPr>
-          <p:cNvPr id="4" name="Content Placeholder 3"/>
-          <p:cNvSpPr>
-            <a:spLocks noGrp="1"/>
-          </p:cNvSpPr>
-          <p:nvPr>
-            <p:ph idx="2" sz="half"/>
-          </p:nvPr>
-        </p:nvSpPr>
-        <p:spPr/>
-        <p:txBody>
-          <a:bodyPr/>
-          <a:lstStyle/>
-          <a:p>
-            <a:pPr lvl="0" indent="0" marL="0">
-              <a:buNone/>
-            </a:pPr>
-            <a:r>
-              <a:rPr b="1"/>
-              <a:t>How to read letters:</a:t>
-            </a:r>
-          </a:p>
-          <a:p>
-            <a:pPr lvl="0"/>
-            <a:r>
-              <a:rPr/>
-              <a:t>Same letter → </a:t>
-            </a:r>
-            <a:r>
-              <a:rPr b="1"/>
-              <a:t>not</a:t>
-            </a:r>
-            <a:r>
-              <a:rPr/>
-              <a:t> significantly different</a:t>
-            </a:r>
-          </a:p>
-          <a:p>
-            <a:pPr lvl="0"/>
-            <a:r>
-              <a:rPr/>
-              <a:t>Different letters → significantly different</a:t>
-            </a:r>
-          </a:p>
-          <a:p>
-            <a:pPr lvl="0" indent="0" marL="0">
-              <a:buNone/>
-            </a:pPr>
-            <a:r>
-              <a:rPr/>
-              <a:t>This is the compact summary you see in published figures — one letter above each bar.</a:t>
-            </a:r>
-          </a:p>
           <a:p>
             <a:pPr lvl="0" indent="0" marL="1270000">
               <a:buNone/>
@@ -4162,14 +4427,30 @@
               <a:buNone/>
             </a:pPr>
             <a:r>
+              <a:rPr sz="2000" b="1"/>
+              <a:t>For reference only — you do not run this today.</a:t>
+            </a:r>
+            <a:r>
               <a:rPr sz="2000"/>
-              <a:t>Install once: </a:t>
+              <a:t> The rank-based backup is </a:t>
             </a:r>
             <a:r>
               <a:rPr sz="2000">
                 <a:latin typeface="Courier"/>
               </a:rPr>
-              <a:t>install.packages("multcomp")</a:t>
+              <a:t>kruskal.test(body_mass_g ~ species, data = penguins_df)</a:t>
+            </a:r>
+            <a:r>
+              <a:rPr sz="2000"/>
+              <a:t> → χ² = 217.6, df = 2, </a:t>
+            </a:r>
+            <a:r>
+              <a:rPr sz="2000" i="1"/>
+              <a:t>p</a:t>
+            </a:r>
+            <a:r>
+              <a:rPr sz="2000"/>
+              <a:t> &lt; 0.001. Same answer again. When three different tests agree, you can stop worrying about which one you picked.</a:t>
             </a:r>
           </a:p>
         </p:txBody>
@@ -4208,9 +4489,12 @@
         </p:nvSpPr>
         <p:spPr>
           <a:xfrm>
-            <a:off x="139485" y="78119"/>
-            <a:ext cx="8229600" cy="607682"/>
+            <a:off x="0" y="0"/>
+            <a:ext cx="9144000" cy="602780"/>
           </a:xfrm>
+          <a:solidFill>
+            <a:srgbClr val="1A1A2E"/>
+          </a:solidFill>
         </p:spPr>
         <p:txBody>
           <a:bodyPr/>
@@ -4221,19 +4505,27 @@
             </a:pPr>
             <a:r>
               <a:rPr/>
-              <a:t>Plot the Result — Means ± CI</a:t>
-            </a:r>
-          </a:p>
-        </p:txBody>
-      </p:sp>
-      <p:sp>
-        <p:nvSpPr>
-          <p:cNvPr id="3" name="Text Placeholder 2"/>
-          <p:cNvSpPr>
-            <a:spLocks noGrp="1"/>
-          </p:cNvSpPr>
-          <p:nvPr>
-            <p:ph idx="1" type="body"/>
+              <a:t>What </a:t>
+            </a:r>
+            <a:r>
+              <a:rPr i="1"/>
+              <a:t>Would</a:t>
+            </a:r>
+            <a:r>
+              <a:rPr/>
+              <a:t> Change the Answer?</a:t>
+            </a:r>
+          </a:p>
+        </p:txBody>
+      </p:sp>
+      <p:sp>
+        <p:nvSpPr>
+          <p:cNvPr id="3" name="Content Placeholder 2"/>
+          <p:cNvSpPr>
+            <a:spLocks noGrp="1"/>
+          </p:cNvSpPr>
+          <p:nvPr>
+            <p:ph idx="1" sz="half"/>
           </p:nvPr>
         </p:nvSpPr>
         <p:spPr/>
@@ -4241,691 +4533,65 @@
           <a:bodyPr/>
           <a:lstStyle/>
           <a:p>
-            <a:pPr lvl="0" indent="0">
-              <a:buNone/>
-            </a:pPr>
-            <a:r>
-              <a:rPr>
-                <a:solidFill>
-                  <a:srgbClr val="003B4F"/>
-                </a:solidFill>
-                <a:latin typeface="Courier"/>
-              </a:rPr>
-              <a:t>mass_emm_plot &lt;- </a:t>
-            </a:r>
-            <a:r>
-              <a:rPr>
-                <a:solidFill>
-                  <a:srgbClr val="4758AB"/>
-                </a:solidFill>
-                <a:latin typeface="Courier"/>
-              </a:rPr>
-              <a:t>as.data.frame</a:t>
-            </a:r>
-            <a:r>
-              <a:rPr>
-                <a:solidFill>
-                  <a:srgbClr val="003B4F"/>
-                </a:solidFill>
-                <a:latin typeface="Courier"/>
-              </a:rPr>
-              <a:t>(mass_emm</a:t>
-            </a:r>
-            <a:r>
-              <a:rPr>
-                <a:solidFill>
-                  <a:srgbClr val="5E5E5E"/>
-                </a:solidFill>
-                <a:latin typeface="Courier"/>
-              </a:rPr>
-              <a:t>$</a:t>
-            </a:r>
-            <a:r>
-              <a:rPr>
-                <a:solidFill>
-                  <a:srgbClr val="003B4F"/>
-                </a:solidFill>
-                <a:latin typeface="Courier"/>
-              </a:rPr>
-              <a:t>emmeans) </a:t>
-            </a:r>
-            <a:r>
-              <a:rPr>
-                <a:solidFill>
-                  <a:srgbClr val="5E5E5E"/>
-                </a:solidFill>
-                <a:latin typeface="Courier"/>
-              </a:rPr>
-              <a:t>%&gt;%</a:t>
-            </a:r>
-            <a:br/>
-            <a:r>
-              <a:rPr>
-                <a:solidFill>
-                  <a:srgbClr val="003B4F"/>
-                </a:solidFill>
-                <a:latin typeface="Courier"/>
-              </a:rPr>
-              <a:t>  </a:t>
-            </a:r>
-            <a:r>
-              <a:rPr>
-                <a:solidFill>
-                  <a:srgbClr val="4758AB"/>
-                </a:solidFill>
-                <a:latin typeface="Courier"/>
-              </a:rPr>
-              <a:t>ggplot</a:t>
-            </a:r>
-            <a:r>
-              <a:rPr>
-                <a:solidFill>
-                  <a:srgbClr val="003B4F"/>
-                </a:solidFill>
-                <a:latin typeface="Courier"/>
-              </a:rPr>
-              <a:t>(</a:t>
-            </a:r>
-            <a:r>
-              <a:rPr>
-                <a:solidFill>
-                  <a:srgbClr val="4758AB"/>
-                </a:solidFill>
-                <a:latin typeface="Courier"/>
-              </a:rPr>
-              <a:t>aes</a:t>
-            </a:r>
-            <a:r>
-              <a:rPr>
-                <a:solidFill>
-                  <a:srgbClr val="003B4F"/>
-                </a:solidFill>
-                <a:latin typeface="Courier"/>
-              </a:rPr>
-              <a:t>(</a:t>
-            </a:r>
-            <a:r>
-              <a:rPr>
-                <a:solidFill>
-                  <a:srgbClr val="657422"/>
-                </a:solidFill>
-                <a:latin typeface="Courier"/>
-              </a:rPr>
-              <a:t>x =</a:t>
-            </a:r>
-            <a:r>
-              <a:rPr>
-                <a:solidFill>
-                  <a:srgbClr val="003B4F"/>
-                </a:solidFill>
-                <a:latin typeface="Courier"/>
-              </a:rPr>
-              <a:t> species, </a:t>
-            </a:r>
-            <a:r>
-              <a:rPr>
-                <a:solidFill>
-                  <a:srgbClr val="657422"/>
-                </a:solidFill>
-                <a:latin typeface="Courier"/>
-              </a:rPr>
-              <a:t>y =</a:t>
-            </a:r>
-            <a:r>
-              <a:rPr>
-                <a:solidFill>
-                  <a:srgbClr val="003B4F"/>
-                </a:solidFill>
-                <a:latin typeface="Courier"/>
-              </a:rPr>
-              <a:t> emmean, </a:t>
-            </a:r>
-            <a:r>
-              <a:rPr>
-                <a:solidFill>
-                  <a:srgbClr val="657422"/>
-                </a:solidFill>
-                <a:latin typeface="Courier"/>
-              </a:rPr>
-              <a:t>color =</a:t>
-            </a:r>
-            <a:r>
-              <a:rPr>
-                <a:solidFill>
-                  <a:srgbClr val="003B4F"/>
-                </a:solidFill>
-                <a:latin typeface="Courier"/>
-              </a:rPr>
-              <a:t> species)) </a:t>
-            </a:r>
-            <a:r>
-              <a:rPr>
-                <a:solidFill>
-                  <a:srgbClr val="5E5E5E"/>
-                </a:solidFill>
-                <a:latin typeface="Courier"/>
-              </a:rPr>
-              <a:t>+</a:t>
-            </a:r>
-            <a:br/>
-            <a:r>
-              <a:rPr>
-                <a:solidFill>
-                  <a:srgbClr val="003B4F"/>
-                </a:solidFill>
-                <a:latin typeface="Courier"/>
-              </a:rPr>
-              <a:t>  </a:t>
-            </a:r>
-            <a:r>
-              <a:rPr>
-                <a:solidFill>
-                  <a:srgbClr val="4758AB"/>
-                </a:solidFill>
-                <a:latin typeface="Courier"/>
-              </a:rPr>
-              <a:t>geom_point</a:t>
-            </a:r>
-            <a:r>
-              <a:rPr>
-                <a:solidFill>
-                  <a:srgbClr val="003B4F"/>
-                </a:solidFill>
-                <a:latin typeface="Courier"/>
-              </a:rPr>
-              <a:t>(</a:t>
-            </a:r>
-            <a:r>
-              <a:rPr>
-                <a:solidFill>
-                  <a:srgbClr val="657422"/>
-                </a:solidFill>
-                <a:latin typeface="Courier"/>
-              </a:rPr>
-              <a:t>size =</a:t>
-            </a:r>
-            <a:r>
-              <a:rPr>
-                <a:solidFill>
-                  <a:srgbClr val="003B4F"/>
-                </a:solidFill>
-                <a:latin typeface="Courier"/>
-              </a:rPr>
-              <a:t> </a:t>
-            </a:r>
-            <a:r>
-              <a:rPr>
-                <a:solidFill>
-                  <a:srgbClr val="AD0000"/>
-                </a:solidFill>
-                <a:latin typeface="Courier"/>
-              </a:rPr>
-              <a:t>3</a:t>
-            </a:r>
-            <a:r>
-              <a:rPr>
-                <a:solidFill>
-                  <a:srgbClr val="003B4F"/>
-                </a:solidFill>
-                <a:latin typeface="Courier"/>
-              </a:rPr>
-              <a:t>) </a:t>
-            </a:r>
-            <a:r>
-              <a:rPr>
-                <a:solidFill>
-                  <a:srgbClr val="5E5E5E"/>
-                </a:solidFill>
-                <a:latin typeface="Courier"/>
-              </a:rPr>
-              <a:t>+</a:t>
-            </a:r>
-            <a:br/>
-            <a:r>
-              <a:rPr>
-                <a:solidFill>
-                  <a:srgbClr val="003B4F"/>
-                </a:solidFill>
-                <a:latin typeface="Courier"/>
-              </a:rPr>
-              <a:t>  </a:t>
-            </a:r>
-            <a:r>
-              <a:rPr>
-                <a:solidFill>
-                  <a:srgbClr val="4758AB"/>
-                </a:solidFill>
-                <a:latin typeface="Courier"/>
-              </a:rPr>
-              <a:t>geom_errorbar</a:t>
-            </a:r>
-            <a:r>
-              <a:rPr>
-                <a:solidFill>
-                  <a:srgbClr val="003B4F"/>
-                </a:solidFill>
-                <a:latin typeface="Courier"/>
-              </a:rPr>
-              <a:t>(</a:t>
-            </a:r>
-            <a:br/>
-            <a:r>
-              <a:rPr>
-                <a:solidFill>
-                  <a:srgbClr val="003B4F"/>
-                </a:solidFill>
-                <a:latin typeface="Courier"/>
-              </a:rPr>
-              <a:t>    </a:t>
-            </a:r>
-            <a:r>
-              <a:rPr>
-                <a:solidFill>
-                  <a:srgbClr val="4758AB"/>
-                </a:solidFill>
-                <a:latin typeface="Courier"/>
-              </a:rPr>
-              <a:t>aes</a:t>
-            </a:r>
-            <a:r>
-              <a:rPr>
-                <a:solidFill>
-                  <a:srgbClr val="003B4F"/>
-                </a:solidFill>
-                <a:latin typeface="Courier"/>
-              </a:rPr>
-              <a:t>(</a:t>
-            </a:r>
-            <a:r>
-              <a:rPr>
-                <a:solidFill>
-                  <a:srgbClr val="657422"/>
-                </a:solidFill>
-                <a:latin typeface="Courier"/>
-              </a:rPr>
-              <a:t>ymin =</a:t>
-            </a:r>
-            <a:r>
-              <a:rPr>
-                <a:solidFill>
-                  <a:srgbClr val="003B4F"/>
-                </a:solidFill>
-                <a:latin typeface="Courier"/>
-              </a:rPr>
-              <a:t> lower.CL, </a:t>
-            </a:r>
-            <a:r>
-              <a:rPr>
-                <a:solidFill>
-                  <a:srgbClr val="657422"/>
-                </a:solidFill>
-                <a:latin typeface="Courier"/>
-              </a:rPr>
-              <a:t>ymax =</a:t>
-            </a:r>
-            <a:r>
-              <a:rPr>
-                <a:solidFill>
-                  <a:srgbClr val="003B4F"/>
-                </a:solidFill>
-                <a:latin typeface="Courier"/>
-              </a:rPr>
-              <a:t> upper.CL),</a:t>
-            </a:r>
-            <a:br/>
-            <a:r>
-              <a:rPr>
-                <a:solidFill>
-                  <a:srgbClr val="003B4F"/>
-                </a:solidFill>
-                <a:latin typeface="Courier"/>
-              </a:rPr>
-              <a:t>    </a:t>
-            </a:r>
-            <a:r>
-              <a:rPr>
-                <a:solidFill>
-                  <a:srgbClr val="657422"/>
-                </a:solidFill>
-                <a:latin typeface="Courier"/>
-              </a:rPr>
-              <a:t>width =</a:t>
-            </a:r>
-            <a:r>
-              <a:rPr>
-                <a:solidFill>
-                  <a:srgbClr val="003B4F"/>
-                </a:solidFill>
-                <a:latin typeface="Courier"/>
-              </a:rPr>
-              <a:t> </a:t>
-            </a:r>
-            <a:r>
-              <a:rPr>
-                <a:solidFill>
-                  <a:srgbClr val="AD0000"/>
-                </a:solidFill>
-                <a:latin typeface="Courier"/>
-              </a:rPr>
-              <a:t>0.15</a:t>
-            </a:r>
-            <a:r>
-              <a:rPr>
-                <a:solidFill>
-                  <a:srgbClr val="003B4F"/>
-                </a:solidFill>
-                <a:latin typeface="Courier"/>
-              </a:rPr>
-              <a:t>, </a:t>
-            </a:r>
-            <a:r>
-              <a:rPr>
-                <a:solidFill>
-                  <a:srgbClr val="657422"/>
-                </a:solidFill>
-                <a:latin typeface="Courier"/>
-              </a:rPr>
-              <a:t>linewidth =</a:t>
-            </a:r>
-            <a:r>
-              <a:rPr>
-                <a:solidFill>
-                  <a:srgbClr val="003B4F"/>
-                </a:solidFill>
-                <a:latin typeface="Courier"/>
-              </a:rPr>
-              <a:t> </a:t>
-            </a:r>
-            <a:r>
-              <a:rPr>
-                <a:solidFill>
-                  <a:srgbClr val="AD0000"/>
-                </a:solidFill>
-                <a:latin typeface="Courier"/>
-              </a:rPr>
-              <a:t>0.9</a:t>
-            </a:r>
-            <a:br/>
-            <a:r>
-              <a:rPr>
-                <a:solidFill>
-                  <a:srgbClr val="003B4F"/>
-                </a:solidFill>
-                <a:latin typeface="Courier"/>
-              </a:rPr>
-              <a:t>  ) </a:t>
-            </a:r>
-            <a:r>
-              <a:rPr>
-                <a:solidFill>
-                  <a:srgbClr val="5E5E5E"/>
-                </a:solidFill>
-                <a:latin typeface="Courier"/>
-              </a:rPr>
-              <a:t>+</a:t>
-            </a:r>
-            <a:br/>
-            <a:r>
-              <a:rPr>
-                <a:solidFill>
-                  <a:srgbClr val="003B4F"/>
-                </a:solidFill>
-                <a:latin typeface="Courier"/>
-              </a:rPr>
-              <a:t>  </a:t>
-            </a:r>
-            <a:r>
-              <a:rPr>
-                <a:solidFill>
-                  <a:srgbClr val="4758AB"/>
-                </a:solidFill>
-                <a:latin typeface="Courier"/>
-              </a:rPr>
-              <a:t>labs</a:t>
-            </a:r>
-            <a:r>
-              <a:rPr>
-                <a:solidFill>
-                  <a:srgbClr val="003B4F"/>
-                </a:solidFill>
-                <a:latin typeface="Courier"/>
-              </a:rPr>
-              <a:t>(</a:t>
-            </a:r>
-            <a:r>
-              <a:rPr>
-                <a:solidFill>
-                  <a:srgbClr val="657422"/>
-                </a:solidFill>
-                <a:latin typeface="Courier"/>
-              </a:rPr>
-              <a:t>x =</a:t>
-            </a:r>
-            <a:r>
-              <a:rPr>
-                <a:solidFill>
-                  <a:srgbClr val="003B4F"/>
-                </a:solidFill>
-                <a:latin typeface="Courier"/>
-              </a:rPr>
-              <a:t> </a:t>
-            </a:r>
-            <a:r>
-              <a:rPr>
-                <a:solidFill>
-                  <a:srgbClr val="20794D"/>
-                </a:solidFill>
-                <a:latin typeface="Courier"/>
-              </a:rPr>
-              <a:t>"Species"</a:t>
-            </a:r>
-            <a:r>
-              <a:rPr>
-                <a:solidFill>
-                  <a:srgbClr val="003B4F"/>
-                </a:solidFill>
-                <a:latin typeface="Courier"/>
-              </a:rPr>
-              <a:t>, </a:t>
-            </a:r>
-            <a:r>
-              <a:rPr>
-                <a:solidFill>
-                  <a:srgbClr val="657422"/>
-                </a:solidFill>
-                <a:latin typeface="Courier"/>
-              </a:rPr>
-              <a:t>y =</a:t>
-            </a:r>
-            <a:r>
-              <a:rPr>
-                <a:solidFill>
-                  <a:srgbClr val="003B4F"/>
-                </a:solidFill>
-                <a:latin typeface="Courier"/>
-              </a:rPr>
-              <a:t> </a:t>
-            </a:r>
-            <a:r>
-              <a:rPr>
-                <a:solidFill>
-                  <a:srgbClr val="20794D"/>
-                </a:solidFill>
-                <a:latin typeface="Courier"/>
-              </a:rPr>
-              <a:t>"Estimated mean mass (g)"</a:t>
-            </a:r>
-            <a:r>
-              <a:rPr>
-                <a:solidFill>
-                  <a:srgbClr val="003B4F"/>
-                </a:solidFill>
-                <a:latin typeface="Courier"/>
-              </a:rPr>
-              <a:t>) </a:t>
-            </a:r>
-            <a:r>
-              <a:rPr>
-                <a:solidFill>
-                  <a:srgbClr val="5E5E5E"/>
-                </a:solidFill>
-                <a:latin typeface="Courier"/>
-              </a:rPr>
-              <a:t>+</a:t>
-            </a:r>
-            <a:br/>
-            <a:r>
-              <a:rPr>
-                <a:solidFill>
-                  <a:srgbClr val="003B4F"/>
-                </a:solidFill>
-                <a:latin typeface="Courier"/>
-              </a:rPr>
-              <a:t>  </a:t>
-            </a:r>
-            <a:r>
-              <a:rPr>
-                <a:solidFill>
-                  <a:srgbClr val="4758AB"/>
-                </a:solidFill>
-                <a:latin typeface="Courier"/>
-              </a:rPr>
-              <a:t>theme_minimal</a:t>
-            </a:r>
-            <a:r>
-              <a:rPr>
-                <a:solidFill>
-                  <a:srgbClr val="003B4F"/>
-                </a:solidFill>
-                <a:latin typeface="Courier"/>
-              </a:rPr>
-              <a:t>() </a:t>
-            </a:r>
-            <a:r>
-              <a:rPr>
-                <a:solidFill>
-                  <a:srgbClr val="5E5E5E"/>
-                </a:solidFill>
-                <a:latin typeface="Courier"/>
-              </a:rPr>
-              <a:t>+</a:t>
-            </a:r>
-            <a:br/>
-            <a:r>
-              <a:rPr>
-                <a:solidFill>
-                  <a:srgbClr val="003B4F"/>
-                </a:solidFill>
-                <a:latin typeface="Courier"/>
-              </a:rPr>
-              <a:t>  </a:t>
-            </a:r>
-            <a:r>
-              <a:rPr>
-                <a:solidFill>
-                  <a:srgbClr val="4758AB"/>
-                </a:solidFill>
-                <a:latin typeface="Courier"/>
-              </a:rPr>
-              <a:t>theme</a:t>
-            </a:r>
-            <a:r>
-              <a:rPr>
-                <a:solidFill>
-                  <a:srgbClr val="003B4F"/>
-                </a:solidFill>
-                <a:latin typeface="Courier"/>
-              </a:rPr>
-              <a:t>(</a:t>
-            </a:r>
-            <a:r>
-              <a:rPr>
-                <a:solidFill>
-                  <a:srgbClr val="657422"/>
-                </a:solidFill>
-                <a:latin typeface="Courier"/>
-              </a:rPr>
-              <a:t>legend.position =</a:t>
-            </a:r>
-            <a:r>
-              <a:rPr>
-                <a:solidFill>
-                  <a:srgbClr val="003B4F"/>
-                </a:solidFill>
-                <a:latin typeface="Courier"/>
-              </a:rPr>
-              <a:t> </a:t>
-            </a:r>
-            <a:r>
-              <a:rPr>
-                <a:solidFill>
-                  <a:srgbClr val="20794D"/>
-                </a:solidFill>
-                <a:latin typeface="Courier"/>
-              </a:rPr>
-              <a:t>"none"</a:t>
-            </a:r>
-            <a:r>
-              <a:rPr>
-                <a:solidFill>
-                  <a:srgbClr val="003B4F"/>
-                </a:solidFill>
-                <a:latin typeface="Courier"/>
-              </a:rPr>
-              <a:t>)</a:t>
-            </a:r>
-            <a:br/>
-            <a:br/>
-            <a:r>
-              <a:rPr>
-                <a:solidFill>
-                  <a:srgbClr val="003B4F"/>
-                </a:solidFill>
-                <a:latin typeface="Courier"/>
-              </a:rPr>
-              <a:t>mass_emm_plot</a:t>
-            </a:r>
-          </a:p>
-        </p:txBody>
-      </p:sp>
-      <p:pic>
-        <p:nvPicPr>
-          <p:cNvPr descr="one_way_anova_2_lecture_files/figure-pptx/emmeans-plot-11-1.png" id="0" name="Picture 1"/>
-          <p:cNvPicPr>
-            <a:picLocks noGrp="1" noChangeAspect="1"/>
-          </p:cNvPicPr>
-          <p:nvPr/>
-        </p:nvPicPr>
-        <p:blipFill>
-          <a:blip r:embed="rId2"/>
-          <a:stretch>
-            <a:fillRect/>
-          </a:stretch>
-        </p:blipFill>
-        <p:spPr bwMode="auto">
-          <a:xfrm>
-            <a:off x="127000" y="1930400"/>
-            <a:ext cx="4432300" cy="1981200"/>
-          </a:xfrm>
-          <a:prstGeom prst="rect">
-            <a:avLst/>
-          </a:prstGeom>
-          <a:noFill/>
-          <a:ln w="9525">
-            <a:noFill/>
-            <a:headEnd/>
-            <a:tailEnd/>
-          </a:ln>
-        </p:spPr>
-      </p:pic>
-      <p:sp>
-        <p:nvSpPr>
-          <p:cNvPr id="5" name="Text Placeholder 4"/>
-          <p:cNvSpPr>
-            <a:spLocks noGrp="1"/>
-          </p:cNvSpPr>
-          <p:nvPr>
-            <p:ph idx="3" sz="quarter" type="body"/>
+            <a:pPr lvl="0" indent="0" marL="0">
+              <a:buNone/>
+            </a:pPr>
+            <a:r>
+              <a:rPr/>
+              <a:t>Here all three tests say </a:t>
+            </a:r>
+            <a:r>
+              <a:rPr i="1"/>
+              <a:t>p</a:t>
+            </a:r>
+            <a:r>
+              <a:rPr/>
+              <a:t> &lt; 0.001, so the violated assumption cost us nothing.</a:t>
+            </a:r>
+          </a:p>
+          <a:p>
+            <a:pPr lvl="0" indent="0" marL="0">
+              <a:buNone/>
+            </a:pPr>
+            <a:r>
+              <a:rPr/>
+              <a:t>That is </a:t>
+            </a:r>
+            <a:r>
+              <a:rPr b="1"/>
+              <a:t>not</a:t>
+            </a:r>
+            <a:r>
+              <a:rPr/>
+              <a:t> a reason to skip the check. Unequal variance with unequal n can push a </a:t>
+            </a:r>
+            <a:r>
+              <a:rPr i="1"/>
+              <a:t>p</a:t>
+            </a:r>
+            <a:r>
+              <a:rPr/>
+              <a:t>-value across 0.05 in either direction — you only know which case you are in </a:t>
+            </a:r>
+            <a:r>
+              <a:rPr b="1"/>
+              <a:t>after</a:t>
+            </a:r>
+            <a:r>
+              <a:rPr/>
+              <a:t> you look.</a:t>
+            </a:r>
+          </a:p>
+        </p:txBody>
+      </p:sp>
+      <p:sp>
+        <p:nvSpPr>
+          <p:cNvPr id="4" name="Content Placeholder 3"/>
+          <p:cNvSpPr>
+            <a:spLocks noGrp="1"/>
+          </p:cNvSpPr>
+          <p:nvPr>
+            <p:ph idx="2" sz="half"/>
           </p:nvPr>
         </p:nvSpPr>
         <p:spPr/>
@@ -4933,39 +4599,46 @@
           <a:bodyPr/>
           <a:lstStyle/>
           <a:p>
-            <a:pPr lvl="0" indent="0" marL="0">
-              <a:buNone/>
-            </a:pPr>
-            <a:r>
-              <a:rPr b="1"/>
-              <a:t>Estimated marginal means</a:t>
-            </a:r>
-            <a:r>
-              <a:rPr/>
-              <a:t> with 95% confidence intervals.</a:t>
-            </a:r>
-          </a:p>
-          <a:p>
-            <a:pPr lvl="0"/>
-            <a:r>
-              <a:rPr/>
-              <a:t>Non-overlapping intervals hint at real differences</a:t>
-            </a:r>
-          </a:p>
-          <a:p>
-            <a:pPr lvl="0"/>
-            <a:r>
-              <a:rPr/>
-              <a:t>Pair this plot with the letters for a publication-ready figure</a:t>
-            </a:r>
-          </a:p>
-          <a:p>
-            <a:pPr lvl="0" indent="0" marL="0">
-              <a:buNone/>
-            </a:pPr>
-            <a:r>
-              <a:rPr/>
-              <a:t>The emmeans plot is the ANOVA cousin of Lecture 03’s mean ± SE plot.</a:t>
+            <a:pPr lvl="0" indent="0" marL="1270000">
+              <a:buNone/>
+            </a:pPr>
+            <a:r>
+              <a:rPr sz="2000" b="1"/>
+              <a:t>Important</a:t>
+            </a:r>
+          </a:p>
+          <a:p>
+            <a:pPr lvl="0" indent="0" marL="1270000">
+              <a:buNone/>
+            </a:pPr>
+            <a:r>
+              <a:rPr sz="2000" b="1"/>
+              <a:t>The rule for this course</a:t>
+            </a:r>
+          </a:p>
+          <a:p>
+            <a:pPr lvl="0" indent="0" marL="1270000">
+              <a:buNone/>
+            </a:pPr>
+            <a:r>
+              <a:rPr sz="2000"/>
+              <a:t>Check → decide → test → report </a:t>
+            </a:r>
+            <a:r>
+              <a:rPr sz="2000" i="1"/>
+              <a:t>the test you decided on</a:t>
+            </a:r>
+            <a:r>
+              <a:rPr sz="2000"/>
+              <a:t>. Not “run everything and report the smallest </a:t>
+            </a:r>
+            <a:r>
+              <a:rPr sz="2000" i="1"/>
+              <a:t>p</a:t>
+            </a:r>
+            <a:r>
+              <a:rPr sz="2000"/>
+              <a:t>.”</a:t>
             </a:r>
           </a:p>
         </p:txBody>
@@ -5020,7 +4693,15 @@
             </a:pPr>
             <a:r>
               <a:rPr/>
-              <a:t>How to Report an ANOVA</a:t>
+              <a:t>🧩 Set 3 · Follow-Up Tests — </a:t>
+            </a:r>
+            <a:r>
+              <a:rPr i="1"/>
+              <a:t>Which</a:t>
+            </a:r>
+            <a:r>
+              <a:rPr/>
+              <a:t> Groups Differ?</a:t>
             </a:r>
           </a:p>
         </p:txBody>
@@ -5040,199 +4721,110 @@
           <a:bodyPr/>
           <a:lstStyle/>
           <a:p>
-            <a:pPr lvl="0" indent="0">
-              <a:buNone/>
-            </a:pPr>
-            <a:r>
-              <a:rPr>
-                <a:solidFill>
-                  <a:srgbClr val="5E5E5E"/>
-                </a:solidFill>
-                <a:latin typeface="Courier"/>
-              </a:rPr>
-              <a:t># Pull the F table values for reporting ---------------</a:t>
-            </a:r>
-            <a:br/>
-            <a:r>
-              <a:rPr>
-                <a:solidFill>
-                  <a:srgbClr val="003B4F"/>
-                </a:solidFill>
-                <a:latin typeface="Courier"/>
-              </a:rPr>
-              <a:t>mass_tab &lt;- </a:t>
-            </a:r>
-            <a:r>
-              <a:rPr>
-                <a:solidFill>
-                  <a:srgbClr val="4758AB"/>
-                </a:solidFill>
-                <a:latin typeface="Courier"/>
-              </a:rPr>
-              <a:t>Anova</a:t>
-            </a:r>
-            <a:r>
-              <a:rPr>
-                <a:solidFill>
-                  <a:srgbClr val="003B4F"/>
-                </a:solidFill>
-                <a:latin typeface="Courier"/>
-              </a:rPr>
-              <a:t>(mass_model, </a:t>
-            </a:r>
-            <a:r>
-              <a:rPr>
-                <a:solidFill>
-                  <a:srgbClr val="657422"/>
-                </a:solidFill>
-                <a:latin typeface="Courier"/>
-              </a:rPr>
-              <a:t>type =</a:t>
-            </a:r>
-            <a:r>
-              <a:rPr>
-                <a:solidFill>
-                  <a:srgbClr val="003B4F"/>
-                </a:solidFill>
-                <a:latin typeface="Courier"/>
-              </a:rPr>
-              <a:t> </a:t>
-            </a:r>
-            <a:r>
-              <a:rPr>
-                <a:solidFill>
-                  <a:srgbClr val="20794D"/>
-                </a:solidFill>
-                <a:latin typeface="Courier"/>
-              </a:rPr>
-              <a:t>"II"</a:t>
-            </a:r>
-            <a:r>
-              <a:rPr>
-                <a:solidFill>
-                  <a:srgbClr val="003B4F"/>
-                </a:solidFill>
-                <a:latin typeface="Courier"/>
-              </a:rPr>
-              <a:t>)</a:t>
-            </a:r>
-            <a:br/>
-            <a:r>
-              <a:rPr>
-                <a:solidFill>
-                  <a:srgbClr val="003B4F"/>
-                </a:solidFill>
-                <a:latin typeface="Courier"/>
-              </a:rPr>
-              <a:t>mass_tab</a:t>
-            </a:r>
-          </a:p>
-          <a:p>
-            <a:pPr lvl="0" indent="0">
-              <a:buNone/>
-            </a:pPr>
-            <a:r>
-              <a:rPr>
-                <a:latin typeface="Courier"/>
-              </a:rPr>
-              <a:t>Anova Table (Type II tests)
-Response: body_mass_g
-             Sum Sq  Df F value    Pr(&gt;F)    
-species   146864214   2  343.63 &lt; 2.2e-16 ***
-Residuals  72443483 339                      
----
-Signif. codes:  0 '***' 0.001 '**' 0.01 '*' 0.05 '.' 0.1 ' ' 1</a:t>
-            </a:r>
-          </a:p>
+            <a:pPr lvl="0" indent="0" marL="0">
+              <a:buNone/>
+            </a:pPr>
+            <a:r>
+              <a:rPr/>
+              <a:t>The F-test said “at least one species differs.” Look back at the boxplot:</a:t>
+            </a:r>
+          </a:p>
+          <a:p>
+            <a:pPr lvl="0"/>
+            <a:r>
+              <a:rPr b="1"/>
+              <a:t>Gentoo</a:t>
+            </a:r>
+            <a:r>
+              <a:rPr/>
+              <a:t> is obviously above the others</a:t>
+            </a:r>
+          </a:p>
+          <a:p>
+            <a:pPr lvl="0"/>
+            <a:r>
+              <a:rPr b="1"/>
+              <a:t>Adelie and Chinstrap</a:t>
+            </a:r>
+            <a:r>
+              <a:rPr/>
+              <a:t> sit almost on top of each other</a:t>
+            </a:r>
+          </a:p>
+          <a:p>
+            <a:pPr lvl="0" indent="0" marL="0">
+              <a:buNone/>
+            </a:pPr>
+            <a:r>
+              <a:rPr/>
+              <a:t>A single </a:t>
+            </a:r>
+            <a:r>
+              <a:rPr i="1"/>
+              <a:t>p</a:t>
+            </a:r>
+            <a:r>
+              <a:rPr/>
+              <a:t> &lt; 0.001 is perfectly consistent with </a:t>
+            </a:r>
+            <a:r>
+              <a:rPr i="1"/>
+              <a:t>Gentoo differs, the other two do not.</a:t>
+            </a:r>
+            <a:r>
+              <a:rPr/>
+              <a:t> The F-test cannot tell those stories apart.</a:t>
+            </a:r>
+          </a:p>
+        </p:txBody>
+      </p:sp>
+      <p:sp>
+        <p:nvSpPr>
+          <p:cNvPr id="4" name="Content Placeholder 3"/>
+          <p:cNvSpPr>
+            <a:spLocks noGrp="1"/>
+          </p:cNvSpPr>
+          <p:nvPr>
+            <p:ph idx="2" sz="half"/>
+          </p:nvPr>
+        </p:nvSpPr>
+        <p:spPr/>
+        <p:txBody>
+          <a:bodyPr/>
+          <a:lstStyle/>
           <a:p>
             <a:pPr lvl="0" indent="0" marL="1270000">
               <a:buNone/>
             </a:pPr>
             <a:r>
-              <a:rPr sz="2000" i="1"/>
-              <a:t>“Body mass differed significantly among the three penguin species (one-way ANOVA: F(2, 339) = 343.6, p &lt; 0.001). Tukey-adjusted comparisons showed all three species differed, with Gentoo heaviest and Adelie lightest.”</a:t>
-            </a:r>
-          </a:p>
-        </p:txBody>
-      </p:sp>
-      <p:sp>
-        <p:nvSpPr>
-          <p:cNvPr id="4" name="Content Placeholder 3"/>
-          <p:cNvSpPr>
-            <a:spLocks noGrp="1"/>
-          </p:cNvSpPr>
-          <p:nvPr>
-            <p:ph idx="2" sz="half"/>
-          </p:nvPr>
-        </p:nvSpPr>
-        <p:spPr/>
-        <p:txBody>
-          <a:bodyPr/>
-          <a:lstStyle/>
-          <a:p>
-            <a:pPr lvl="0" indent="0" marL="0">
-              <a:buNone/>
-            </a:pPr>
-            <a:r>
-              <a:rPr b="1"/>
-              <a:t>Always include:</a:t>
-            </a:r>
-          </a:p>
-          <a:p>
-            <a:pPr lvl="0"/>
-            <a:r>
-              <a:rPr/>
-              <a:t>Test type (one-way ANOVA)</a:t>
-            </a:r>
-          </a:p>
-          <a:p>
-            <a:pPr lvl="0"/>
-            <a:r>
-              <a:rPr b="1"/>
-              <a:t>F</a:t>
-            </a:r>
-            <a:r>
-              <a:rPr/>
-              <a:t>, both </a:t>
-            </a:r>
-            <a:r>
-              <a:rPr b="1"/>
-              <a:t>df</a:t>
-            </a:r>
-            <a:r>
-              <a:rPr/>
-              <a:t>, and the </a:t>
-            </a:r>
-            <a:r>
-              <a:rPr b="1"/>
-              <a:t>p-value</a:t>
-            </a:r>
-          </a:p>
-          <a:p>
-            <a:pPr lvl="0"/>
-            <a:r>
-              <a:rPr/>
-              <a:t>The post-hoc result (which groups differ)</a:t>
-            </a:r>
-          </a:p>
-          <a:p>
-            <a:pPr lvl="0"/>
-            <a:r>
-              <a:rPr/>
-              <a:t>Group means ± SE or CI</a:t>
-            </a:r>
-          </a:p>
-          <a:p>
-            <a:pPr lvl="0" indent="0" marL="0">
-              <a:buNone/>
-            </a:pPr>
-            <a:r>
-              <a:rPr b="1"/>
-              <a:t>Never</a:t>
-            </a:r>
-            <a:r>
-              <a:rPr/>
-              <a:t> write “p = 0.000” — use “p &lt; 0.001”.</a:t>
+              <a:rPr sz="2000" b="1"/>
+              <a:t>Note</a:t>
+            </a:r>
+          </a:p>
+          <a:p>
+            <a:pPr lvl="0" indent="0" marL="1270000">
+              <a:buNone/>
+            </a:pPr>
+            <a:r>
+              <a:rPr sz="2000" b="1"/>
+              <a:t>✅ Key idea</a:t>
+            </a:r>
+          </a:p>
+          <a:p>
+            <a:pPr lvl="0" indent="0" marL="1270000">
+              <a:buNone/>
+            </a:pPr>
+            <a:r>
+              <a:rPr sz="2000"/>
+              <a:t>A significant F licenses you to go looking. It does </a:t>
+            </a:r>
+            <a:r>
+              <a:rPr sz="2000" b="1"/>
+              <a:t>not</a:t>
+            </a:r>
+            <a:r>
+              <a:rPr sz="2000"/>
+              <a:t> tell you what you will find.</a:t>
             </a:r>
           </a:p>
         </p:txBody>
@@ -5272,8 +4864,11 @@
         <p:spPr>
           <a:xfrm>
             <a:off x="0" y="0"/>
-            <a:ext cx="9144000" cy="582780"/>
+            <a:ext cx="9144000" cy="602780"/>
           </a:xfrm>
+          <a:solidFill>
+            <a:srgbClr val="1A1A2E"/>
+          </a:solidFill>
         </p:spPr>
         <p:txBody>
           <a:bodyPr/>
@@ -5284,7 +4879,7 @@
             </a:pPr>
             <a:r>
               <a:rPr/>
-              <a:t>🛑 Pause — Do Activity Parts 9–11 Now</a:t>
+              <a:t>Why Not Just Run the Three t-Tests Now?</a:t>
             </a:r>
           </a:p>
         </p:txBody>
@@ -5296,7 +4891,7 @@
             <a:spLocks noGrp="1"/>
           </p:cNvSpPr>
           <p:nvPr>
-            <p:ph idx="1"/>
+            <p:ph idx="1" sz="half"/>
           </p:nvPr>
         </p:nvSpPr>
         <p:spPr/>
@@ -5309,7 +4904,115 @@
             </a:pPr>
             <a:r>
               <a:rPr/>
-              <a:t>Run the emmeans pairwise test, get the letters, plot the means ± CI, and write your results sentence. Predict which species differ before you run the comparisons.</a:t>
+              <a:t>Because that is the problem we opened Lecture 19 with — three tests at α = 0.05 gives ~14% chance of a false positive.</a:t>
+            </a:r>
+          </a:p>
+          <a:p>
+            <a:pPr lvl="0" indent="0" marL="0">
+              <a:buNone/>
+            </a:pPr>
+            <a:r>
+              <a:rPr/>
+              <a:t>A </a:t>
+            </a:r>
+            <a:r>
+              <a:rPr b="1"/>
+              <a:t>post-hoc</a:t>
+            </a:r>
+            <a:r>
+              <a:rPr/>
+              <a:t> (after-the-fact) test does the three comparisons </a:t>
+            </a:r>
+            <a:r>
+              <a:rPr b="1"/>
+              <a:t>and</a:t>
+            </a:r>
+            <a:r>
+              <a:rPr/>
+              <a:t> adjusts the </a:t>
+            </a:r>
+            <a:r>
+              <a:rPr i="1"/>
+              <a:t>p</a:t>
+            </a:r>
+            <a:r>
+              <a:rPr/>
+              <a:t>-values so the family-wise error rate stays at 0.05.</a:t>
+            </a:r>
+          </a:p>
+          <a:p>
+            <a:pPr lvl="0" indent="0" marL="0">
+              <a:buNone/>
+            </a:pPr>
+            <a:r>
+              <a:rPr/>
+              <a:t>The standard adjustment for all-pairs comparisons is </a:t>
+            </a:r>
+            <a:r>
+              <a:rPr b="1"/>
+              <a:t>Tukey’s HSD</a:t>
+            </a:r>
+            <a:r>
+              <a:rPr/>
+              <a:t>.</a:t>
+            </a:r>
+          </a:p>
+        </p:txBody>
+      </p:sp>
+      <p:sp>
+        <p:nvSpPr>
+          <p:cNvPr id="4" name="Content Placeholder 3"/>
+          <p:cNvSpPr>
+            <a:spLocks noGrp="1"/>
+          </p:cNvSpPr>
+          <p:nvPr>
+            <p:ph idx="2" sz="half"/>
+          </p:nvPr>
+        </p:nvSpPr>
+        <p:spPr/>
+        <p:txBody>
+          <a:bodyPr/>
+          <a:lstStyle/>
+          <a:p>
+            <a:pPr lvl="0" indent="0" marL="1270000">
+              <a:buNone/>
+            </a:pPr>
+            <a:r>
+              <a:rPr sz="2000" b="1"/>
+              <a:t>Important</a:t>
+            </a:r>
+          </a:p>
+          <a:p>
+            <a:pPr lvl="0" indent="0" marL="1270000">
+              <a:buNone/>
+            </a:pPr>
+            <a:r>
+              <a:rPr sz="2000"/>
+              <a:t>“Tukey-adjusted” means the </a:t>
+            </a:r>
+            <a:r>
+              <a:rPr sz="2000" i="1"/>
+              <a:t>p</a:t>
+            </a:r>
+            <a:r>
+              <a:rPr sz="2000"/>
+              <a:t>-values printed have </a:t>
+            </a:r>
+            <a:r>
+              <a:rPr sz="2000" b="1"/>
+              <a:t>already</a:t>
+            </a:r>
+            <a:r>
+              <a:rPr sz="2000"/>
+              <a:t> been corrected. You compare them with 0.05 directly — you do </a:t>
+            </a:r>
+            <a:r>
+              <a:rPr sz="2000" b="1"/>
+              <a:t>not</a:t>
+            </a:r>
+            <a:r>
+              <a:rPr sz="2000"/>
+              <a:t> divide anything.</a:t>
             </a:r>
           </a:p>
         </p:txBody>
@@ -5349,11 +5052,8 @@
         <p:spPr>
           <a:xfrm>
             <a:off x="0" y="0"/>
-            <a:ext cx="9144000" cy="602780"/>
+            <a:ext cx="9144000" cy="582780"/>
           </a:xfrm>
-          <a:solidFill>
-            <a:srgbClr val="1A1A2E"/>
-          </a:solidFill>
         </p:spPr>
         <p:txBody>
           <a:bodyPr/>
@@ -5364,7 +5064,13 @@
             </a:pPr>
             <a:r>
               <a:rPr/>
-              <a:t>What We Learned Today</a:t>
+              <a:t>Pairwise Comparisons with </a:t>
+            </a:r>
+            <a:r>
+              <a:rPr>
+                <a:latin typeface="Courier"/>
+              </a:rPr>
+              <a:t>emmeans</a:t>
             </a:r>
           </a:p>
         </p:txBody>
@@ -5376,6 +5082,74 @@
             <a:spLocks noGrp="1"/>
           </p:cNvSpPr>
           <p:nvPr>
+            <p:ph idx="1"/>
+          </p:nvPr>
+        </p:nvSpPr>
+        <p:spPr/>
+        <p:txBody>
+          <a:bodyPr/>
+          <a:lstStyle/>
+          <a:p>
+            <a:pPr lvl="0" indent="0" marL="1270000">
+              <a:buNone/>
+            </a:pPr>
+            <a:r>
+              <a:rPr sz="2000" b="1"/>
+              <a:t>Note</a:t>
+            </a:r>
+          </a:p>
+          <a:p>
+            <a:pPr lvl="0" indent="0" marL="1270000">
+              <a:buNone/>
+            </a:pPr>
+            <a:r>
+              <a:rPr sz="2000" b="1"/>
+              <a:t>🔮 Predict first:</a:t>
+            </a:r>
+            <a:r>
+              <a:rPr sz="2000"/>
+              <a:t> will </a:t>
+            </a:r>
+            <a:r>
+              <a:rPr sz="2000" b="1"/>
+              <a:t>all three</a:t>
+            </a:r>
+            <a:r>
+              <a:rPr sz="2000"/>
+              <a:t> species differ from each other, or will two be statistically tied?</a:t>
+            </a:r>
+          </a:p>
+        </p:txBody>
+      </p:sp>
+    </p:spTree>
+  </p:cSld>
+</p:sld>
+</file>
+
+<file path=ppt/slides/slide19.xml><?xml version="1.0" encoding="utf-8"?>
+<p:sld xmlns:a="http://schemas.openxmlformats.org/drawingml/2006/main" xmlns:r="http://schemas.openxmlformats.org/officeDocument/2006/relationships" xmlns:p="http://schemas.openxmlformats.org/presentationml/2006/main">
+  <p:cSld>
+    <p:spTree>
+      <p:nvGrpSpPr>
+        <p:cNvPr id="1" name=""/>
+        <p:cNvGrpSpPr/>
+        <p:nvPr/>
+      </p:nvGrpSpPr>
+      <p:grpSpPr>
+        <a:xfrm>
+          <a:off x="0" y="0"/>
+          <a:ext cx="0" cy="0"/>
+          <a:chOff x="0" y="0"/>
+          <a:chExt cx="0" cy="0"/>
+        </a:xfrm>
+      </p:grpSpPr>
+      <p:sp>
+        <p:nvSpPr>
+          <p:cNvPr id="3" name="Content Placeholder 2"/>
+          <p:cNvSpPr>
+            <a:spLocks noGrp="1"/>
+          </p:cNvSpPr>
+          <p:nvPr>
             <p:ph idx="1" sz="half"/>
           </p:nvPr>
         </p:nvSpPr>
@@ -5384,189 +5158,219 @@
           <a:bodyPr/>
           <a:lstStyle/>
           <a:p>
+            <a:pPr lvl="0" indent="0">
+              <a:buNone/>
+            </a:pPr>
+            <a:r>
+              <a:rPr>
+                <a:solidFill>
+                  <a:srgbClr val="5E5E5E"/>
+                </a:solidFill>
+                <a:latin typeface="Courier"/>
+              </a:rPr>
+              <a:t># Estimated means + every pairwise comparison ---------</a:t>
+            </a:r>
+            <a:br/>
+            <a:r>
+              <a:rPr>
+                <a:solidFill>
+                  <a:srgbClr val="003B4F"/>
+                </a:solidFill>
+                <a:latin typeface="Courier"/>
+              </a:rPr>
+              <a:t>mass_emm &lt;- </a:t>
+            </a:r>
+            <a:r>
+              <a:rPr>
+                <a:solidFill>
+                  <a:srgbClr val="4758AB"/>
+                </a:solidFill>
+                <a:latin typeface="Courier"/>
+              </a:rPr>
+              <a:t>emmeans</a:t>
+            </a:r>
+            <a:r>
+              <a:rPr>
+                <a:solidFill>
+                  <a:srgbClr val="003B4F"/>
+                </a:solidFill>
+                <a:latin typeface="Courier"/>
+              </a:rPr>
+              <a:t>(mass_model, pairwise </a:t>
+            </a:r>
+            <a:r>
+              <a:rPr>
+                <a:solidFill>
+                  <a:srgbClr val="5E5E5E"/>
+                </a:solidFill>
+                <a:latin typeface="Courier"/>
+              </a:rPr>
+              <a:t>~</a:t>
+            </a:r>
+            <a:r>
+              <a:rPr>
+                <a:solidFill>
+                  <a:srgbClr val="003B4F"/>
+                </a:solidFill>
+                <a:latin typeface="Courier"/>
+              </a:rPr>
+              <a:t> species)</a:t>
+            </a:r>
+            <a:br/>
+            <a:br/>
+            <a:r>
+              <a:rPr>
+                <a:solidFill>
+                  <a:srgbClr val="003B4F"/>
+                </a:solidFill>
+                <a:latin typeface="Courier"/>
+              </a:rPr>
+              <a:t>mass_emm</a:t>
+            </a:r>
+            <a:r>
+              <a:rPr>
+                <a:solidFill>
+                  <a:srgbClr val="5E5E5E"/>
+                </a:solidFill>
+                <a:latin typeface="Courier"/>
+              </a:rPr>
+              <a:t>$</a:t>
+            </a:r>
+            <a:r>
+              <a:rPr>
+                <a:solidFill>
+                  <a:srgbClr val="003B4F"/>
+                </a:solidFill>
+                <a:latin typeface="Courier"/>
+              </a:rPr>
+              <a:t>contrasts</a:t>
+            </a:r>
+          </a:p>
+          <a:p>
+            <a:pPr lvl="0" indent="0">
+              <a:buNone/>
+            </a:pPr>
+            <a:r>
+              <a:rPr>
+                <a:latin typeface="Courier"/>
+              </a:rPr>
+              <a:t> contrast           estimate   SE  df t.ratio p.value
+ Adelie - Chinstrap    -32.4 67.5 339  -0.480  0.8807
+ Adelie - Gentoo     -1375.4 56.1 339 -24.495 &lt;0.0001
+ Chinstrap - Gentoo  -1342.9 69.9 339 -19.224 &lt;0.0001
+P value adjustment: tukey method for comparing a family of 3 estimates </a:t>
+            </a:r>
+          </a:p>
+        </p:txBody>
+      </p:sp>
+      <p:sp>
+        <p:nvSpPr>
+          <p:cNvPr id="4" name="Content Placeholder 3"/>
+          <p:cNvSpPr>
+            <a:spLocks noGrp="1"/>
+          </p:cNvSpPr>
+          <p:nvPr>
+            <p:ph idx="2" sz="half"/>
+          </p:nvPr>
+        </p:nvSpPr>
+        <p:spPr/>
+        <p:txBody>
+          <a:bodyPr/>
+          <a:lstStyle/>
+          <a:p>
             <a:pPr lvl="0" indent="0" marL="0">
               <a:buNone/>
             </a:pPr>
             <a:r>
               <a:rPr b="1"/>
-              <a:t>Concepts:</a:t>
+              <a:t>The answer:</a:t>
             </a:r>
           </a:p>
           <a:p>
             <a:pPr lvl="0"/>
             <a:r>
               <a:rPr/>
-              <a:t>ANOVA rejects H₀ for the </a:t>
+              <a:t>Adelie – Chinstrap: 32 g, </a:t>
             </a:r>
             <a:r>
               <a:rPr i="1"/>
-              <a:t>group</a:t>
-            </a:r>
-            <a:r>
-              <a:rPr/>
-              <a:t>, but </a:t>
+              <a:t>p</a:t>
+            </a:r>
+            <a:r>
+              <a:rPr/>
+              <a:t> = </a:t>
             </a:r>
             <a:r>
               <a:rPr b="1"/>
-              <a:t>post-hoc</a:t>
-            </a:r>
-            <a:r>
-              <a:rPr/>
-              <a:t> finds </a:t>
+              <a:t>0.88</a:t>
+            </a:r>
+            <a:r>
+              <a:rPr/>
+              <a:t> → </a:t>
+            </a:r>
+            <a:r>
+              <a:rPr b="1"/>
+              <a:t>not</a:t>
+            </a:r>
+            <a:r>
+              <a:rPr/>
+              <a:t> different</a:t>
+            </a:r>
+          </a:p>
+          <a:p>
+            <a:pPr lvl="0"/>
+            <a:r>
+              <a:rPr/>
+              <a:t>Adelie – Gentoo: −1375 g, </a:t>
             </a:r>
             <a:r>
               <a:rPr i="1"/>
-              <a:t>which</a:t>
-            </a:r>
-            <a:r>
-              <a:rPr/>
-              <a:t> pairs differ</a:t>
+              <a:t>p</a:t>
+            </a:r>
+            <a:r>
+              <a:rPr/>
+              <a:t> &lt; 0.0001</a:t>
             </a:r>
           </a:p>
           <a:p>
             <a:pPr lvl="0"/>
             <a:r>
-              <a:rPr b="1"/>
-              <a:t>Tukey adjustment</a:t>
-            </a:r>
-            <a:r>
-              <a:rPr/>
-              <a:t> keeps the family-wise error at 0.05</a:t>
-            </a:r>
-          </a:p>
-          <a:p>
-            <a:pPr lvl="0"/>
-            <a:r>
-              <a:rPr/>
-              <a:t>A compact letter display turns a pairwise table into one glance</a:t>
-            </a:r>
-          </a:p>
-          <a:p>
-            <a:pPr lvl="0" indent="0" marL="0">
-              <a:buNone/>
-            </a:pPr>
-            <a:r>
-              <a:rPr b="1"/>
-              <a:t>R skills:</a:t>
-            </a:r>
-          </a:p>
-          <a:p>
-            <a:pPr lvl="0"/>
-            <a:r>
-              <a:rPr>
-                <a:latin typeface="Courier"/>
-              </a:rPr>
-              <a:t>aov()</a:t>
-            </a:r>
-            <a:r>
-              <a:rPr/>
-              <a:t> + </a:t>
-            </a:r>
-            <a:r>
-              <a:rPr>
-                <a:latin typeface="Courier"/>
-              </a:rPr>
-              <a:t>summary()</a:t>
-            </a:r>
-          </a:p>
-          <a:p>
-            <a:pPr lvl="0"/>
-            <a:r>
-              <a:rPr>
-                <a:latin typeface="Courier"/>
-              </a:rPr>
-              <a:t>car::Anova(model, type = "II")</a:t>
-            </a:r>
-          </a:p>
-          <a:p>
-            <a:pPr lvl="0"/>
-            <a:r>
-              <a:rPr>
-                <a:latin typeface="Courier"/>
-              </a:rPr>
-              <a:t>emmeans(model, pairwise ~ group)</a:t>
-            </a:r>
-            <a:r>
-              <a:rPr/>
-              <a:t> + </a:t>
-            </a:r>
-            <a:r>
-              <a:rPr>
-                <a:latin typeface="Courier"/>
-              </a:rPr>
-              <a:t>multcomp::cld()</a:t>
-            </a:r>
-          </a:p>
-        </p:txBody>
-      </p:sp>
-      <p:sp>
-        <p:nvSpPr>
-          <p:cNvPr id="4" name="Content Placeholder 3"/>
-          <p:cNvSpPr>
-            <a:spLocks noGrp="1"/>
-          </p:cNvSpPr>
-          <p:nvPr>
-            <p:ph idx="2" sz="half"/>
-          </p:nvPr>
-        </p:nvSpPr>
-        <p:spPr/>
-        <p:txBody>
-          <a:bodyPr/>
-          <a:lstStyle/>
-          <a:p>
-            <a:pPr lvl="0" indent="0" marL="0">
-              <a:buNone/>
-            </a:pPr>
-            <a:r>
-              <a:rPr b="1"/>
-              <a:t>References:</a:t>
-            </a:r>
-          </a:p>
-          <a:p>
-            <a:pPr lvl="0"/>
-            <a:r>
-              <a:rPr/>
-              <a:t>📖 W&amp;S Ch. 15 — ANOVA</a:t>
-            </a:r>
-          </a:p>
-          <a:p>
-            <a:pPr lvl="0"/>
-            <a:r>
-              <a:rPr/>
-              <a:t>📖 </a:t>
-            </a:r>
-            <a:r>
-              <a:rPr>
-                <a:hlinkClick r:id="rId2"/>
-              </a:rPr>
-              <a:t>emmeans vignettes</a:t>
-            </a:r>
-          </a:p>
-          <a:p>
-            <a:pPr lvl="0" indent="0" marL="0">
-              <a:buNone/>
-            </a:pPr>
-            <a:r>
-              <a:rPr b="1"/>
-              <a:t>Up next — Lecture 15:</a:t>
-            </a:r>
-          </a:p>
-          <a:p>
-            <a:pPr lvl="0"/>
-            <a:r>
-              <a:rPr/>
-              <a:t>Kicking off the </a:t>
-            </a:r>
-            <a:r>
-              <a:rPr b="1"/>
-              <a:t>final project</a:t>
-            </a:r>
-          </a:p>
-          <a:p>
-            <a:pPr lvl="0"/>
-            <a:r>
-              <a:rPr/>
-              <a:t>Applying this whole toolkit — wrangling, plotting, and a test — to a dataset you choose</a:t>
+              <a:rPr/>
+              <a:t>Chinstrap – Gentoo: −1343 g, </a:t>
+            </a:r>
+            <a:r>
+              <a:rPr i="1"/>
+              <a:t>p</a:t>
+            </a:r>
+            <a:r>
+              <a:rPr/>
+              <a:t> &lt; 0.0001</a:t>
+            </a:r>
+          </a:p>
+          <a:p>
+            <a:pPr lvl="0" indent="0" marL="1270000">
+              <a:buNone/>
+            </a:pPr>
+            <a:r>
+              <a:rPr sz="2000" b="1"/>
+              <a:t>Important</a:t>
+            </a:r>
+          </a:p>
+          <a:p>
+            <a:pPr lvl="0" indent="0" marL="1270000">
+              <a:buNone/>
+            </a:pPr>
+            <a:r>
+              <a:rPr sz="2000"/>
+              <a:t>Two of the three species are </a:t>
+            </a:r>
+            <a:r>
+              <a:rPr sz="2000" b="1"/>
+              <a:t>statistically indistinguishable</a:t>
+            </a:r>
+            <a:r>
+              <a:rPr sz="2000"/>
+              <a:t> in mass. “Significant ANOVA” never meant “everything differs.”</a:t>
             </a:r>
           </a:p>
         </p:txBody>
@@ -5618,7 +5422,7 @@
             </a:pPr>
             <a:r>
               <a:rPr/>
-              <a:t>Where we left off (Lecture 13 — One-Way ANOVA I)</a:t>
+              <a:t>Where we left off — Lecture 19</a:t>
             </a:r>
           </a:p>
         </p:txBody>
@@ -5640,47 +5444,941 @@
           <a:p>
             <a:pPr lvl="0"/>
             <a:r>
+              <a:rPr/>
+              <a:t>Plotted body mass by species; Gentoo high, Adelie and Chinstrap nearly level</a:t>
+            </a:r>
+          </a:p>
+          <a:p>
+            <a:pPr lvl="0"/>
+            <a:r>
               <a:rPr>
                 <a:latin typeface="Courier"/>
               </a:rPr>
               <a:t>mass_model &lt;- lm(body_mass_g ~ species, data = penguins_df)</a:t>
             </a:r>
-            <a:r>
-              <a:rPr/>
-              <a:t> — fit</a:t>
-            </a:r>
           </a:p>
           <a:p>
             <a:pPr lvl="0"/>
             <a:r>
+              <a:rPr>
+                <a:latin typeface="Courier"/>
+              </a:rPr>
+              <a:t>Anova(mass_model)</a:t>
+            </a:r>
+            <a:r>
+              <a:rPr/>
+              <a:t> → </a:t>
+            </a:r>
+            <a:r>
               <a:rPr b="1"/>
-              <a:t>Normality checked</a:t>
-            </a:r>
-            <a:r>
-              <a:rPr/>
-              <a:t> — Q-Q panel + Shapiro-Wilk on the residuals</a:t>
+              <a:t>F(2, 339) = 343.6, </a:t>
+            </a:r>
+            <a:r>
+              <a:rPr b="1" i="1"/>
+              <a:t>p</a:t>
+            </a:r>
+            <a:r>
+              <a:rPr b="1"/>
+              <a:t> &lt; 0.001</a:t>
             </a:r>
           </a:p>
           <a:p>
             <a:pPr lvl="0"/>
             <a:r>
+              <a:rPr/>
+              <a:t>Reported: </a:t>
+            </a:r>
+            <a:r>
+              <a:rPr i="1"/>
+              <a:t>“Body mass differed significantly among the three species.”</a:t>
+            </a:r>
+          </a:p>
+          <a:p>
+            <a:pPr lvl="0" indent="0" marL="1270000">
+              <a:buNone/>
+            </a:pPr>
+            <a:r>
+              <a:rPr sz="2000" b="1"/>
+              <a:t>Important</a:t>
+            </a:r>
+          </a:p>
+          <a:p>
+            <a:pPr lvl="0" indent="0" marL="1270000">
+              <a:buNone/>
+            </a:pPr>
+            <a:r>
+              <a:rPr sz="2000" b="1"/>
+              <a:t>We skipped a step on purpose.</a:t>
+            </a:r>
+          </a:p>
+          <a:p>
+            <a:pPr lvl="0" indent="0" marL="1270000">
+              <a:buNone/>
+            </a:pPr>
+            <a:r>
+              <a:rPr sz="2000"/>
+              <a:t>We read that </a:t>
+            </a:r>
+            <a:r>
+              <a:rPr sz="2000" i="1"/>
+              <a:t>p</a:t>
+            </a:r>
+            <a:r>
+              <a:rPr sz="2000"/>
+              <a:t>-value without checking whether the model was allowed to give it to us, and we never found out </a:t>
+            </a:r>
+            <a:r>
+              <a:rPr sz="2000" b="1"/>
+              <a:t>which</a:t>
+            </a:r>
+            <a:r>
+              <a:rPr sz="2000"/>
+              <a:t> species differ. Those are today’s two sets.</a:t>
+            </a:r>
+          </a:p>
+        </p:txBody>
+      </p:sp>
+    </p:spTree>
+  </p:cSld>
+</p:sld>
+</file>
+
+<file path=ppt/slides/slide20.xml><?xml version="1.0" encoding="utf-8"?>
+<p:sld xmlns:a="http://schemas.openxmlformats.org/drawingml/2006/main" xmlns:r="http://schemas.openxmlformats.org/officeDocument/2006/relationships" xmlns:p="http://schemas.openxmlformats.org/presentationml/2006/main">
+  <p:cSld>
+    <p:spTree>
+      <p:nvGrpSpPr>
+        <p:cNvPr id="1" name=""/>
+        <p:cNvGrpSpPr/>
+        <p:nvPr/>
+      </p:nvGrpSpPr>
+      <p:grpSpPr>
+        <a:xfrm>
+          <a:off x="0" y="0"/>
+          <a:ext cx="0" cy="0"/>
+          <a:chOff x="0" y="0"/>
+          <a:chExt cx="0" cy="0"/>
+        </a:xfrm>
+      </p:grpSpPr>
+      <p:sp>
+        <p:nvSpPr>
+          <p:cNvPr id="2" name="Title 1"/>
+          <p:cNvSpPr>
+            <a:spLocks noGrp="1"/>
+          </p:cNvSpPr>
+          <p:nvPr>
+            <p:ph type="title"/>
+          </p:nvPr>
+        </p:nvSpPr>
+        <p:spPr>
+          <a:xfrm>
+            <a:off x="0" y="0"/>
+            <a:ext cx="9144000" cy="602780"/>
+          </a:xfrm>
+          <a:solidFill>
+            <a:srgbClr val="1A1A2E"/>
+          </a:solidFill>
+        </p:spPr>
+        <p:txBody>
+          <a:bodyPr/>
+          <a:lstStyle/>
+          <a:p>
+            <a:pPr lvl="0" indent="0" marL="0">
+              <a:buNone/>
+            </a:pPr>
+            <a:r>
+              <a:rPr/>
+              <a:t>What </a:t>
+            </a:r>
+            <a:r>
+              <a:rPr>
+                <a:latin typeface="Courier"/>
+              </a:rPr>
+              <a:t>emmeans</a:t>
+            </a:r>
+            <a:r>
+              <a:rPr/>
+              <a:t> Gives You</a:t>
+            </a:r>
+          </a:p>
+        </p:txBody>
+      </p:sp>
+      <p:sp>
+        <p:nvSpPr>
+          <p:cNvPr id="3" name="Content Placeholder 2"/>
+          <p:cNvSpPr>
+            <a:spLocks noGrp="1"/>
+          </p:cNvSpPr>
+          <p:nvPr>
+            <p:ph idx="1" sz="half"/>
+          </p:nvPr>
+        </p:nvSpPr>
+        <p:spPr/>
+        <p:txBody>
+          <a:bodyPr/>
+          <a:lstStyle/>
+          <a:p>
+            <a:pPr lvl="0" indent="0">
+              <a:buNone/>
+            </a:pPr>
+            <a:r>
+              <a:rPr>
+                <a:solidFill>
+                  <a:srgbClr val="5E5E5E"/>
+                </a:solidFill>
+                <a:latin typeface="Courier"/>
+              </a:rPr>
+              <a:t># The group means, with CIs ---------------------------</a:t>
+            </a:r>
+            <a:br/>
+            <a:r>
+              <a:rPr>
+                <a:solidFill>
+                  <a:srgbClr val="003B4F"/>
+                </a:solidFill>
+                <a:latin typeface="Courier"/>
+              </a:rPr>
+              <a:t>mass_emm</a:t>
+            </a:r>
+            <a:r>
+              <a:rPr>
+                <a:solidFill>
+                  <a:srgbClr val="5E5E5E"/>
+                </a:solidFill>
+                <a:latin typeface="Courier"/>
+              </a:rPr>
+              <a:t>$</a:t>
+            </a:r>
+            <a:r>
+              <a:rPr>
+                <a:solidFill>
+                  <a:srgbClr val="003B4F"/>
+                </a:solidFill>
+                <a:latin typeface="Courier"/>
+              </a:rPr>
+              <a:t>emmeans</a:t>
+            </a:r>
+          </a:p>
+          <a:p>
+            <a:pPr lvl="0" indent="0">
+              <a:buNone/>
+            </a:pPr>
+            <a:r>
+              <a:rPr>
+                <a:latin typeface="Courier"/>
+              </a:rPr>
+              <a:t> species   emmean   SE  df lower.CL upper.CL
+ Adelie      3701 37.6 339     3627     3775
+ Chinstrap   3733 56.1 339     3623     3843
+ Gentoo      5076 41.7 339     4994     5158
+Confidence level used: 0.95 </a:t>
+            </a:r>
+          </a:p>
+        </p:txBody>
+      </p:sp>
+      <p:sp>
+        <p:nvSpPr>
+          <p:cNvPr id="4" name="Content Placeholder 3"/>
+          <p:cNvSpPr>
+            <a:spLocks noGrp="1"/>
+          </p:cNvSpPr>
+          <p:nvPr>
+            <p:ph idx="2" sz="half"/>
+          </p:nvPr>
+        </p:nvSpPr>
+        <p:spPr/>
+        <p:txBody>
+          <a:bodyPr/>
+          <a:lstStyle/>
+          <a:p>
+            <a:pPr lvl="0"/>
+            <a:r>
+              <a:rPr>
+                <a:latin typeface="Courier"/>
+              </a:rPr>
+              <a:t>emmean</a:t>
+            </a:r>
+            <a:r>
+              <a:rPr/>
+              <a:t> — the model’s estimate of each group mean</a:t>
+            </a:r>
+          </a:p>
+          <a:p>
+            <a:pPr lvl="0"/>
+            <a:r>
+              <a:rPr>
+                <a:latin typeface="Courier"/>
+              </a:rPr>
+              <a:t>SE</a:t>
+            </a:r>
+            <a:r>
+              <a:rPr/>
+              <a:t>, </a:t>
+            </a:r>
+            <a:r>
+              <a:rPr>
+                <a:latin typeface="Courier"/>
+              </a:rPr>
+              <a:t>df</a:t>
+            </a:r>
+            <a:r>
+              <a:rPr/>
+              <a:t>, and a 95% </a:t>
+            </a:r>
+            <a:r>
               <a:rPr b="1"/>
-              <a:t>Equal variance checked</a:t>
-            </a:r>
-            <a:r>
-              <a:rPr/>
-              <a:t> — Levene’s test</a:t>
+              <a:t>confidence interval</a:t>
             </a:r>
           </a:p>
           <a:p>
             <a:pPr lvl="0"/>
             <a:r>
+              <a:rPr>
+                <a:latin typeface="Courier"/>
+              </a:rPr>
+              <a:t>emmeans(model, pairwise ~ species)</a:t>
+            </a:r>
+            <a:r>
+              <a:rPr/>
+              <a:t> returns a </a:t>
+            </a:r>
+            <a:r>
               <a:rPr b="1"/>
-              <a:t>Decision:</a:t>
-            </a:r>
-            <a:r>
-              <a:rPr/>
-              <a:t> assumptions look fine, proceed with classic ANOVA</a:t>
+              <a:t>list</a:t>
+            </a:r>
+            <a:r>
+              <a:rPr/>
+              <a:t> of two things: </a:t>
+            </a:r>
+            <a:r>
+              <a:rPr>
+                <a:latin typeface="Courier"/>
+              </a:rPr>
+              <a:t>$emmeans</a:t>
+            </a:r>
+            <a:r>
+              <a:rPr/>
+              <a:t> (the means) and </a:t>
+            </a:r>
+            <a:r>
+              <a:rPr>
+                <a:latin typeface="Courier"/>
+              </a:rPr>
+              <a:t>$contrasts</a:t>
+            </a:r>
+            <a:r>
+              <a:rPr/>
+              <a:t> (the comparisons)</a:t>
+            </a:r>
+          </a:p>
+          <a:p>
+            <a:pPr lvl="0" indent="0" marL="1270000">
+              <a:buNone/>
+            </a:pPr>
+            <a:r>
+              <a:rPr sz="2000" b="1"/>
+              <a:t>Tip</a:t>
+            </a:r>
+          </a:p>
+          <a:p>
+            <a:pPr lvl="0" indent="0" marL="1270000">
+              <a:buNone/>
+            </a:pPr>
+            <a:r>
+              <a:rPr sz="2000">
+                <a:latin typeface="Courier"/>
+              </a:rPr>
+              <a:t>emmeans(model, ~ species)</a:t>
+            </a:r>
+            <a:r>
+              <a:rPr sz="2000"/>
+              <a:t> with no </a:t>
+            </a:r>
+            <a:r>
+              <a:rPr sz="2000">
+                <a:latin typeface="Courier"/>
+              </a:rPr>
+              <a:t>pairwise</a:t>
+            </a:r>
+            <a:r>
+              <a:rPr sz="2000"/>
+              <a:t> gives just the means.</a:t>
+            </a:r>
+          </a:p>
+        </p:txBody>
+      </p:sp>
+    </p:spTree>
+  </p:cSld>
+</p:sld>
+</file>
+
+<file path=ppt/slides/slide21.xml><?xml version="1.0" encoding="utf-8"?>
+<p:sld xmlns:a="http://schemas.openxmlformats.org/drawingml/2006/main" xmlns:r="http://schemas.openxmlformats.org/officeDocument/2006/relationships" xmlns:p="http://schemas.openxmlformats.org/presentationml/2006/main">
+  <p:cSld>
+    <p:spTree>
+      <p:nvGrpSpPr>
+        <p:cNvPr id="1" name=""/>
+        <p:cNvGrpSpPr/>
+        <p:nvPr/>
+      </p:nvGrpSpPr>
+      <p:grpSpPr>
+        <a:xfrm>
+          <a:off x="0" y="0"/>
+          <a:ext cx="0" cy="0"/>
+          <a:chOff x="0" y="0"/>
+          <a:chExt cx="0" cy="0"/>
+        </a:xfrm>
+      </p:grpSpPr>
+      <p:sp>
+        <p:nvSpPr>
+          <p:cNvPr id="2" name="Title 1"/>
+          <p:cNvSpPr>
+            <a:spLocks noGrp="1"/>
+          </p:cNvSpPr>
+          <p:nvPr>
+            <p:ph type="title"/>
+          </p:nvPr>
+        </p:nvSpPr>
+        <p:spPr>
+          <a:xfrm>
+            <a:off x="0" y="0"/>
+            <a:ext cx="9144000" cy="602780"/>
+          </a:xfrm>
+          <a:solidFill>
+            <a:srgbClr val="1A1A2E"/>
+          </a:solidFill>
+        </p:spPr>
+        <p:txBody>
+          <a:bodyPr/>
+          <a:lstStyle/>
+          <a:p>
+            <a:pPr lvl="0" indent="0" marL="0">
+              <a:buNone/>
+            </a:pPr>
+            <a:r>
+              <a:rPr/>
+              <a:t>Compact Letter Display — Who Shares a Letter?</a:t>
+            </a:r>
+          </a:p>
+        </p:txBody>
+      </p:sp>
+      <p:sp>
+        <p:nvSpPr>
+          <p:cNvPr id="3" name="Content Placeholder 2"/>
+          <p:cNvSpPr>
+            <a:spLocks noGrp="1"/>
+          </p:cNvSpPr>
+          <p:nvPr>
+            <p:ph idx="1" sz="half"/>
+          </p:nvPr>
+        </p:nvSpPr>
+        <p:spPr/>
+        <p:txBody>
+          <a:bodyPr/>
+          <a:lstStyle/>
+          <a:p>
+            <a:pPr lvl="0" indent="0">
+              <a:buNone/>
+            </a:pPr>
+            <a:r>
+              <a:rPr>
+                <a:solidFill>
+                  <a:srgbClr val="5E5E5E"/>
+                </a:solidFill>
+                <a:latin typeface="Courier"/>
+              </a:rPr>
+              <a:t># Groups sharing a letter are NOT different -----------</a:t>
+            </a:r>
+            <a:br/>
+            <a:r>
+              <a:rPr>
+                <a:solidFill>
+                  <a:srgbClr val="003B4F"/>
+                </a:solidFill>
+                <a:latin typeface="Courier"/>
+              </a:rPr>
+              <a:t>multcomp</a:t>
+            </a:r>
+            <a:r>
+              <a:rPr>
+                <a:solidFill>
+                  <a:srgbClr val="5E5E5E"/>
+                </a:solidFill>
+                <a:latin typeface="Courier"/>
+              </a:rPr>
+              <a:t>::</a:t>
+            </a:r>
+            <a:r>
+              <a:rPr>
+                <a:solidFill>
+                  <a:srgbClr val="4758AB"/>
+                </a:solidFill>
+                <a:latin typeface="Courier"/>
+              </a:rPr>
+              <a:t>cld</a:t>
+            </a:r>
+            <a:r>
+              <a:rPr>
+                <a:solidFill>
+                  <a:srgbClr val="003B4F"/>
+                </a:solidFill>
+                <a:latin typeface="Courier"/>
+              </a:rPr>
+              <a:t>(mass_emm</a:t>
+            </a:r>
+            <a:r>
+              <a:rPr>
+                <a:solidFill>
+                  <a:srgbClr val="5E5E5E"/>
+                </a:solidFill>
+                <a:latin typeface="Courier"/>
+              </a:rPr>
+              <a:t>$</a:t>
+            </a:r>
+            <a:r>
+              <a:rPr>
+                <a:solidFill>
+                  <a:srgbClr val="003B4F"/>
+                </a:solidFill>
+                <a:latin typeface="Courier"/>
+              </a:rPr>
+              <a:t>emmeans, </a:t>
+            </a:r>
+            <a:r>
+              <a:rPr>
+                <a:solidFill>
+                  <a:srgbClr val="657422"/>
+                </a:solidFill>
+                <a:latin typeface="Courier"/>
+              </a:rPr>
+              <a:t>Letters =</a:t>
+            </a:r>
+            <a:r>
+              <a:rPr>
+                <a:solidFill>
+                  <a:srgbClr val="003B4F"/>
+                </a:solidFill>
+                <a:latin typeface="Courier"/>
+              </a:rPr>
+              <a:t> letters)</a:t>
+            </a:r>
+          </a:p>
+          <a:p>
+            <a:pPr lvl="0" indent="0">
+              <a:buNone/>
+            </a:pPr>
+            <a:r>
+              <a:rPr>
+                <a:latin typeface="Courier"/>
+              </a:rPr>
+              <a:t> species   emmean   SE  df lower.CL upper.CL .group
+ Adelie      3701 37.6 339     3627     3775  a    
+ Chinstrap   3733 56.1 339     3623     3843  a    
+ Gentoo      5076 41.7 339     4994     5158   b   
+Confidence level used: 0.95 
+P value adjustment: tukey method for comparing a family of 3 estimates 
+significance level used: alpha = 0.05 
+NOTE: If two or more means share the same grouping symbol,
+      then we cannot show them to be different.
+      But we also did not show them to be the same. </a:t>
+            </a:r>
+          </a:p>
+        </p:txBody>
+      </p:sp>
+      <p:sp>
+        <p:nvSpPr>
+          <p:cNvPr id="4" name="Content Placeholder 3"/>
+          <p:cNvSpPr>
+            <a:spLocks noGrp="1"/>
+          </p:cNvSpPr>
+          <p:nvPr>
+            <p:ph idx="2" sz="half"/>
+          </p:nvPr>
+        </p:nvSpPr>
+        <p:spPr/>
+        <p:txBody>
+          <a:bodyPr/>
+          <a:lstStyle/>
+          <a:p>
+            <a:pPr lvl="0" indent="0" marL="0">
+              <a:buNone/>
+            </a:pPr>
+            <a:r>
+              <a:rPr b="1"/>
+              <a:t>How to read letters:</a:t>
+            </a:r>
+          </a:p>
+          <a:p>
+            <a:pPr lvl="0"/>
+            <a:r>
+              <a:rPr/>
+              <a:t>Same letter → </a:t>
+            </a:r>
+            <a:r>
+              <a:rPr b="1"/>
+              <a:t>not</a:t>
+            </a:r>
+            <a:r>
+              <a:rPr/>
+              <a:t> significantly different</a:t>
+            </a:r>
+          </a:p>
+          <a:p>
+            <a:pPr lvl="0"/>
+            <a:r>
+              <a:rPr/>
+              <a:t>Different letters → significantly different</a:t>
+            </a:r>
+          </a:p>
+          <a:p>
+            <a:pPr lvl="0" indent="0" marL="0">
+              <a:buNone/>
+            </a:pPr>
+            <a:r>
+              <a:rPr/>
+              <a:t>Adelie </a:t>
+            </a:r>
+            <a:r>
+              <a:rPr b="1"/>
+              <a:t>a</a:t>
+            </a:r>
+            <a:r>
+              <a:rPr/>
+              <a:t>, Chinstrap </a:t>
+            </a:r>
+            <a:r>
+              <a:rPr b="1"/>
+              <a:t>a</a:t>
+            </a:r>
+            <a:r>
+              <a:rPr/>
+              <a:t>, Gentoo </a:t>
+            </a:r>
+            <a:r>
+              <a:rPr b="1"/>
+              <a:t>b</a:t>
+            </a:r>
+            <a:r>
+              <a:rPr/>
+              <a:t> — the pairwise table in one glance. This is the notation you see over the bars in published figures.</a:t>
+            </a:r>
+          </a:p>
+          <a:p>
+            <a:pPr lvl="0" indent="0" marL="1270000">
+              <a:buNone/>
+            </a:pPr>
+            <a:r>
+              <a:rPr sz="2000" b="1"/>
+              <a:t>Tip</a:t>
+            </a:r>
+          </a:p>
+          <a:p>
+            <a:pPr lvl="0" indent="0" marL="1270000">
+              <a:buNone/>
+            </a:pPr>
+            <a:r>
+              <a:rPr sz="2000"/>
+              <a:t>Install once: </a:t>
+            </a:r>
+            <a:r>
+              <a:rPr sz="2000">
+                <a:latin typeface="Courier"/>
+              </a:rPr>
+              <a:t>install.packages("multcomp")</a:t>
+            </a:r>
+          </a:p>
+        </p:txBody>
+      </p:sp>
+    </p:spTree>
+  </p:cSld>
+</p:sld>
+</file>
+
+<file path=ppt/slides/slide22.xml><?xml version="1.0" encoding="utf-8"?>
+<p:sld xmlns:a="http://schemas.openxmlformats.org/drawingml/2006/main" xmlns:r="http://schemas.openxmlformats.org/officeDocument/2006/relationships" xmlns:p="http://schemas.openxmlformats.org/presentationml/2006/main">
+  <p:cSld>
+    <p:spTree>
+      <p:nvGrpSpPr>
+        <p:cNvPr id="1" name=""/>
+        <p:cNvGrpSpPr/>
+        <p:nvPr/>
+      </p:nvGrpSpPr>
+      <p:grpSpPr>
+        <a:xfrm>
+          <a:off x="0" y="0"/>
+          <a:ext cx="0" cy="0"/>
+          <a:chOff x="0" y="0"/>
+          <a:chExt cx="0" cy="0"/>
+        </a:xfrm>
+      </p:grpSpPr>
+      <p:sp>
+        <p:nvSpPr>
+          <p:cNvPr id="2" name="Title 1"/>
+          <p:cNvSpPr>
+            <a:spLocks noGrp="1"/>
+          </p:cNvSpPr>
+          <p:nvPr>
+            <p:ph type="title"/>
+          </p:nvPr>
+        </p:nvSpPr>
+        <p:spPr>
+          <a:xfrm>
+            <a:off x="0" y="0"/>
+            <a:ext cx="9144000" cy="602780"/>
+          </a:xfrm>
+          <a:solidFill>
+            <a:srgbClr val="1A1A2E"/>
+          </a:solidFill>
+        </p:spPr>
+        <p:txBody>
+          <a:bodyPr/>
+          <a:lstStyle/>
+          <a:p>
+            <a:pPr lvl="0" indent="0" marL="0">
+              <a:buNone/>
+            </a:pPr>
+            <a:r>
+              <a:rPr/>
+              <a:t>The Backup That Matches Welch</a:t>
+            </a:r>
+          </a:p>
+        </p:txBody>
+      </p:sp>
+      <p:sp>
+        <p:nvSpPr>
+          <p:cNvPr id="3" name="Content Placeholder 2"/>
+          <p:cNvSpPr>
+            <a:spLocks noGrp="1"/>
+          </p:cNvSpPr>
+          <p:nvPr>
+            <p:ph idx="1" sz="half"/>
+          </p:nvPr>
+        </p:nvSpPr>
+        <p:spPr/>
+        <p:txBody>
+          <a:bodyPr/>
+          <a:lstStyle/>
+          <a:p>
+            <a:pPr lvl="0" indent="0" marL="0">
+              <a:buNone/>
+            </a:pPr>
+            <a:r>
+              <a:rPr/>
+              <a:t>Tukey through </a:t>
+            </a:r>
+            <a:r>
+              <a:rPr>
+                <a:latin typeface="Courier"/>
+              </a:rPr>
+              <a:t>emmeans</a:t>
+            </a:r>
+            <a:r>
+              <a:rPr/>
+              <a:t> uses the model’s </a:t>
+            </a:r>
+            <a:r>
+              <a:rPr b="1"/>
+              <a:t>pooled</a:t>
+            </a:r>
+            <a:r>
+              <a:rPr/>
+              <a:t> error — the thing Levene told us to be careful about. The matching unequal-variance version:</a:t>
+            </a:r>
+          </a:p>
+          <a:p>
+            <a:pPr lvl="0" indent="0">
+              <a:buNone/>
+            </a:pPr>
+            <a:r>
+              <a:rPr>
+                <a:solidFill>
+                  <a:srgbClr val="5E5E5E"/>
+                </a:solidFill>
+                <a:latin typeface="Courier"/>
+              </a:rPr>
+              <a:t># Non-pooled SD, Holm-adjusted ------------------------</a:t>
+            </a:r>
+            <a:br/>
+            <a:r>
+              <a:rPr>
+                <a:solidFill>
+                  <a:srgbClr val="4758AB"/>
+                </a:solidFill>
+                <a:latin typeface="Courier"/>
+              </a:rPr>
+              <a:t>pairwise.t.test</a:t>
+            </a:r>
+            <a:r>
+              <a:rPr>
+                <a:solidFill>
+                  <a:srgbClr val="003B4F"/>
+                </a:solidFill>
+                <a:latin typeface="Courier"/>
+              </a:rPr>
+              <a:t>(penguins_df</a:t>
+            </a:r>
+            <a:r>
+              <a:rPr>
+                <a:solidFill>
+                  <a:srgbClr val="5E5E5E"/>
+                </a:solidFill>
+                <a:latin typeface="Courier"/>
+              </a:rPr>
+              <a:t>$</a:t>
+            </a:r>
+            <a:r>
+              <a:rPr>
+                <a:solidFill>
+                  <a:srgbClr val="003B4F"/>
+                </a:solidFill>
+                <a:latin typeface="Courier"/>
+              </a:rPr>
+              <a:t>body_mass_g,</a:t>
+            </a:r>
+            <a:br/>
+            <a:r>
+              <a:rPr>
+                <a:solidFill>
+                  <a:srgbClr val="003B4F"/>
+                </a:solidFill>
+                <a:latin typeface="Courier"/>
+              </a:rPr>
+              <a:t>                penguins_df</a:t>
+            </a:r>
+            <a:r>
+              <a:rPr>
+                <a:solidFill>
+                  <a:srgbClr val="5E5E5E"/>
+                </a:solidFill>
+                <a:latin typeface="Courier"/>
+              </a:rPr>
+              <a:t>$</a:t>
+            </a:r>
+            <a:r>
+              <a:rPr>
+                <a:solidFill>
+                  <a:srgbClr val="003B4F"/>
+                </a:solidFill>
+                <a:latin typeface="Courier"/>
+              </a:rPr>
+              <a:t>species,</a:t>
+            </a:r>
+            <a:br/>
+            <a:r>
+              <a:rPr>
+                <a:solidFill>
+                  <a:srgbClr val="003B4F"/>
+                </a:solidFill>
+                <a:latin typeface="Courier"/>
+              </a:rPr>
+              <a:t>                </a:t>
+            </a:r>
+            <a:r>
+              <a:rPr>
+                <a:solidFill>
+                  <a:srgbClr val="657422"/>
+                </a:solidFill>
+                <a:latin typeface="Courier"/>
+              </a:rPr>
+              <a:t>pool.sd =</a:t>
+            </a:r>
+            <a:r>
+              <a:rPr>
+                <a:solidFill>
+                  <a:srgbClr val="003B4F"/>
+                </a:solidFill>
+                <a:latin typeface="Courier"/>
+              </a:rPr>
+              <a:t> </a:t>
+            </a:r>
+            <a:r>
+              <a:rPr>
+                <a:solidFill>
+                  <a:srgbClr val="8F5902"/>
+                </a:solidFill>
+                <a:latin typeface="Courier"/>
+              </a:rPr>
+              <a:t>FALSE</a:t>
+            </a:r>
+            <a:r>
+              <a:rPr>
+                <a:solidFill>
+                  <a:srgbClr val="003B4F"/>
+                </a:solidFill>
+                <a:latin typeface="Courier"/>
+              </a:rPr>
+              <a:t>)</a:t>
+            </a:r>
+          </a:p>
+          <a:p>
+            <a:pPr lvl="0" indent="0">
+              <a:buNone/>
+            </a:pPr>
+            <a:r>
+              <a:rPr>
+                <a:latin typeface="Courier"/>
+              </a:rPr>
+              <a:t>
+    Pairwise comparisons using t tests with non-pooled SD 
+data:  penguins_df$body_mass_g and penguins_df$species 
+          Adelie Chinstrap
+Chinstrap 0.59   -        
+Gentoo    &lt;2e-16 &lt;2e-16   
+P value adjustment method: holm </a:t>
+            </a:r>
+          </a:p>
+        </p:txBody>
+      </p:sp>
+      <p:sp>
+        <p:nvSpPr>
+          <p:cNvPr id="4" name="Content Placeholder 3"/>
+          <p:cNvSpPr>
+            <a:spLocks noGrp="1"/>
+          </p:cNvSpPr>
+          <p:nvPr>
+            <p:ph idx="2" sz="half"/>
+          </p:nvPr>
+        </p:nvSpPr>
+        <p:spPr/>
+        <p:txBody>
+          <a:bodyPr/>
+          <a:lstStyle/>
+          <a:p>
+            <a:pPr lvl="0"/>
+            <a:r>
+              <a:rPr/>
+              <a:t>Adelie vs Chinstrap: </a:t>
+            </a:r>
+            <a:r>
+              <a:rPr i="1"/>
+              <a:t>p</a:t>
+            </a:r>
+            <a:r>
+              <a:rPr/>
+              <a:t> = </a:t>
+            </a:r>
+            <a:r>
+              <a:rPr b="1"/>
+              <a:t>0.59</a:t>
+            </a:r>
+            <a:r>
+              <a:rPr/>
+              <a:t> → still not different</a:t>
+            </a:r>
+          </a:p>
+          <a:p>
+            <a:pPr lvl="0"/>
+            <a:r>
+              <a:rPr/>
+              <a:t>Everything else: </a:t>
+            </a:r>
+            <a:r>
+              <a:rPr i="1"/>
+              <a:t>p</a:t>
+            </a:r>
+            <a:r>
+              <a:rPr/>
+              <a:t> &lt; 2e-16</a:t>
             </a:r>
           </a:p>
           <a:p>
@@ -5698,7 +6396,801 @@
             </a:pPr>
             <a:r>
               <a:rPr sz="2000" b="1"/>
-              <a:t>✅ Transition</a:t>
+              <a:t>✅ Same story.</a:t>
+            </a:r>
+            <a:r>
+              <a:rPr sz="2000"/>
+              <a:t> The letters stand. When the robust version agrees with the standard one, report the standard one and say you checked.</a:t>
+            </a:r>
+          </a:p>
+        </p:txBody>
+      </p:sp>
+    </p:spTree>
+  </p:cSld>
+</p:sld>
+</file>
+
+<file path=ppt/slides/slide23.xml><?xml version="1.0" encoding="utf-8"?>
+<p:sld xmlns:a="http://schemas.openxmlformats.org/drawingml/2006/main" xmlns:r="http://schemas.openxmlformats.org/officeDocument/2006/relationships" xmlns:p="http://schemas.openxmlformats.org/presentationml/2006/main">
+  <p:cSld>
+    <p:spTree>
+      <p:nvGrpSpPr>
+        <p:cNvPr id="1" name=""/>
+        <p:cNvGrpSpPr/>
+        <p:nvPr/>
+      </p:nvGrpSpPr>
+      <p:grpSpPr>
+        <a:xfrm>
+          <a:off x="0" y="0"/>
+          <a:ext cx="0" cy="0"/>
+          <a:chOff x="0" y="0"/>
+          <a:chExt cx="0" cy="0"/>
+        </a:xfrm>
+      </p:grpSpPr>
+      <p:sp>
+        <p:nvSpPr>
+          <p:cNvPr id="2" name="Title 1"/>
+          <p:cNvSpPr>
+            <a:spLocks noGrp="1"/>
+          </p:cNvSpPr>
+          <p:nvPr>
+            <p:ph type="title"/>
+          </p:nvPr>
+        </p:nvSpPr>
+        <p:spPr>
+          <a:xfrm>
+            <a:off x="139485" y="78119"/>
+            <a:ext cx="8229600" cy="607682"/>
+          </a:xfrm>
+        </p:spPr>
+        <p:txBody>
+          <a:bodyPr/>
+          <a:lstStyle/>
+          <a:p>
+            <a:pPr lvl="0" indent="0" marL="0">
+              <a:buNone/>
+            </a:pPr>
+            <a:r>
+              <a:rPr/>
+              <a:t>Plot the Result — Means ± CI</a:t>
+            </a:r>
+          </a:p>
+        </p:txBody>
+      </p:sp>
+      <p:sp>
+        <p:nvSpPr>
+          <p:cNvPr id="3" name="Text Placeholder 2"/>
+          <p:cNvSpPr>
+            <a:spLocks noGrp="1"/>
+          </p:cNvSpPr>
+          <p:nvPr>
+            <p:ph idx="1" type="body"/>
+          </p:nvPr>
+        </p:nvSpPr>
+        <p:spPr/>
+        <p:txBody>
+          <a:bodyPr/>
+          <a:lstStyle/>
+          <a:p>
+            <a:pPr lvl="0" indent="0">
+              <a:buNone/>
+            </a:pPr>
+            <a:r>
+              <a:rPr>
+                <a:solidFill>
+                  <a:srgbClr val="003B4F"/>
+                </a:solidFill>
+                <a:latin typeface="Courier"/>
+              </a:rPr>
+              <a:t>mass_emm_plot &lt;- </a:t>
+            </a:r>
+            <a:r>
+              <a:rPr>
+                <a:solidFill>
+                  <a:srgbClr val="4758AB"/>
+                </a:solidFill>
+                <a:latin typeface="Courier"/>
+              </a:rPr>
+              <a:t>as.data.frame</a:t>
+            </a:r>
+            <a:r>
+              <a:rPr>
+                <a:solidFill>
+                  <a:srgbClr val="003B4F"/>
+                </a:solidFill>
+                <a:latin typeface="Courier"/>
+              </a:rPr>
+              <a:t>(mass_emm</a:t>
+            </a:r>
+            <a:r>
+              <a:rPr>
+                <a:solidFill>
+                  <a:srgbClr val="5E5E5E"/>
+                </a:solidFill>
+                <a:latin typeface="Courier"/>
+              </a:rPr>
+              <a:t>$</a:t>
+            </a:r>
+            <a:r>
+              <a:rPr>
+                <a:solidFill>
+                  <a:srgbClr val="003B4F"/>
+                </a:solidFill>
+                <a:latin typeface="Courier"/>
+              </a:rPr>
+              <a:t>emmeans) </a:t>
+            </a:r>
+            <a:r>
+              <a:rPr>
+                <a:solidFill>
+                  <a:srgbClr val="5E5E5E"/>
+                </a:solidFill>
+                <a:latin typeface="Courier"/>
+              </a:rPr>
+              <a:t>%&gt;%</a:t>
+            </a:r>
+            <a:br/>
+            <a:r>
+              <a:rPr>
+                <a:solidFill>
+                  <a:srgbClr val="003B4F"/>
+                </a:solidFill>
+                <a:latin typeface="Courier"/>
+              </a:rPr>
+              <a:t>  </a:t>
+            </a:r>
+            <a:r>
+              <a:rPr>
+                <a:solidFill>
+                  <a:srgbClr val="4758AB"/>
+                </a:solidFill>
+                <a:latin typeface="Courier"/>
+              </a:rPr>
+              <a:t>ggplot</a:t>
+            </a:r>
+            <a:r>
+              <a:rPr>
+                <a:solidFill>
+                  <a:srgbClr val="003B4F"/>
+                </a:solidFill>
+                <a:latin typeface="Courier"/>
+              </a:rPr>
+              <a:t>(</a:t>
+            </a:r>
+            <a:r>
+              <a:rPr>
+                <a:solidFill>
+                  <a:srgbClr val="4758AB"/>
+                </a:solidFill>
+                <a:latin typeface="Courier"/>
+              </a:rPr>
+              <a:t>aes</a:t>
+            </a:r>
+            <a:r>
+              <a:rPr>
+                <a:solidFill>
+                  <a:srgbClr val="003B4F"/>
+                </a:solidFill>
+                <a:latin typeface="Courier"/>
+              </a:rPr>
+              <a:t>(</a:t>
+            </a:r>
+            <a:r>
+              <a:rPr>
+                <a:solidFill>
+                  <a:srgbClr val="657422"/>
+                </a:solidFill>
+                <a:latin typeface="Courier"/>
+              </a:rPr>
+              <a:t>x =</a:t>
+            </a:r>
+            <a:r>
+              <a:rPr>
+                <a:solidFill>
+                  <a:srgbClr val="003B4F"/>
+                </a:solidFill>
+                <a:latin typeface="Courier"/>
+              </a:rPr>
+              <a:t> species, </a:t>
+            </a:r>
+            <a:r>
+              <a:rPr>
+                <a:solidFill>
+                  <a:srgbClr val="657422"/>
+                </a:solidFill>
+                <a:latin typeface="Courier"/>
+              </a:rPr>
+              <a:t>y =</a:t>
+            </a:r>
+            <a:r>
+              <a:rPr>
+                <a:solidFill>
+                  <a:srgbClr val="003B4F"/>
+                </a:solidFill>
+                <a:latin typeface="Courier"/>
+              </a:rPr>
+              <a:t> emmean, </a:t>
+            </a:r>
+            <a:r>
+              <a:rPr>
+                <a:solidFill>
+                  <a:srgbClr val="657422"/>
+                </a:solidFill>
+                <a:latin typeface="Courier"/>
+              </a:rPr>
+              <a:t>color =</a:t>
+            </a:r>
+            <a:r>
+              <a:rPr>
+                <a:solidFill>
+                  <a:srgbClr val="003B4F"/>
+                </a:solidFill>
+                <a:latin typeface="Courier"/>
+              </a:rPr>
+              <a:t> species)) </a:t>
+            </a:r>
+            <a:r>
+              <a:rPr>
+                <a:solidFill>
+                  <a:srgbClr val="5E5E5E"/>
+                </a:solidFill>
+                <a:latin typeface="Courier"/>
+              </a:rPr>
+              <a:t>+</a:t>
+            </a:r>
+            <a:br/>
+            <a:r>
+              <a:rPr>
+                <a:solidFill>
+                  <a:srgbClr val="003B4F"/>
+                </a:solidFill>
+                <a:latin typeface="Courier"/>
+              </a:rPr>
+              <a:t>  </a:t>
+            </a:r>
+            <a:r>
+              <a:rPr>
+                <a:solidFill>
+                  <a:srgbClr val="4758AB"/>
+                </a:solidFill>
+                <a:latin typeface="Courier"/>
+              </a:rPr>
+              <a:t>geom_point</a:t>
+            </a:r>
+            <a:r>
+              <a:rPr>
+                <a:solidFill>
+                  <a:srgbClr val="003B4F"/>
+                </a:solidFill>
+                <a:latin typeface="Courier"/>
+              </a:rPr>
+              <a:t>(</a:t>
+            </a:r>
+            <a:r>
+              <a:rPr>
+                <a:solidFill>
+                  <a:srgbClr val="657422"/>
+                </a:solidFill>
+                <a:latin typeface="Courier"/>
+              </a:rPr>
+              <a:t>size =</a:t>
+            </a:r>
+            <a:r>
+              <a:rPr>
+                <a:solidFill>
+                  <a:srgbClr val="003B4F"/>
+                </a:solidFill>
+                <a:latin typeface="Courier"/>
+              </a:rPr>
+              <a:t> </a:t>
+            </a:r>
+            <a:r>
+              <a:rPr>
+                <a:solidFill>
+                  <a:srgbClr val="AD0000"/>
+                </a:solidFill>
+                <a:latin typeface="Courier"/>
+              </a:rPr>
+              <a:t>3</a:t>
+            </a:r>
+            <a:r>
+              <a:rPr>
+                <a:solidFill>
+                  <a:srgbClr val="003B4F"/>
+                </a:solidFill>
+                <a:latin typeface="Courier"/>
+              </a:rPr>
+              <a:t>) </a:t>
+            </a:r>
+            <a:r>
+              <a:rPr>
+                <a:solidFill>
+                  <a:srgbClr val="5E5E5E"/>
+                </a:solidFill>
+                <a:latin typeface="Courier"/>
+              </a:rPr>
+              <a:t>+</a:t>
+            </a:r>
+            <a:br/>
+            <a:r>
+              <a:rPr>
+                <a:solidFill>
+                  <a:srgbClr val="003B4F"/>
+                </a:solidFill>
+                <a:latin typeface="Courier"/>
+              </a:rPr>
+              <a:t>  </a:t>
+            </a:r>
+            <a:r>
+              <a:rPr>
+                <a:solidFill>
+                  <a:srgbClr val="4758AB"/>
+                </a:solidFill>
+                <a:latin typeface="Courier"/>
+              </a:rPr>
+              <a:t>geom_errorbar</a:t>
+            </a:r>
+            <a:r>
+              <a:rPr>
+                <a:solidFill>
+                  <a:srgbClr val="003B4F"/>
+                </a:solidFill>
+                <a:latin typeface="Courier"/>
+              </a:rPr>
+              <a:t>(</a:t>
+            </a:r>
+            <a:br/>
+            <a:r>
+              <a:rPr>
+                <a:solidFill>
+                  <a:srgbClr val="003B4F"/>
+                </a:solidFill>
+                <a:latin typeface="Courier"/>
+              </a:rPr>
+              <a:t>    </a:t>
+            </a:r>
+            <a:r>
+              <a:rPr>
+                <a:solidFill>
+                  <a:srgbClr val="4758AB"/>
+                </a:solidFill>
+                <a:latin typeface="Courier"/>
+              </a:rPr>
+              <a:t>aes</a:t>
+            </a:r>
+            <a:r>
+              <a:rPr>
+                <a:solidFill>
+                  <a:srgbClr val="003B4F"/>
+                </a:solidFill>
+                <a:latin typeface="Courier"/>
+              </a:rPr>
+              <a:t>(</a:t>
+            </a:r>
+            <a:r>
+              <a:rPr>
+                <a:solidFill>
+                  <a:srgbClr val="657422"/>
+                </a:solidFill>
+                <a:latin typeface="Courier"/>
+              </a:rPr>
+              <a:t>ymin =</a:t>
+            </a:r>
+            <a:r>
+              <a:rPr>
+                <a:solidFill>
+                  <a:srgbClr val="003B4F"/>
+                </a:solidFill>
+                <a:latin typeface="Courier"/>
+              </a:rPr>
+              <a:t> lower.CL, </a:t>
+            </a:r>
+            <a:r>
+              <a:rPr>
+                <a:solidFill>
+                  <a:srgbClr val="657422"/>
+                </a:solidFill>
+                <a:latin typeface="Courier"/>
+              </a:rPr>
+              <a:t>ymax =</a:t>
+            </a:r>
+            <a:r>
+              <a:rPr>
+                <a:solidFill>
+                  <a:srgbClr val="003B4F"/>
+                </a:solidFill>
+                <a:latin typeface="Courier"/>
+              </a:rPr>
+              <a:t> upper.CL),</a:t>
+            </a:r>
+            <a:br/>
+            <a:r>
+              <a:rPr>
+                <a:solidFill>
+                  <a:srgbClr val="003B4F"/>
+                </a:solidFill>
+                <a:latin typeface="Courier"/>
+              </a:rPr>
+              <a:t>    </a:t>
+            </a:r>
+            <a:r>
+              <a:rPr>
+                <a:solidFill>
+                  <a:srgbClr val="657422"/>
+                </a:solidFill>
+                <a:latin typeface="Courier"/>
+              </a:rPr>
+              <a:t>width =</a:t>
+            </a:r>
+            <a:r>
+              <a:rPr>
+                <a:solidFill>
+                  <a:srgbClr val="003B4F"/>
+                </a:solidFill>
+                <a:latin typeface="Courier"/>
+              </a:rPr>
+              <a:t> </a:t>
+            </a:r>
+            <a:r>
+              <a:rPr>
+                <a:solidFill>
+                  <a:srgbClr val="AD0000"/>
+                </a:solidFill>
+                <a:latin typeface="Courier"/>
+              </a:rPr>
+              <a:t>0.15</a:t>
+            </a:r>
+            <a:r>
+              <a:rPr>
+                <a:solidFill>
+                  <a:srgbClr val="003B4F"/>
+                </a:solidFill>
+                <a:latin typeface="Courier"/>
+              </a:rPr>
+              <a:t>, </a:t>
+            </a:r>
+            <a:r>
+              <a:rPr>
+                <a:solidFill>
+                  <a:srgbClr val="657422"/>
+                </a:solidFill>
+                <a:latin typeface="Courier"/>
+              </a:rPr>
+              <a:t>linewidth =</a:t>
+            </a:r>
+            <a:r>
+              <a:rPr>
+                <a:solidFill>
+                  <a:srgbClr val="003B4F"/>
+                </a:solidFill>
+                <a:latin typeface="Courier"/>
+              </a:rPr>
+              <a:t> </a:t>
+            </a:r>
+            <a:r>
+              <a:rPr>
+                <a:solidFill>
+                  <a:srgbClr val="AD0000"/>
+                </a:solidFill>
+                <a:latin typeface="Courier"/>
+              </a:rPr>
+              <a:t>0.9</a:t>
+            </a:r>
+            <a:br/>
+            <a:r>
+              <a:rPr>
+                <a:solidFill>
+                  <a:srgbClr val="003B4F"/>
+                </a:solidFill>
+                <a:latin typeface="Courier"/>
+              </a:rPr>
+              <a:t>  ) </a:t>
+            </a:r>
+            <a:r>
+              <a:rPr>
+                <a:solidFill>
+                  <a:srgbClr val="5E5E5E"/>
+                </a:solidFill>
+                <a:latin typeface="Courier"/>
+              </a:rPr>
+              <a:t>+</a:t>
+            </a:r>
+            <a:br/>
+            <a:r>
+              <a:rPr>
+                <a:solidFill>
+                  <a:srgbClr val="003B4F"/>
+                </a:solidFill>
+                <a:latin typeface="Courier"/>
+              </a:rPr>
+              <a:t>  </a:t>
+            </a:r>
+            <a:r>
+              <a:rPr>
+                <a:solidFill>
+                  <a:srgbClr val="4758AB"/>
+                </a:solidFill>
+                <a:latin typeface="Courier"/>
+              </a:rPr>
+              <a:t>labs</a:t>
+            </a:r>
+            <a:r>
+              <a:rPr>
+                <a:solidFill>
+                  <a:srgbClr val="003B4F"/>
+                </a:solidFill>
+                <a:latin typeface="Courier"/>
+              </a:rPr>
+              <a:t>(</a:t>
+            </a:r>
+            <a:r>
+              <a:rPr>
+                <a:solidFill>
+                  <a:srgbClr val="657422"/>
+                </a:solidFill>
+                <a:latin typeface="Courier"/>
+              </a:rPr>
+              <a:t>x =</a:t>
+            </a:r>
+            <a:r>
+              <a:rPr>
+                <a:solidFill>
+                  <a:srgbClr val="003B4F"/>
+                </a:solidFill>
+                <a:latin typeface="Courier"/>
+              </a:rPr>
+              <a:t> </a:t>
+            </a:r>
+            <a:r>
+              <a:rPr>
+                <a:solidFill>
+                  <a:srgbClr val="20794D"/>
+                </a:solidFill>
+                <a:latin typeface="Courier"/>
+              </a:rPr>
+              <a:t>"Species"</a:t>
+            </a:r>
+            <a:r>
+              <a:rPr>
+                <a:solidFill>
+                  <a:srgbClr val="003B4F"/>
+                </a:solidFill>
+                <a:latin typeface="Courier"/>
+              </a:rPr>
+              <a:t>, </a:t>
+            </a:r>
+            <a:r>
+              <a:rPr>
+                <a:solidFill>
+                  <a:srgbClr val="657422"/>
+                </a:solidFill>
+                <a:latin typeface="Courier"/>
+              </a:rPr>
+              <a:t>y =</a:t>
+            </a:r>
+            <a:r>
+              <a:rPr>
+                <a:solidFill>
+                  <a:srgbClr val="003B4F"/>
+                </a:solidFill>
+                <a:latin typeface="Courier"/>
+              </a:rPr>
+              <a:t> </a:t>
+            </a:r>
+            <a:r>
+              <a:rPr>
+                <a:solidFill>
+                  <a:srgbClr val="20794D"/>
+                </a:solidFill>
+                <a:latin typeface="Courier"/>
+              </a:rPr>
+              <a:t>"Estimated mean mass (g)"</a:t>
+            </a:r>
+            <a:r>
+              <a:rPr>
+                <a:solidFill>
+                  <a:srgbClr val="003B4F"/>
+                </a:solidFill>
+                <a:latin typeface="Courier"/>
+              </a:rPr>
+              <a:t>) </a:t>
+            </a:r>
+            <a:r>
+              <a:rPr>
+                <a:solidFill>
+                  <a:srgbClr val="5E5E5E"/>
+                </a:solidFill>
+                <a:latin typeface="Courier"/>
+              </a:rPr>
+              <a:t>+</a:t>
+            </a:r>
+            <a:br/>
+            <a:r>
+              <a:rPr>
+                <a:solidFill>
+                  <a:srgbClr val="003B4F"/>
+                </a:solidFill>
+                <a:latin typeface="Courier"/>
+              </a:rPr>
+              <a:t>  </a:t>
+            </a:r>
+            <a:r>
+              <a:rPr>
+                <a:solidFill>
+                  <a:srgbClr val="4758AB"/>
+                </a:solidFill>
+                <a:latin typeface="Courier"/>
+              </a:rPr>
+              <a:t>theme_minimal</a:t>
+            </a:r>
+            <a:r>
+              <a:rPr>
+                <a:solidFill>
+                  <a:srgbClr val="003B4F"/>
+                </a:solidFill>
+                <a:latin typeface="Courier"/>
+              </a:rPr>
+              <a:t>() </a:t>
+            </a:r>
+            <a:r>
+              <a:rPr>
+                <a:solidFill>
+                  <a:srgbClr val="5E5E5E"/>
+                </a:solidFill>
+                <a:latin typeface="Courier"/>
+              </a:rPr>
+              <a:t>+</a:t>
+            </a:r>
+            <a:br/>
+            <a:r>
+              <a:rPr>
+                <a:solidFill>
+                  <a:srgbClr val="003B4F"/>
+                </a:solidFill>
+                <a:latin typeface="Courier"/>
+              </a:rPr>
+              <a:t>  </a:t>
+            </a:r>
+            <a:r>
+              <a:rPr>
+                <a:solidFill>
+                  <a:srgbClr val="4758AB"/>
+                </a:solidFill>
+                <a:latin typeface="Courier"/>
+              </a:rPr>
+              <a:t>theme</a:t>
+            </a:r>
+            <a:r>
+              <a:rPr>
+                <a:solidFill>
+                  <a:srgbClr val="003B4F"/>
+                </a:solidFill>
+                <a:latin typeface="Courier"/>
+              </a:rPr>
+              <a:t>(</a:t>
+            </a:r>
+            <a:r>
+              <a:rPr>
+                <a:solidFill>
+                  <a:srgbClr val="657422"/>
+                </a:solidFill>
+                <a:latin typeface="Courier"/>
+              </a:rPr>
+              <a:t>legend.position =</a:t>
+            </a:r>
+            <a:r>
+              <a:rPr>
+                <a:solidFill>
+                  <a:srgbClr val="003B4F"/>
+                </a:solidFill>
+                <a:latin typeface="Courier"/>
+              </a:rPr>
+              <a:t> </a:t>
+            </a:r>
+            <a:r>
+              <a:rPr>
+                <a:solidFill>
+                  <a:srgbClr val="20794D"/>
+                </a:solidFill>
+                <a:latin typeface="Courier"/>
+              </a:rPr>
+              <a:t>"none"</a:t>
+            </a:r>
+            <a:r>
+              <a:rPr>
+                <a:solidFill>
+                  <a:srgbClr val="003B4F"/>
+                </a:solidFill>
+                <a:latin typeface="Courier"/>
+              </a:rPr>
+              <a:t>)</a:t>
+            </a:r>
+            <a:br/>
+            <a:br/>
+            <a:r>
+              <a:rPr>
+                <a:solidFill>
+                  <a:srgbClr val="003B4F"/>
+                </a:solidFill>
+                <a:latin typeface="Courier"/>
+              </a:rPr>
+              <a:t>mass_emm_plot</a:t>
+            </a:r>
+          </a:p>
+        </p:txBody>
+      </p:sp>
+      <p:pic>
+        <p:nvPicPr>
+          <p:cNvPr descr="one_way_anova_2_lecture_files/figure-pptx/emmeans-plot-16-1.png" id="0" name="Picture 1"/>
+          <p:cNvPicPr>
+            <a:picLocks noGrp="1" noChangeAspect="1"/>
+          </p:cNvPicPr>
+          <p:nvPr/>
+        </p:nvPicPr>
+        <p:blipFill>
+          <a:blip r:embed="rId2"/>
+          <a:stretch>
+            <a:fillRect/>
+          </a:stretch>
+        </p:blipFill>
+        <p:spPr bwMode="auto">
+          <a:xfrm>
+            <a:off x="127000" y="2006600"/>
+            <a:ext cx="4432300" cy="1841500"/>
+          </a:xfrm>
+          <a:prstGeom prst="rect">
+            <a:avLst/>
+          </a:prstGeom>
+          <a:noFill/>
+          <a:ln w="9525">
+            <a:noFill/>
+            <a:headEnd/>
+            <a:tailEnd/>
+          </a:ln>
+        </p:spPr>
+      </p:pic>
+      <p:sp>
+        <p:nvSpPr>
+          <p:cNvPr id="5" name="Text Placeholder 4"/>
+          <p:cNvSpPr>
+            <a:spLocks noGrp="1"/>
+          </p:cNvSpPr>
+          <p:nvPr>
+            <p:ph idx="3" sz="quarter" type="body"/>
+          </p:nvPr>
+        </p:nvSpPr>
+        <p:spPr/>
+        <p:txBody>
+          <a:bodyPr/>
+          <a:lstStyle/>
+          <a:p>
+            <a:pPr lvl="0"/>
+            <a:r>
+              <a:rPr/>
+              <a:t>Adelie and Chinstrap intervals </a:t>
+            </a:r>
+            <a:r>
+              <a:rPr b="1"/>
+              <a:t>overlap</a:t>
+            </a:r>
+            <a:r>
+              <a:rPr/>
+              <a:t> — consistent with </a:t>
+            </a:r>
+            <a:r>
+              <a:rPr i="1"/>
+              <a:t>p</a:t>
+            </a:r>
+            <a:r>
+              <a:rPr/>
+              <a:t> = 0.88</a:t>
+            </a:r>
+          </a:p>
+          <a:p>
+            <a:pPr lvl="0"/>
+            <a:r>
+              <a:rPr/>
+              <a:t>Gentoo’s interval is nowhere near the other two</a:t>
             </a:r>
           </a:p>
           <a:p>
@@ -5706,16 +7198,696 @@
               <a:buNone/>
             </a:pPr>
             <a:r>
+              <a:rPr sz="2000" b="1"/>
+              <a:t>Important</a:t>
+            </a:r>
+          </a:p>
+          <a:p>
+            <a:pPr lvl="0" indent="0" marL="1270000">
+              <a:buNone/>
+            </a:pPr>
+            <a:r>
               <a:rPr sz="2000"/>
-              <a:t>The model is fit and its assumptions are checked. Today we actually read the F table, find </a:t>
+              <a:t>Overlapping CIs are a </a:t>
             </a:r>
             <a:r>
               <a:rPr sz="2000" b="1"/>
-              <a:t>which</a:t>
+              <a:t>hint</a:t>
             </a:r>
             <a:r>
               <a:rPr sz="2000"/>
-              <a:t> species differ, and turn the result into a sentence a reader can trust.</a:t>
+              <a:t>, not a test. The </a:t>
+            </a:r>
+            <a:r>
+              <a:rPr sz="2000" i="1"/>
+              <a:t>p</a:t>
+            </a:r>
+            <a:r>
+              <a:rPr sz="2000"/>
+              <a:t>-value is the test; the plot is how your reader sees it.</a:t>
+            </a:r>
+          </a:p>
+          <a:p>
+            <a:pPr lvl="0" indent="0" marL="0">
+              <a:buNone/>
+            </a:pPr>
+            <a:r>
+              <a:rPr/>
+              <a:t>This is the ANOVA cousin of the mean ± SE plot from the summary-stats lecture.</a:t>
+            </a:r>
+          </a:p>
+        </p:txBody>
+      </p:sp>
+    </p:spTree>
+  </p:cSld>
+</p:sld>
+</file>
+
+<file path=ppt/slides/slide24.xml><?xml version="1.0" encoding="utf-8"?>
+<p:sld xmlns:a="http://schemas.openxmlformats.org/drawingml/2006/main" xmlns:r="http://schemas.openxmlformats.org/officeDocument/2006/relationships" xmlns:p="http://schemas.openxmlformats.org/presentationml/2006/main">
+  <p:cSld>
+    <p:spTree>
+      <p:nvGrpSpPr>
+        <p:cNvPr id="1" name=""/>
+        <p:cNvGrpSpPr/>
+        <p:nvPr/>
+      </p:nvGrpSpPr>
+      <p:grpSpPr>
+        <a:xfrm>
+          <a:off x="0" y="0"/>
+          <a:ext cx="0" cy="0"/>
+          <a:chOff x="0" y="0"/>
+          <a:chExt cx="0" cy="0"/>
+        </a:xfrm>
+      </p:grpSpPr>
+      <p:sp>
+        <p:nvSpPr>
+          <p:cNvPr id="2" name="Title 1"/>
+          <p:cNvSpPr>
+            <a:spLocks noGrp="1"/>
+          </p:cNvSpPr>
+          <p:nvPr>
+            <p:ph type="title"/>
+          </p:nvPr>
+        </p:nvSpPr>
+        <p:spPr>
+          <a:xfrm>
+            <a:off x="0" y="0"/>
+            <a:ext cx="9144000" cy="602780"/>
+          </a:xfrm>
+          <a:solidFill>
+            <a:srgbClr val="1A1A2E"/>
+          </a:solidFill>
+        </p:spPr>
+        <p:txBody>
+          <a:bodyPr/>
+          <a:lstStyle/>
+          <a:p>
+            <a:pPr lvl="0" indent="0" marL="0">
+              <a:buNone/>
+            </a:pPr>
+            <a:r>
+              <a:rPr/>
+              <a:t>How to Report the Whole Thing</a:t>
+            </a:r>
+          </a:p>
+        </p:txBody>
+      </p:sp>
+      <p:sp>
+        <p:nvSpPr>
+          <p:cNvPr id="3" name="Content Placeholder 2"/>
+          <p:cNvSpPr>
+            <a:spLocks noGrp="1"/>
+          </p:cNvSpPr>
+          <p:nvPr>
+            <p:ph idx="1" sz="half"/>
+          </p:nvPr>
+        </p:nvSpPr>
+        <p:spPr/>
+        <p:txBody>
+          <a:bodyPr/>
+          <a:lstStyle/>
+          <a:p>
+            <a:pPr lvl="0" indent="0" marL="1270000">
+              <a:buNone/>
+            </a:pPr>
+            <a:r>
+              <a:rPr sz="2000" i="1"/>
+              <a:t>“Body mass differed among the three penguin species. Variances were unequal (Levene’s test: F(2, 339) = 5.12, p = 0.006), so we report Welch’s ANOVA: F(2, 189.5) = 317.6, p &lt; 0.001. Tukey-adjusted pairwise comparisons showed that Gentoo penguins (5076 ± 42 g) were heavier than both Adelie (3701 ± 38 g, p &lt; 0.001) and Chinstrap (3733 ± 56 g, p &lt; 0.001), while Adelie and Chinstrap did not differ (p = 0.88).”</a:t>
+            </a:r>
+          </a:p>
+        </p:txBody>
+      </p:sp>
+      <p:sp>
+        <p:nvSpPr>
+          <p:cNvPr id="4" name="Content Placeholder 3"/>
+          <p:cNvSpPr>
+            <a:spLocks noGrp="1"/>
+          </p:cNvSpPr>
+          <p:nvPr>
+            <p:ph idx="2" sz="half"/>
+          </p:nvPr>
+        </p:nvSpPr>
+        <p:spPr/>
+        <p:txBody>
+          <a:bodyPr/>
+          <a:lstStyle/>
+          <a:p>
+            <a:pPr lvl="0" indent="0" marL="0">
+              <a:buNone/>
+            </a:pPr>
+            <a:r>
+              <a:rPr b="1"/>
+              <a:t>Every piece earns its place:</a:t>
+            </a:r>
+          </a:p>
+          <a:p>
+            <a:pPr lvl="0"/>
+            <a:r>
+              <a:rPr/>
+              <a:t>the assumption you checked, and what you did about it</a:t>
+            </a:r>
+          </a:p>
+          <a:p>
+            <a:pPr lvl="0"/>
+            <a:r>
+              <a:rPr/>
+              <a:t>the test, </a:t>
+            </a:r>
+            <a:r>
+              <a:rPr b="1"/>
+              <a:t>F</a:t>
+            </a:r>
+            <a:r>
+              <a:rPr/>
+              <a:t>, </a:t>
+            </a:r>
+            <a:r>
+              <a:rPr b="1"/>
+              <a:t>both df</a:t>
+            </a:r>
+            <a:r>
+              <a:rPr/>
+              <a:t>, </a:t>
+            </a:r>
+            <a:r>
+              <a:rPr b="1" i="1"/>
+              <a:t>p</a:t>
+            </a:r>
+          </a:p>
+          <a:p>
+            <a:pPr lvl="0"/>
+            <a:r>
+              <a:rPr/>
+              <a:t>the follow-up, named as adjusted</a:t>
+            </a:r>
+          </a:p>
+          <a:p>
+            <a:pPr lvl="0"/>
+            <a:r>
+              <a:rPr/>
+              <a:t>the </a:t>
+            </a:r>
+            <a:r>
+              <a:rPr b="1"/>
+              <a:t>means ± SE</a:t>
+            </a:r>
+            <a:r>
+              <a:rPr/>
+              <a:t>, so a reader can see the size of the effect</a:t>
+            </a:r>
+          </a:p>
+          <a:p>
+            <a:pPr lvl="0"/>
+            <a:r>
+              <a:rPr/>
+              <a:t>the pair that did </a:t>
+            </a:r>
+            <a:r>
+              <a:rPr b="1"/>
+              <a:t>not</a:t>
+            </a:r>
+            <a:r>
+              <a:rPr/>
+              <a:t> differ — reporting that is not a failure, it is the finding</a:t>
+            </a:r>
+          </a:p>
+        </p:txBody>
+      </p:sp>
+    </p:spTree>
+  </p:cSld>
+</p:sld>
+</file>
+
+<file path=ppt/slides/slide25.xml><?xml version="1.0" encoding="utf-8"?>
+<p:sld xmlns:a="http://schemas.openxmlformats.org/drawingml/2006/main" xmlns:r="http://schemas.openxmlformats.org/officeDocument/2006/relationships" xmlns:p="http://schemas.openxmlformats.org/presentationml/2006/main">
+  <p:cSld>
+    <p:spTree>
+      <p:nvGrpSpPr>
+        <p:cNvPr id="1" name=""/>
+        <p:cNvGrpSpPr/>
+        <p:nvPr/>
+      </p:nvGrpSpPr>
+      <p:grpSpPr>
+        <a:xfrm>
+          <a:off x="0" y="0"/>
+          <a:ext cx="0" cy="0"/>
+          <a:chOff x="0" y="0"/>
+          <a:chExt cx="0" cy="0"/>
+        </a:xfrm>
+      </p:grpSpPr>
+      <p:sp>
+        <p:nvSpPr>
+          <p:cNvPr id="2" name="Title 1"/>
+          <p:cNvSpPr>
+            <a:spLocks noGrp="1"/>
+          </p:cNvSpPr>
+          <p:nvPr>
+            <p:ph type="title"/>
+          </p:nvPr>
+        </p:nvSpPr>
+        <p:spPr>
+          <a:xfrm>
+            <a:off x="0" y="0"/>
+            <a:ext cx="9144000" cy="582780"/>
+          </a:xfrm>
+        </p:spPr>
+        <p:txBody>
+          <a:bodyPr/>
+          <a:lstStyle/>
+          <a:p>
+            <a:pPr lvl="0" indent="0" marL="0">
+              <a:buNone/>
+            </a:pPr>
+            <a:r>
+              <a:rPr/>
+              <a:t>🛑 Now Go Run It</a:t>
+            </a:r>
+          </a:p>
+        </p:txBody>
+      </p:sp>
+      <p:sp>
+        <p:nvSpPr>
+          <p:cNvPr id="3" name="Content Placeholder 2"/>
+          <p:cNvSpPr>
+            <a:spLocks noGrp="1"/>
+          </p:cNvSpPr>
+          <p:nvPr>
+            <p:ph idx="1"/>
+          </p:nvPr>
+        </p:nvSpPr>
+        <p:spPr/>
+        <p:txBody>
+          <a:bodyPr/>
+          <a:lstStyle/>
+          <a:p>
+            <a:pPr lvl="0" indent="0" marL="0">
+              <a:buNone/>
+            </a:pPr>
+            <a:r>
+              <a:rPr/>
+              <a:t>Open </a:t>
+            </a:r>
+            <a:r>
+              <a:rPr>
+                <a:latin typeface="Courier"/>
+              </a:rPr>
+              <a:t>scripts/20_anova_2_skeleton.R</a:t>
+            </a:r>
+            <a:r>
+              <a:rPr/>
+              <a:t>. Part A is pre-filled — run it chunk by chunk and answer the </a:t>
+            </a:r>
+            <a:r>
+              <a:rPr b="1"/>
+              <a:t>QA</a:t>
+            </a:r>
+            <a:r>
+              <a:rPr/>
+              <a:t> boxes. Part B is the homework: Sets 2 and 3 again on a </a:t>
+            </a:r>
+            <a:r>
+              <a:rPr b="1"/>
+              <a:t>different measurement</a:t>
+            </a:r>
+            <a:r>
+              <a:rPr/>
+              <a:t> — </a:t>
+            </a:r>
+            <a:r>
+              <a:rPr>
+                <a:latin typeface="Courier"/>
+              </a:rPr>
+              <a:t>flipper_length_mm</a:t>
+            </a:r>
+            <a:r>
+              <a:rPr/>
+              <a:t>, </a:t>
+            </a:r>
+            <a:r>
+              <a:rPr>
+                <a:latin typeface="Courier"/>
+              </a:rPr>
+              <a:t>bill_length_mm</a:t>
+            </a:r>
+            <a:r>
+              <a:rPr/>
+              <a:t> or </a:t>
+            </a:r>
+            <a:r>
+              <a:rPr>
+                <a:latin typeface="Courier"/>
+              </a:rPr>
+              <a:t>bill_depth_mm</a:t>
+            </a:r>
+            <a:r>
+              <a:rPr/>
+              <a:t> — and you write that code yourself.</a:t>
+            </a:r>
+          </a:p>
+          <a:p>
+            <a:pPr lvl="0" indent="0" marL="1270000">
+              <a:buNone/>
+            </a:pPr>
+            <a:r>
+              <a:rPr sz="2000" b="1"/>
+              <a:t>Tip</a:t>
+            </a:r>
+          </a:p>
+          <a:p>
+            <a:pPr lvl="0" indent="0" marL="1270000">
+              <a:buNone/>
+            </a:pPr>
+            <a:r>
+              <a:rPr sz="2000"/>
+              <a:t>Your Part B numbers will not match your neighbour’s. One of the three columns passes Levene’s test cleanly, one gives </a:t>
+            </a:r>
+            <a:r>
+              <a:rPr sz="2000" b="1"/>
+              <a:t>three different letters</a:t>
+            </a:r>
+            <a:r>
+              <a:rPr sz="2000"/>
+              <a:t>, and one puts </a:t>
+            </a:r>
+            <a:r>
+              <a:rPr sz="2000" b="1"/>
+              <a:t>Gentoo at the bottom</a:t>
+            </a:r>
+            <a:r>
+              <a:rPr sz="2000"/>
+              <a:t>. Do not assume it will look like body mass.</a:t>
+            </a:r>
+          </a:p>
+        </p:txBody>
+      </p:sp>
+    </p:spTree>
+  </p:cSld>
+</p:sld>
+</file>
+
+<file path=ppt/slides/slide26.xml><?xml version="1.0" encoding="utf-8"?>
+<p:sld xmlns:a="http://schemas.openxmlformats.org/drawingml/2006/main" xmlns:r="http://schemas.openxmlformats.org/officeDocument/2006/relationships" xmlns:p="http://schemas.openxmlformats.org/presentationml/2006/main">
+  <p:cSld>
+    <p:spTree>
+      <p:nvGrpSpPr>
+        <p:cNvPr id="1" name=""/>
+        <p:cNvGrpSpPr/>
+        <p:nvPr/>
+      </p:nvGrpSpPr>
+      <p:grpSpPr>
+        <a:xfrm>
+          <a:off x="0" y="0"/>
+          <a:ext cx="0" cy="0"/>
+          <a:chOff x="0" y="0"/>
+          <a:chExt cx="0" cy="0"/>
+        </a:xfrm>
+      </p:grpSpPr>
+      <p:sp>
+        <p:nvSpPr>
+          <p:cNvPr id="2" name="Title 1"/>
+          <p:cNvSpPr>
+            <a:spLocks noGrp="1"/>
+          </p:cNvSpPr>
+          <p:nvPr>
+            <p:ph type="title"/>
+          </p:nvPr>
+        </p:nvSpPr>
+        <p:spPr>
+          <a:xfrm>
+            <a:off x="0" y="0"/>
+            <a:ext cx="9144000" cy="602780"/>
+          </a:xfrm>
+          <a:solidFill>
+            <a:srgbClr val="1A1A2E"/>
+          </a:solidFill>
+        </p:spPr>
+        <p:txBody>
+          <a:bodyPr/>
+          <a:lstStyle/>
+          <a:p>
+            <a:pPr lvl="0" indent="0" marL="0">
+              <a:buNone/>
+            </a:pPr>
+            <a:r>
+              <a:rPr/>
+              <a:t>What We Learned Today</a:t>
+            </a:r>
+          </a:p>
+        </p:txBody>
+      </p:sp>
+      <p:sp>
+        <p:nvSpPr>
+          <p:cNvPr id="3" name="Content Placeholder 2"/>
+          <p:cNvSpPr>
+            <a:spLocks noGrp="1"/>
+          </p:cNvSpPr>
+          <p:nvPr>
+            <p:ph idx="1" sz="half"/>
+          </p:nvPr>
+        </p:nvSpPr>
+        <p:spPr/>
+        <p:txBody>
+          <a:bodyPr/>
+          <a:lstStyle/>
+          <a:p>
+            <a:pPr lvl="0" indent="0" marL="0">
+              <a:buNone/>
+            </a:pPr>
+            <a:r>
+              <a:rPr b="1"/>
+              <a:t>Concepts:</a:t>
+            </a:r>
+          </a:p>
+          <a:p>
+            <a:pPr lvl="0"/>
+            <a:r>
+              <a:rPr/>
+              <a:t>Normality is about the </a:t>
+            </a:r>
+            <a:r>
+              <a:rPr b="1"/>
+              <a:t>residuals</a:t>
+            </a:r>
+            <a:r>
+              <a:rPr/>
+              <a:t>, not the raw data</a:t>
+            </a:r>
+          </a:p>
+          <a:p>
+            <a:pPr lvl="0"/>
+            <a:r>
+              <a:rPr/>
+              <a:t>Unequal variance + unequal n is the case that actually matters → </a:t>
+            </a:r>
+            <a:r>
+              <a:rPr b="1"/>
+              <a:t>Welch’s ANOVA</a:t>
+            </a:r>
+          </a:p>
+          <a:p>
+            <a:pPr lvl="0"/>
+            <a:r>
+              <a:rPr/>
+              <a:t>A significant F licenses a </a:t>
+            </a:r>
+            <a:r>
+              <a:rPr b="1"/>
+              <a:t>follow-up</a:t>
+            </a:r>
+            <a:r>
+              <a:rPr/>
+              <a:t>; it does not name the groups</a:t>
+            </a:r>
+          </a:p>
+          <a:p>
+            <a:pPr lvl="0"/>
+            <a:r>
+              <a:rPr b="1"/>
+              <a:t>Tukey adjustment</a:t>
+            </a:r>
+            <a:r>
+              <a:rPr/>
+              <a:t> keeps family-wise error at 0.05</a:t>
+            </a:r>
+          </a:p>
+          <a:p>
+            <a:pPr lvl="0"/>
+            <a:r>
+              <a:rPr/>
+              <a:t>A shared letter means </a:t>
+            </a:r>
+            <a:r>
+              <a:rPr i="1"/>
+              <a:t>not shown to be different</a:t>
+            </a:r>
+            <a:r>
+              <a:rPr/>
+              <a:t> — not </a:t>
+            </a:r>
+            <a:r>
+              <a:rPr i="1"/>
+              <a:t>proven the same</a:t>
+            </a:r>
+          </a:p>
+          <a:p>
+            <a:pPr lvl="0" indent="0" marL="0">
+              <a:buNone/>
+            </a:pPr>
+            <a:r>
+              <a:rPr b="1"/>
+              <a:t>R skills:</a:t>
+            </a:r>
+          </a:p>
+          <a:p>
+            <a:pPr lvl="0"/>
+            <a:r>
+              <a:rPr>
+                <a:latin typeface="Courier"/>
+              </a:rPr>
+              <a:t>plot(model)</a:t>
+            </a:r>
+            <a:r>
+              <a:rPr/>
+              <a:t>, </a:t>
+            </a:r>
+            <a:r>
+              <a:rPr>
+                <a:latin typeface="Courier"/>
+              </a:rPr>
+              <a:t>shapiro.test(residuals(model))</a:t>
+            </a:r>
+          </a:p>
+          <a:p>
+            <a:pPr lvl="0"/>
+            <a:r>
+              <a:rPr>
+                <a:latin typeface="Courier"/>
+              </a:rPr>
+              <a:t>leveneTest()</a:t>
+            </a:r>
+            <a:r>
+              <a:rPr/>
+              <a:t>, </a:t>
+            </a:r>
+            <a:r>
+              <a:rPr>
+                <a:latin typeface="Courier"/>
+              </a:rPr>
+              <a:t>oneway.test(var.equal = FALSE)</a:t>
+            </a:r>
+          </a:p>
+          <a:p>
+            <a:pPr lvl="0"/>
+            <a:r>
+              <a:rPr>
+                <a:latin typeface="Courier"/>
+              </a:rPr>
+              <a:t>kruskal.test()</a:t>
+            </a:r>
+            <a:r>
+              <a:rPr/>
+              <a:t> — know it exists; we do not run it today</a:t>
+            </a:r>
+          </a:p>
+          <a:p>
+            <a:pPr lvl="0"/>
+            <a:r>
+              <a:rPr>
+                <a:latin typeface="Courier"/>
+              </a:rPr>
+              <a:t>emmeans(model, pairwise ~ group)</a:t>
+            </a:r>
+            <a:r>
+              <a:rPr/>
+              <a:t>, </a:t>
+            </a:r>
+            <a:r>
+              <a:rPr>
+                <a:latin typeface="Courier"/>
+              </a:rPr>
+              <a:t>multcomp::cld()</a:t>
+            </a:r>
+          </a:p>
+          <a:p>
+            <a:pPr lvl="0"/>
+            <a:r>
+              <a:rPr>
+                <a:latin typeface="Courier"/>
+              </a:rPr>
+              <a:t>pairwise.t.test(pool.sd = FALSE)</a:t>
+            </a:r>
+          </a:p>
+        </p:txBody>
+      </p:sp>
+      <p:sp>
+        <p:nvSpPr>
+          <p:cNvPr id="4" name="Content Placeholder 3"/>
+          <p:cNvSpPr>
+            <a:spLocks noGrp="1"/>
+          </p:cNvSpPr>
+          <p:nvPr>
+            <p:ph idx="2" sz="half"/>
+          </p:nvPr>
+        </p:nvSpPr>
+        <p:spPr/>
+        <p:txBody>
+          <a:bodyPr/>
+          <a:lstStyle/>
+          <a:p>
+            <a:pPr lvl="0" indent="0" marL="0">
+              <a:buNone/>
+            </a:pPr>
+            <a:r>
+              <a:rPr b="1"/>
+              <a:t>References:</a:t>
+            </a:r>
+          </a:p>
+          <a:p>
+            <a:pPr lvl="0"/>
+            <a:r>
+              <a:rPr/>
+              <a:t>📖 W&amp;S Ch. 15 — ANOVA</a:t>
+            </a:r>
+          </a:p>
+          <a:p>
+            <a:pPr lvl="0"/>
+            <a:r>
+              <a:rPr/>
+              <a:t>📖 </a:t>
+            </a:r>
+            <a:r>
+              <a:rPr>
+                <a:hlinkClick r:id="rId2"/>
+              </a:rPr>
+              <a:t>emmeans vignettes</a:t>
+            </a:r>
+          </a:p>
+          <a:p>
+            <a:pPr lvl="0" indent="0" marL="0">
+              <a:buNone/>
+            </a:pPr>
+            <a:r>
+              <a:rPr b="1"/>
+              <a:t>Up next — Lecture 21:</a:t>
+            </a:r>
+          </a:p>
+          <a:p>
+            <a:pPr lvl="0"/>
+            <a:r>
+              <a:rPr/>
+              <a:t>The </a:t>
+            </a:r>
+            <a:r>
+              <a:rPr b="1"/>
+              <a:t>final project</a:t>
+            </a:r>
+          </a:p>
+          <a:p>
+            <a:pPr lvl="0"/>
+            <a:r>
+              <a:rPr/>
+              <a:t>You now have the full toolkit: wrangle → plot → check → test → follow up → report. The project is you doing that on data you chose.</a:t>
             </a:r>
           </a:p>
         </p:txBody>
@@ -5790,73 +7962,100 @@
           <a:bodyPr/>
           <a:lstStyle/>
           <a:p>
+            <a:pPr lvl="0" indent="0" marL="0">
+              <a:buNone/>
+            </a:pPr>
+            <a:r>
+              <a:rPr b="1"/>
+              <a:t>Set 2 — the assumptions</a:t>
+            </a:r>
+          </a:p>
+          <a:p>
             <a:pPr lvl="0"/>
             <a:r>
               <a:rPr/>
-              <a:t>Run the ANOVA two ways: </a:t>
-            </a:r>
-            <a:r>
-              <a:rPr>
-                <a:latin typeface="Courier"/>
-              </a:rPr>
-              <a:t>aov()</a:t>
-            </a:r>
-            <a:r>
-              <a:rPr/>
-              <a:t> and </a:t>
-            </a:r>
-            <a:r>
-              <a:rPr b="1">
-                <a:latin typeface="Courier"/>
-              </a:rPr>
-              <a:t>car::Anova()</a:t>
+              <a:t>Normality of the </a:t>
+            </a:r>
+            <a:r>
+              <a:rPr b="1"/>
+              <a:t>residuals</a:t>
+            </a:r>
+            <a:r>
+              <a:rPr/>
+              <a:t> — </a:t>
+            </a:r>
+            <a:r>
+              <a:rPr>
+                <a:latin typeface="Courier"/>
+              </a:rPr>
+              <a:t>plot(model)</a:t>
+            </a:r>
+            <a:r>
+              <a:rPr/>
+              <a:t>, QQ, Shapiro-Wilk</a:t>
             </a:r>
           </a:p>
           <a:p>
             <a:pPr lvl="0"/>
             <a:r>
-              <a:rPr/>
-              <a:t>Understand why </a:t>
-            </a:r>
-            <a:r>
               <a:rPr b="1"/>
-              <a:t>Type II</a:t>
-            </a:r>
-            <a:r>
-              <a:rPr/>
-              <a:t> sums of squares matter for unbalanced data</a:t>
+              <a:t>Equal variance</a:t>
+            </a:r>
+            <a:r>
+              <a:rPr/>
+              <a:t> — Levene’s test</a:t>
             </a:r>
           </a:p>
           <a:p>
             <a:pPr lvl="0"/>
             <a:r>
               <a:rPr/>
-              <a:t>Find </a:t>
+              <a:t>What to do when one fails → </a:t>
             </a:r>
             <a:r>
               <a:rPr b="1"/>
-              <a:t>which</a:t>
-            </a:r>
-            <a:r>
-              <a:rPr/>
-              <a:t> groups differ with </a:t>
-            </a:r>
-            <a:r>
-              <a:rPr b="1">
+              <a:t>Welch’s ANOVA</a:t>
+            </a:r>
+          </a:p>
+          <a:p>
+            <a:pPr lvl="0" indent="0" marL="0">
+              <a:buNone/>
+            </a:pPr>
+            <a:r>
+              <a:rPr b="1"/>
+              <a:t>Set 3 — the follow-up tests</a:t>
+            </a:r>
+          </a:p>
+          <a:p>
+            <a:pPr lvl="0"/>
+            <a:r>
+              <a:rPr i="1"/>
+              <a:t>Which</a:t>
+            </a:r>
+            <a:r>
+              <a:rPr/>
+              <a:t> groups differ — </a:t>
+            </a:r>
+            <a:r>
+              <a:rPr>
                 <a:latin typeface="Courier"/>
               </a:rPr>
               <a:t>emmeans</a:t>
             </a:r>
             <a:r>
               <a:rPr/>
-              <a:t> post-hoc tests</a:t>
+              <a:t> pairwise, Tukey-adjusted</a:t>
             </a:r>
           </a:p>
           <a:p>
             <a:pPr lvl="0"/>
             <a:r>
               <a:rPr/>
-              <a:t>Read a compact letter display (CLD)</a:t>
+              <a:t>Read a </a:t>
+            </a:r>
+            <a:r>
+              <a:rPr b="1"/>
+              <a:t>compact letter display</a:t>
             </a:r>
           </a:p>
           <a:p>
@@ -5870,7 +8069,7 @@
             <a:pPr lvl="0"/>
             <a:r>
               <a:rPr/>
-              <a:t>Write a complete, reportable results sentence</a:t>
+              <a:t>Write the finished results sentence</a:t>
             </a:r>
           </a:p>
         </p:txBody>
@@ -5914,6 +8113,16 @@
               <a:rPr>
                 <a:latin typeface="Courier"/>
               </a:rPr>
+              <a:t>leveneTest()</a:t>
+            </a:r>
+            <a:r>
+              <a:rPr/>
+              <a:t>, </a:t>
+            </a:r>
+            <a:r>
+              <a:rPr>
+                <a:latin typeface="Courier"/>
+              </a:rPr>
               <a:t>Anova()</a:t>
             </a:r>
           </a:p>
@@ -5937,7 +8146,7 @@
             </a:r>
             <a:r>
               <a:rPr/>
-              <a:t> — post-hoc, CLD</a:t>
+              <a:t> — pairwise tests, letters</a:t>
             </a:r>
           </a:p>
           <a:p>
@@ -5953,7 +8162,7 @@
             <a:pPr lvl="0"/>
             <a:r>
               <a:rPr/>
-              <a:t>📖 Whitlock &amp; Schluter, </a:t>
+              <a:t>📖 W&amp;S </a:t>
             </a:r>
             <a:r>
               <a:rPr b="1"/>
@@ -6054,7 +8263,7 @@
             </a:pPr>
             <a:r>
               <a:rPr/>
-              <a:t>How to Use These Slides — Predict · Type · Run</a:t>
+              <a:t>Set Up Again — Same Four Lines</a:t>
             </a:r>
           </a:p>
         </p:txBody>
@@ -6074,101 +8283,289 @@
           <a:bodyPr/>
           <a:lstStyle/>
           <a:p>
+            <a:pPr lvl="0" indent="0">
+              <a:buNone/>
+            </a:pPr>
+            <a:r>
+              <a:rPr>
+                <a:solidFill>
+                  <a:srgbClr val="5E5E5E"/>
+                </a:solidFill>
+                <a:latin typeface="Courier"/>
+              </a:rPr>
+              <a:t># Load packages at the top — always -------------------</a:t>
+            </a:r>
+            <a:br/>
+            <a:r>
+              <a:rPr>
+                <a:solidFill>
+                  <a:srgbClr val="4758AB"/>
+                </a:solidFill>
+                <a:latin typeface="Courier"/>
+              </a:rPr>
+              <a:t>library</a:t>
+            </a:r>
+            <a:r>
+              <a:rPr>
+                <a:solidFill>
+                  <a:srgbClr val="003B4F"/>
+                </a:solidFill>
+                <a:latin typeface="Courier"/>
+              </a:rPr>
+              <a:t>(tidyverse)      </a:t>
+            </a:r>
+            <a:r>
+              <a:rPr>
+                <a:solidFill>
+                  <a:srgbClr val="5E5E5E"/>
+                </a:solidFill>
+                <a:latin typeface="Courier"/>
+              </a:rPr>
+              <a:t># wrangling + ggplot2</a:t>
+            </a:r>
+            <a:br/>
+            <a:r>
+              <a:rPr>
+                <a:solidFill>
+                  <a:srgbClr val="4758AB"/>
+                </a:solidFill>
+                <a:latin typeface="Courier"/>
+              </a:rPr>
+              <a:t>library</a:t>
+            </a:r>
+            <a:r>
+              <a:rPr>
+                <a:solidFill>
+                  <a:srgbClr val="003B4F"/>
+                </a:solidFill>
+                <a:latin typeface="Courier"/>
+              </a:rPr>
+              <a:t>(palmerpenguins) </a:t>
+            </a:r>
+            <a:r>
+              <a:rPr>
+                <a:solidFill>
+                  <a:srgbClr val="5E5E5E"/>
+                </a:solidFill>
+                <a:latin typeface="Courier"/>
+              </a:rPr>
+              <a:t># the penguins data</a:t>
+            </a:r>
+            <a:br/>
+            <a:r>
+              <a:rPr>
+                <a:solidFill>
+                  <a:srgbClr val="4758AB"/>
+                </a:solidFill>
+                <a:latin typeface="Courier"/>
+              </a:rPr>
+              <a:t>library</a:t>
+            </a:r>
+            <a:r>
+              <a:rPr>
+                <a:solidFill>
+                  <a:srgbClr val="003B4F"/>
+                </a:solidFill>
+                <a:latin typeface="Courier"/>
+              </a:rPr>
+              <a:t>(car)            </a:t>
+            </a:r>
+            <a:r>
+              <a:rPr>
+                <a:solidFill>
+                  <a:srgbClr val="5E5E5E"/>
+                </a:solidFill>
+                <a:latin typeface="Courier"/>
+              </a:rPr>
+              <a:t># leveneTest(), Anova()</a:t>
+            </a:r>
+            <a:br/>
+            <a:r>
+              <a:rPr>
+                <a:solidFill>
+                  <a:srgbClr val="4758AB"/>
+                </a:solidFill>
+                <a:latin typeface="Courier"/>
+              </a:rPr>
+              <a:t>library</a:t>
+            </a:r>
+            <a:r>
+              <a:rPr>
+                <a:solidFill>
+                  <a:srgbClr val="003B4F"/>
+                </a:solidFill>
+                <a:latin typeface="Courier"/>
+              </a:rPr>
+              <a:t>(emmeans)        </a:t>
+            </a:r>
+            <a:r>
+              <a:rPr>
+                <a:solidFill>
+                  <a:srgbClr val="5E5E5E"/>
+                </a:solidFill>
+                <a:latin typeface="Courier"/>
+              </a:rPr>
+              <a:t># pairwise follow-up tests</a:t>
+            </a:r>
+          </a:p>
+          <a:p>
+            <a:pPr lvl="0" indent="0">
+              <a:buNone/>
+            </a:pPr>
+            <a:r>
+              <a:rPr>
+                <a:solidFill>
+                  <a:srgbClr val="5E5E5E"/>
+                </a:solidFill>
+                <a:latin typeface="Courier"/>
+              </a:rPr>
+              <a:t># The same data and model as Lecture 19 ---------------</a:t>
+            </a:r>
+            <a:br/>
+            <a:r>
+              <a:rPr>
+                <a:solidFill>
+                  <a:srgbClr val="003B4F"/>
+                </a:solidFill>
+                <a:latin typeface="Courier"/>
+              </a:rPr>
+              <a:t>penguins_df &lt;- penguins </a:t>
+            </a:r>
+            <a:r>
+              <a:rPr>
+                <a:solidFill>
+                  <a:srgbClr val="5E5E5E"/>
+                </a:solidFill>
+                <a:latin typeface="Courier"/>
+              </a:rPr>
+              <a:t>%&gt;%</a:t>
+            </a:r>
+            <a:br/>
+            <a:r>
+              <a:rPr>
+                <a:solidFill>
+                  <a:srgbClr val="003B4F"/>
+                </a:solidFill>
+                <a:latin typeface="Courier"/>
+              </a:rPr>
+              <a:t>  </a:t>
+            </a:r>
+            <a:r>
+              <a:rPr>
+                <a:solidFill>
+                  <a:srgbClr val="4758AB"/>
+                </a:solidFill>
+                <a:latin typeface="Courier"/>
+              </a:rPr>
+              <a:t>drop_na</a:t>
+            </a:r>
+            <a:r>
+              <a:rPr>
+                <a:solidFill>
+                  <a:srgbClr val="003B4F"/>
+                </a:solidFill>
+                <a:latin typeface="Courier"/>
+              </a:rPr>
+              <a:t>(body_mass_g, species)</a:t>
+            </a:r>
+            <a:br/>
+            <a:br/>
+            <a:r>
+              <a:rPr>
+                <a:solidFill>
+                  <a:srgbClr val="003B4F"/>
+                </a:solidFill>
+                <a:latin typeface="Courier"/>
+              </a:rPr>
+              <a:t>mass_model &lt;- </a:t>
+            </a:r>
+            <a:r>
+              <a:rPr>
+                <a:solidFill>
+                  <a:srgbClr val="4758AB"/>
+                </a:solidFill>
+                <a:latin typeface="Courier"/>
+              </a:rPr>
+              <a:t>lm</a:t>
+            </a:r>
+            <a:r>
+              <a:rPr>
+                <a:solidFill>
+                  <a:srgbClr val="003B4F"/>
+                </a:solidFill>
+                <a:latin typeface="Courier"/>
+              </a:rPr>
+              <a:t>(body_mass_g </a:t>
+            </a:r>
+            <a:r>
+              <a:rPr>
+                <a:solidFill>
+                  <a:srgbClr val="5E5E5E"/>
+                </a:solidFill>
+                <a:latin typeface="Courier"/>
+              </a:rPr>
+              <a:t>~</a:t>
+            </a:r>
+            <a:r>
+              <a:rPr>
+                <a:solidFill>
+                  <a:srgbClr val="003B4F"/>
+                </a:solidFill>
+                <a:latin typeface="Courier"/>
+              </a:rPr>
+              <a:t> species, </a:t>
+            </a:r>
+            <a:r>
+              <a:rPr>
+                <a:solidFill>
+                  <a:srgbClr val="657422"/>
+                </a:solidFill>
+                <a:latin typeface="Courier"/>
+              </a:rPr>
+              <a:t>data =</a:t>
+            </a:r>
+            <a:r>
+              <a:rPr>
+                <a:solidFill>
+                  <a:srgbClr val="003B4F"/>
+                </a:solidFill>
+                <a:latin typeface="Courier"/>
+              </a:rPr>
+              <a:t> penguins_df)</a:t>
+            </a:r>
+          </a:p>
+        </p:txBody>
+      </p:sp>
+      <p:sp>
+        <p:nvSpPr>
+          <p:cNvPr id="4" name="Content Placeholder 3"/>
+          <p:cNvSpPr>
+            <a:spLocks noGrp="1"/>
+          </p:cNvSpPr>
+          <p:nvPr>
+            <p:ph idx="2" sz="half"/>
+          </p:nvPr>
+        </p:nvSpPr>
+        <p:spPr/>
+        <p:txBody>
+          <a:bodyPr/>
+          <a:lstStyle/>
+          <a:p>
             <a:pPr lvl="0" indent="0" marL="0">
               <a:buNone/>
             </a:pPr>
             <a:r>
               <a:rPr/>
-              <a:t>This lecture runs in </a:t>
-            </a:r>
-            <a:r>
-              <a:rPr b="1"/>
-              <a:t>two short chunks</a:t>
-            </a:r>
-            <a:r>
-              <a:rPr/>
-              <a:t>. After each chunk you switch to the </a:t>
-            </a:r>
-            <a:r>
-              <a:rPr b="1"/>
-              <a:t>activity</a:t>
-            </a:r>
-            <a:r>
-              <a:rPr/>
-              <a:t> and type the code yourself.</a:t>
-            </a:r>
-          </a:p>
-          <a:p>
-            <a:pPr lvl="0" indent="0" marL="0">
-              <a:buNone/>
-            </a:pPr>
-            <a:r>
-              <a:rPr b="1"/>
-              <a:t>For every code block, do three things:</a:t>
-            </a:r>
-          </a:p>
-          <a:p>
-            <a:pPr lvl="0" indent="-342900" marL="342900">
-              <a:buAutoNum type="arabicPeriod"/>
-            </a:pPr>
-            <a:r>
-              <a:rPr b="1"/>
-              <a:t>Predict</a:t>
-            </a:r>
-            <a:r>
-              <a:rPr/>
-              <a:t> — before it runs, say what you think the output will be</a:t>
-            </a:r>
-          </a:p>
-          <a:p>
-            <a:pPr lvl="0" indent="-342900" marL="342900">
-              <a:buAutoNum type="arabicPeriod"/>
-            </a:pPr>
-            <a:r>
-              <a:rPr b="1"/>
-              <a:t>Type</a:t>
-            </a:r>
-            <a:r>
-              <a:rPr/>
-              <a:t> it out by hand — do not copy-paste</a:t>
-            </a:r>
-          </a:p>
-          <a:p>
-            <a:pPr lvl="0" indent="-342900" marL="342900">
-              <a:buAutoNum type="arabicPeriod"/>
-            </a:pPr>
-            <a:r>
-              <a:rPr b="1"/>
-              <a:t>Run</a:t>
-            </a:r>
-            <a:r>
-              <a:rPr/>
-              <a:t> it and compare to your prediction</a:t>
-            </a:r>
-          </a:p>
-        </p:txBody>
-      </p:sp>
-      <p:sp>
-        <p:nvSpPr>
-          <p:cNvPr id="4" name="Content Placeholder 3"/>
-          <p:cNvSpPr>
-            <a:spLocks noGrp="1"/>
-          </p:cNvSpPr>
-          <p:nvPr>
-            <p:ph idx="2" sz="half"/>
-          </p:nvPr>
-        </p:nvSpPr>
-        <p:spPr/>
-        <p:txBody>
-          <a:bodyPr/>
-          <a:lstStyle/>
+              <a:t>Every script starts from the raw data. Nothing today depends on objects left over in last lecture’s session.</a:t>
+            </a:r>
+          </a:p>
           <a:p>
             <a:pPr lvl="0" indent="0" marL="1270000">
               <a:buNone/>
             </a:pPr>
             <a:r>
               <a:rPr sz="2000" b="1"/>
-              <a:t>Note</a:t>
+              <a:t>Tip</a:t>
             </a:r>
           </a:p>
           <a:p>
@@ -6176,57 +8573,44 @@
               <a:buNone/>
             </a:pPr>
             <a:r>
-              <a:rPr sz="2000" b="1"/>
-              <a:t>✅ Why bother? (the evidence)</a:t>
-            </a:r>
-          </a:p>
-          <a:p>
-            <a:pPr lvl="0"/>
+              <a:rPr sz="2000">
+                <a:latin typeface="Courier"/>
+              </a:rPr>
+              <a:t>library(palmerpenguins)</a:t>
+            </a:r>
             <a:r>
               <a:rPr sz="2000"/>
-              <a:t>Predicting the </a:t>
-            </a:r>
-            <a:r>
-              <a:rPr sz="2000" i="1"/>
-              <a:t>p</a:t>
+              <a:t> again — base R has its own </a:t>
+            </a:r>
+            <a:r>
+              <a:rPr sz="2000">
+                <a:latin typeface="Courier"/>
+              </a:rPr>
+              <a:t>penguins</a:t>
             </a:r>
             <a:r>
               <a:rPr sz="2000"/>
-              <a:t>-value before you see it forces you to reason from the boxplot’s separation, not just read a number off a screen.</a:t>
-            </a:r>
-          </a:p>
-          <a:p>
-            <a:pPr lvl="0"/>
+              <a:t> with </a:t>
+            </a:r>
+            <a:r>
+              <a:rPr sz="2000">
+                <a:latin typeface="Courier"/>
+              </a:rPr>
+              <a:t>body_mass</a:t>
+            </a:r>
             <a:r>
               <a:rPr sz="2000"/>
-              <a:t>Typing </a:t>
+              <a:t> instead of </a:t>
             </a:r>
             <a:r>
               <a:rPr sz="2000">
                 <a:latin typeface="Courier"/>
               </a:rPr>
-              <a:t>type = "II"</a:t>
+              <a:t>body_mass_g</a:t>
             </a:r>
             <a:r>
               <a:rPr sz="2000"/>
-              <a:t> yourself in </a:t>
-            </a:r>
-            <a:r>
-              <a:rPr sz="2000">
-                <a:latin typeface="Courier"/>
-              </a:rPr>
-              <a:t>Anova()</a:t>
-            </a:r>
-            <a:r>
-              <a:rPr sz="2000"/>
-              <a:t> is what makes you notice it’s there — paste the line and you’ll never ask why it matters for unbalanced groups.</a:t>
-            </a:r>
-          </a:p>
-          <a:p>
-            <a:pPr lvl="0"/>
-            <a:r>
-              <a:rPr sz="2000"/>
-              <a:t>Letters in a compact letter display only mean something if you’ve watched them get built from the pairwise table above them.</a:t>
+              <a:t>.</a:t>
             </a:r>
           </a:p>
         </p:txBody>
@@ -6278,7 +8662,7 @@
             </a:pPr>
             <a:r>
               <a:rPr/>
-              <a:t>🧩 Chunk 1 of 2 · Run the ANOVA &amp; Read the F Table</a:t>
+              <a:t>🧩 Set 2 · The Assumptions</a:t>
             </a:r>
           </a:p>
         </p:txBody>
@@ -6303,31 +8687,54 @@
             </a:pPr>
             <a:r>
               <a:rPr b="1"/>
-              <a:t>We will cover:</a:t>
-            </a:r>
-            <a:r>
-              <a:rPr/>
-              <a:t> the ANOVA table two ways — base </a:t>
-            </a:r>
-            <a:r>
-              <a:rPr>
-                <a:latin typeface="Courier"/>
-              </a:rPr>
-              <a:t>aov()</a:t>
-            </a:r>
-            <a:r>
-              <a:rPr/>
-              <a:t> and </a:t>
-            </a:r>
-            <a:r>
-              <a:rPr>
-                <a:latin typeface="Courier"/>
-              </a:rPr>
-              <a:t>car::Anova()</a:t>
-            </a:r>
-            <a:r>
-              <a:rPr/>
-              <a:t> — and why the difference matters for unbalanced data.</a:t>
+              <a:t>What a one-way ANOVA assumes:</a:t>
+            </a:r>
+          </a:p>
+          <a:p>
+            <a:pPr lvl="0" indent="-342900" marL="342900">
+              <a:buAutoNum type="arabicPeriod"/>
+            </a:pPr>
+            <a:r>
+              <a:rPr b="1"/>
+              <a:t>Independent</a:t>
+            </a:r>
+            <a:r>
+              <a:rPr/>
+              <a:t> observations — a design question, not a test</a:t>
+            </a:r>
+          </a:p>
+          <a:p>
+            <a:pPr lvl="0" indent="-342900" marL="342900">
+              <a:buAutoNum type="arabicPeriod"/>
+            </a:pPr>
+            <a:r>
+              <a:rPr/>
+              <a:t>The </a:t>
+            </a:r>
+            <a:r>
+              <a:rPr b="1"/>
+              <a:t>residuals</a:t>
+            </a:r>
+            <a:r>
+              <a:rPr/>
+              <a:t> are normally distributed</a:t>
+            </a:r>
+          </a:p>
+          <a:p>
+            <a:pPr lvl="0" indent="-342900" marL="342900">
+              <a:buAutoNum type="arabicPeriod"/>
+            </a:pPr>
+            <a:r>
+              <a:rPr/>
+              <a:t>The groups have </a:t>
+            </a:r>
+            <a:r>
+              <a:rPr b="1"/>
+              <a:t>equal variance</a:t>
+            </a:r>
+            <a:r>
+              <a:rPr/>
+              <a:t> (homoscedasticity)</a:t>
             </a:r>
           </a:p>
           <a:p>
@@ -6336,7 +8743,7 @@
             </a:pPr>
             <a:r>
               <a:rPr sz="2000" b="1"/>
-              <a:t>Tip</a:t>
+              <a:t>Note</a:t>
             </a:r>
           </a:p>
           <a:p>
@@ -6344,12 +8751,8 @@
               <a:buNone/>
             </a:pPr>
             <a:r>
-              <a:rPr sz="2000" b="1"/>
-              <a:t>🖐 After this chunk: Activity Parts 7–8</a:t>
-            </a:r>
-            <a:r>
               <a:rPr sz="2000"/>
-              <a:t> (run both, read F / df / p).</a:t>
+              <a:t>Assumption 1 is about how the data were collected — no R function can rescue it. 2 and 3 we can look at directly, and that is what the next few slides do.</a:t>
             </a:r>
           </a:p>
         </p:txBody>
@@ -6389,8 +8792,11 @@
         <p:spPr>
           <a:xfrm>
             <a:off x="0" y="0"/>
-            <a:ext cx="9144000" cy="582780"/>
+            <a:ext cx="9144000" cy="602780"/>
           </a:xfrm>
+          <a:solidFill>
+            <a:srgbClr val="1A1A2E"/>
+          </a:solidFill>
         </p:spPr>
         <p:txBody>
           <a:bodyPr/>
@@ -6401,35 +8807,153 @@
             </a:pPr>
             <a:r>
               <a:rPr/>
-              <a:t>Run the ANOVA — </a:t>
-            </a:r>
-            <a:r>
-              <a:rPr>
-                <a:latin typeface="Courier"/>
-              </a:rPr>
-              <a:t>aov()</a:t>
-            </a:r>
-            <a:r>
-              <a:rPr/>
-              <a:t> and </a:t>
-            </a:r>
-            <a:r>
-              <a:rPr>
-                <a:latin typeface="Courier"/>
-              </a:rPr>
-              <a:t>summary()</a:t>
-            </a:r>
-          </a:p>
-        </p:txBody>
-      </p:sp>
-      <p:sp>
-        <p:nvSpPr>
-          <p:cNvPr id="3" name="Content Placeholder 2"/>
-          <p:cNvSpPr>
-            <a:spLocks noGrp="1"/>
-          </p:cNvSpPr>
-          <p:nvPr>
-            <p:ph idx="1"/>
+              <a:t>Normality Is About the </a:t>
+            </a:r>
+            <a:r>
+              <a:rPr i="1"/>
+              <a:t>Residuals</a:t>
+            </a:r>
+          </a:p>
+        </p:txBody>
+      </p:sp>
+      <mc:AlternateContent xmlns:mc="http://schemas.openxmlformats.org/markup-compatibility/2006">
+        <mc:Choice xmlns:a14="http://schemas.microsoft.com/office/drawing/2010/main" Requires="a14">
+          <p:sp>
+            <p:nvSpPr>
+              <p:cNvPr id="3" name="Content Placeholder 2"/>
+              <p:cNvSpPr>
+                <a:spLocks noGrp="1"/>
+              </p:cNvSpPr>
+              <p:nvPr>
+                <p:ph idx="1" sz="half"/>
+              </p:nvPr>
+            </p:nvSpPr>
+            <p:spPr/>
+            <p:txBody>
+              <a:bodyPr/>
+              <a:lstStyle/>
+              <a:p>
+                <a:pPr lvl="0" indent="0" marL="0">
+                  <a:buNone/>
+                </a:pPr>
+                <a:r>
+                  <a:rPr/>
+                  <a:t>A </a:t>
+                </a:r>
+                <a:r>
+                  <a:rPr b="1"/>
+                  <a:t>residual</a:t>
+                </a:r>
+                <a:r>
+                  <a:rPr/>
+                  <a:t> is one bird’s miss: its mass minus its species’ mean.</a:t>
+                </a:r>
+              </a:p>
+              <a:p>
+                <a:pPr lvl="0" indent="0" marL="0">
+                  <a:buNone/>
+                </a:pPr>
+                <a14:m>
+                  <m:oMathPara xmlns:m="http://schemas.openxmlformats.org/officeDocument/2006/math">
+                    <m:oMathParaPr>
+                      <m:jc m:val="center"/>
+                    </m:oMathParaPr>
+                    <m:oMath>
+                      <m:r>
+                        <m:rPr>
+                          <m:nor/>
+                          <m:sty m:val="p"/>
+                        </m:rPr>
+                        <m:t>residual</m:t>
+                      </m:r>
+                      <m:r>
+                        <m:rPr>
+                          <m:sty m:val="p"/>
+                        </m:rPr>
+                        <m:t>=</m:t>
+                      </m:r>
+                      <m:sSub>
+                        <m:e>
+                          <m:r>
+                            <m:t>y</m:t>
+                          </m:r>
+                        </m:e>
+                        <m:sub>
+                          <m:r>
+                            <m:t>i</m:t>
+                          </m:r>
+                        </m:sub>
+                      </m:sSub>
+                      <m:r>
+                        <m:rPr>
+                          <m:sty m:val="p"/>
+                        </m:rPr>
+                        <m:t>−</m:t>
+                      </m:r>
+                      <m:sSub>
+                        <m:e>
+                          <m:acc>
+                            <m:accPr>
+                              <m:chr m:val="‾"/>
+                            </m:accPr>
+                            <m:e>
+                              <m:r>
+                                <m:t>y</m:t>
+                              </m:r>
+                            </m:e>
+                          </m:acc>
+                        </m:e>
+                        <m:sub>
+                          <m:r>
+                            <m:rPr>
+                              <m:nor/>
+                              <m:sty m:val="p"/>
+                            </m:rPr>
+                            <m:t>group</m:t>
+                          </m:r>
+                        </m:sub>
+                      </m:sSub>
+                    </m:oMath>
+                  </m:oMathPara>
+                </a14:m>
+              </a:p>
+              <a:p>
+                <a:pPr lvl="0" indent="0" marL="0">
+                  <a:buNone/>
+                </a:pPr>
+                <a:r>
+                  <a:rPr/>
+                  <a:t>ANOVA does </a:t>
+                </a:r>
+                <a:r>
+                  <a:rPr b="1"/>
+                  <a:t>not</a:t>
+                </a:r>
+                <a:r>
+                  <a:rPr/>
+                  <a:t> require the raw masses to be normal — pooled across three species with different means they are not even supposed to be. It requires the </a:t>
+                </a:r>
+                <a:r>
+                  <a:rPr b="1"/>
+                  <a:t>misses</a:t>
+                </a:r>
+                <a:r>
+                  <a:rPr/>
+                  <a:t> to be normal.</a:t>
+                </a:r>
+              </a:p>
+            </p:txBody>
+          </p:sp>
+        </mc:Choice>
+      </mc:AlternateContent>
+      <p:sp>
+        <p:nvSpPr>
+          <p:cNvPr id="4" name="Content Placeholder 3"/>
+          <p:cNvSpPr>
+            <a:spLocks noGrp="1"/>
+          </p:cNvSpPr>
+          <p:nvPr>
+            <p:ph idx="2" sz="half"/>
           </p:nvPr>
         </p:nvSpPr>
         <p:spPr/>
@@ -6437,12 +8961,93 @@
           <a:bodyPr/>
           <a:lstStyle/>
           <a:p>
+            <a:pPr lvl="0" indent="0">
+              <a:buNone/>
+            </a:pPr>
+            <a:r>
+              <a:rPr>
+                <a:solidFill>
+                  <a:srgbClr val="5E5E5E"/>
+                </a:solidFill>
+                <a:latin typeface="Courier"/>
+              </a:rPr>
+              <a:t># What the residuals look like ------------------------</a:t>
+            </a:r>
+            <a:br/>
+            <a:r>
+              <a:rPr>
+                <a:solidFill>
+                  <a:srgbClr val="4758AB"/>
+                </a:solidFill>
+                <a:latin typeface="Courier"/>
+              </a:rPr>
+              <a:t>head</a:t>
+            </a:r>
+            <a:r>
+              <a:rPr>
+                <a:solidFill>
+                  <a:srgbClr val="003B4F"/>
+                </a:solidFill>
+                <a:latin typeface="Courier"/>
+              </a:rPr>
+              <a:t>(</a:t>
+            </a:r>
+            <a:r>
+              <a:rPr>
+                <a:solidFill>
+                  <a:srgbClr val="4758AB"/>
+                </a:solidFill>
+                <a:latin typeface="Courier"/>
+              </a:rPr>
+              <a:t>residuals</a:t>
+            </a:r>
+            <a:r>
+              <a:rPr>
+                <a:solidFill>
+                  <a:srgbClr val="003B4F"/>
+                </a:solidFill>
+                <a:latin typeface="Courier"/>
+              </a:rPr>
+              <a:t>(mass_model), </a:t>
+            </a:r>
+            <a:r>
+              <a:rPr>
+                <a:solidFill>
+                  <a:srgbClr val="AD0000"/>
+                </a:solidFill>
+                <a:latin typeface="Courier"/>
+              </a:rPr>
+              <a:t>4</a:t>
+            </a:r>
+            <a:r>
+              <a:rPr>
+                <a:solidFill>
+                  <a:srgbClr val="003B4F"/>
+                </a:solidFill>
+                <a:latin typeface="Courier"/>
+              </a:rPr>
+              <a:t>)</a:t>
+            </a:r>
+          </a:p>
+          <a:p>
+            <a:pPr lvl="0" indent="0">
+              <a:buNone/>
+            </a:pPr>
+            <a:r>
+              <a:rPr>
+                <a:latin typeface="Courier"/>
+              </a:rPr>
+              <a:t>         1          2          3          4 
+  49.33775   99.33775 -450.66225 -250.66225 </a:t>
+            </a:r>
+          </a:p>
+          <a:p>
             <a:pPr lvl="0" indent="0" marL="1270000">
               <a:buNone/>
             </a:pPr>
             <a:r>
               <a:rPr sz="2000" b="1"/>
-              <a:t>Note</a:t>
+              <a:t>Important</a:t>
             </a:r>
           </a:p>
           <a:p>
@@ -6450,20 +9055,28 @@
               <a:buNone/>
             </a:pPr>
             <a:r>
-              <a:rPr sz="2000" b="1"/>
-              <a:t>🔮 Predict first:</a:t>
-            </a:r>
-            <a:r>
               <a:rPr sz="2000"/>
-              <a:t> The boxplot from Lecture 13 looked very separated. Predict the </a:t>
-            </a:r>
-            <a:r>
-              <a:rPr sz="2000" i="1"/>
-              <a:t>p</a:t>
+              <a:t>Shapiro on the raw </a:t>
+            </a:r>
+            <a:r>
+              <a:rPr sz="2000">
+                <a:latin typeface="Courier"/>
+              </a:rPr>
+              <a:t>body_mass_g</a:t>
             </a:r>
             <a:r>
               <a:rPr sz="2000"/>
-              <a:t>-value — closer to 0.5, 0.05, or far below 0.001?</a:t>
+              <a:t> is a different, wrong test. Always </a:t>
+            </a:r>
+            <a:r>
+              <a:rPr sz="2000">
+                <a:latin typeface="Courier"/>
+              </a:rPr>
+              <a:t>residuals(model)</a:t>
+            </a:r>
+            <a:r>
+              <a:rPr sz="2000"/>
+              <a:t>.</a:t>
             </a:r>
           </a:p>
         </p:txBody>
@@ -6492,6 +9105,46 @@
       </p:grpSpPr>
       <p:sp>
         <p:nvSpPr>
+          <p:cNvPr id="2" name="Title 1"/>
+          <p:cNvSpPr>
+            <a:spLocks noGrp="1"/>
+          </p:cNvSpPr>
+          <p:nvPr>
+            <p:ph type="title"/>
+          </p:nvPr>
+        </p:nvSpPr>
+        <p:spPr>
+          <a:xfrm>
+            <a:off x="139485" y="78119"/>
+            <a:ext cx="8229600" cy="607682"/>
+          </a:xfrm>
+        </p:spPr>
+        <p:txBody>
+          <a:bodyPr/>
+          <a:lstStyle/>
+          <a:p>
+            <a:pPr lvl="0" indent="0" marL="0">
+              <a:buNone/>
+            </a:pPr>
+            <a:r>
+              <a:rPr/>
+              <a:t>Assumption 2 — </a:t>
+            </a:r>
+            <a:r>
+              <a:rPr>
+                <a:latin typeface="Courier"/>
+              </a:rPr>
+              <a:t>plot(model)</a:t>
+            </a:r>
+            <a:r>
+              <a:rPr/>
+              <a:t>, the Same Four Panels</a:t>
+            </a:r>
+          </a:p>
+        </p:txBody>
+      </p:sp>
+      <p:sp>
+        <p:nvSpPr>
           <p:cNvPr id="3" name="Text Placeholder 2"/>
           <p:cNvSpPr>
             <a:spLocks noGrp="1"/>
@@ -6511,11 +9164,92 @@
             <a:r>
               <a:rPr>
                 <a:solidFill>
-                  <a:srgbClr val="5E5E5E"/>
-                </a:solidFill>
-                <a:latin typeface="Courier"/>
-              </a:rPr>
-              <a:t># Load packages at the top — always -------------------</a:t>
+                  <a:srgbClr val="4758AB"/>
+                </a:solidFill>
+                <a:latin typeface="Courier"/>
+              </a:rPr>
+              <a:t>par</a:t>
+            </a:r>
+            <a:r>
+              <a:rPr>
+                <a:solidFill>
+                  <a:srgbClr val="003B4F"/>
+                </a:solidFill>
+                <a:latin typeface="Courier"/>
+              </a:rPr>
+              <a:t>(</a:t>
+            </a:r>
+            <a:r>
+              <a:rPr>
+                <a:solidFill>
+                  <a:srgbClr val="657422"/>
+                </a:solidFill>
+                <a:latin typeface="Courier"/>
+              </a:rPr>
+              <a:t>mfrow =</a:t>
+            </a:r>
+            <a:r>
+              <a:rPr>
+                <a:solidFill>
+                  <a:srgbClr val="003B4F"/>
+                </a:solidFill>
+                <a:latin typeface="Courier"/>
+              </a:rPr>
+              <a:t> </a:t>
+            </a:r>
+            <a:r>
+              <a:rPr>
+                <a:solidFill>
+                  <a:srgbClr val="4758AB"/>
+                </a:solidFill>
+                <a:latin typeface="Courier"/>
+              </a:rPr>
+              <a:t>c</a:t>
+            </a:r>
+            <a:r>
+              <a:rPr>
+                <a:solidFill>
+                  <a:srgbClr val="003B4F"/>
+                </a:solidFill>
+                <a:latin typeface="Courier"/>
+              </a:rPr>
+              <a:t>(</a:t>
+            </a:r>
+            <a:r>
+              <a:rPr>
+                <a:solidFill>
+                  <a:srgbClr val="AD0000"/>
+                </a:solidFill>
+                <a:latin typeface="Courier"/>
+              </a:rPr>
+              <a:t>2</a:t>
+            </a:r>
+            <a:r>
+              <a:rPr>
+                <a:solidFill>
+                  <a:srgbClr val="003B4F"/>
+                </a:solidFill>
+                <a:latin typeface="Courier"/>
+              </a:rPr>
+              <a:t>, </a:t>
+            </a:r>
+            <a:r>
+              <a:rPr>
+                <a:solidFill>
+                  <a:srgbClr val="AD0000"/>
+                </a:solidFill>
+                <a:latin typeface="Courier"/>
+              </a:rPr>
+              <a:t>2</a:t>
+            </a:r>
+            <a:r>
+              <a:rPr>
+                <a:solidFill>
+                  <a:srgbClr val="003B4F"/>
+                </a:solidFill>
+                <a:latin typeface="Courier"/>
+              </a:rPr>
+              <a:t>))</a:t>
             </a:r>
             <a:br/>
             <a:r>
@@ -6525,7 +9259,7 @@
                 </a:solidFill>
                 <a:latin typeface="Courier"/>
               </a:rPr>
-              <a:t>library</a:t>
+              <a:t>plot</a:t>
             </a:r>
             <a:r>
               <a:rPr>
@@ -6534,18 +9268,59 @@
                 </a:solidFill>
                 <a:latin typeface="Courier"/>
               </a:rPr>
-              <a:t>(tidyverse)      </a:t>
-            </a:r>
-            <a:r>
-              <a:rPr>
-                <a:solidFill>
-                  <a:srgbClr val="5E5E5E"/>
-                </a:solidFill>
-                <a:latin typeface="Courier"/>
-              </a:rPr>
-              <a:t># wrangling + ggplot2</a:t>
-            </a:r>
-            <a:br/>
+              <a:t>(mass_model)</a:t>
+            </a:r>
+          </a:p>
+        </p:txBody>
+      </p:sp>
+      <p:pic>
+        <p:nvPicPr>
+          <p:cNvPr descr="one_way_anova_2_lecture_files/figure-pptx/diagnostic-plots-16-1.png" id="0" name="Picture 1"/>
+          <p:cNvPicPr>
+            <a:picLocks noGrp="1" noChangeAspect="1"/>
+          </p:cNvPicPr>
+          <p:nvPr/>
+        </p:nvPicPr>
+        <p:blipFill>
+          <a:blip r:embed="rId2"/>
+          <a:stretch>
+            <a:fillRect/>
+          </a:stretch>
+        </p:blipFill>
+        <p:spPr bwMode="auto">
+          <a:xfrm>
+            <a:off x="127000" y="1549400"/>
+            <a:ext cx="4432300" cy="2743200"/>
+          </a:xfrm>
+          <a:prstGeom prst="rect">
+            <a:avLst/>
+          </a:prstGeom>
+          <a:noFill/>
+          <a:ln w="9525">
+            <a:noFill/>
+            <a:headEnd/>
+            <a:tailEnd/>
+          </a:ln>
+        </p:spPr>
+      </p:pic>
+      <p:sp>
+        <p:nvSpPr>
+          <p:cNvPr id="4" name="Content Placeholder 3"/>
+          <p:cNvSpPr>
+            <a:spLocks noGrp="1"/>
+          </p:cNvSpPr>
+          <p:nvPr>
+            <p:ph idx="2" sz="half"/>
+          </p:nvPr>
+        </p:nvSpPr>
+        <p:spPr/>
+        <p:txBody>
+          <a:bodyPr/>
+          <a:lstStyle/>
+          <a:p>
+            <a:pPr lvl="0" indent="0">
+              <a:buNone/>
+            </a:pPr>
             <a:r>
               <a:rPr>
                 <a:solidFill>
@@ -6553,7 +9328,7 @@
                 </a:solidFill>
                 <a:latin typeface="Courier"/>
               </a:rPr>
-              <a:t>library</a:t>
+              <a:t>par</a:t>
             </a:r>
             <a:r>
               <a:rPr>
@@ -6562,18 +9337,26 @@
                 </a:solidFill>
                 <a:latin typeface="Courier"/>
               </a:rPr>
-              <a:t>(palmerpenguins) </a:t>
-            </a:r>
-            <a:r>
-              <a:rPr>
-                <a:solidFill>
-                  <a:srgbClr val="5E5E5E"/>
-                </a:solidFill>
-                <a:latin typeface="Courier"/>
-              </a:rPr>
-              <a:t># the penguins data</a:t>
-            </a:r>
-            <a:br/>
+              <a:t>(</a:t>
+            </a:r>
+            <a:r>
+              <a:rPr>
+                <a:solidFill>
+                  <a:srgbClr val="657422"/>
+                </a:solidFill>
+                <a:latin typeface="Courier"/>
+              </a:rPr>
+              <a:t>mfrow =</a:t>
+            </a:r>
+            <a:r>
+              <a:rPr>
+                <a:solidFill>
+                  <a:srgbClr val="003B4F"/>
+                </a:solidFill>
+                <a:latin typeface="Courier"/>
+              </a:rPr>
+              <a:t> </a:t>
+            </a:r>
             <a:r>
               <a:rPr>
                 <a:solidFill>
@@ -6581,7 +9364,7 @@
                 </a:solidFill>
                 <a:latin typeface="Courier"/>
               </a:rPr>
-              <a:t>library</a:t>
+              <a:t>c</a:t>
             </a:r>
             <a:r>
               <a:rPr>
@@ -6590,26 +9373,16 @@
                 </a:solidFill>
                 <a:latin typeface="Courier"/>
               </a:rPr>
-              <a:t>(car)            </a:t>
-            </a:r>
-            <a:r>
-              <a:rPr>
-                <a:solidFill>
-                  <a:srgbClr val="5E5E5E"/>
-                </a:solidFill>
-                <a:latin typeface="Courier"/>
-              </a:rPr>
-              <a:t># Anova()</a:t>
-            </a:r>
-            <a:br/>
-            <a:r>
-              <a:rPr>
-                <a:solidFill>
-                  <a:srgbClr val="4758AB"/>
-                </a:solidFill>
-                <a:latin typeface="Courier"/>
-              </a:rPr>
-              <a:t>library</a:t>
+              <a:t>(</a:t>
+            </a:r>
+            <a:r>
+              <a:rPr>
+                <a:solidFill>
+                  <a:srgbClr val="AD0000"/>
+                </a:solidFill>
+                <a:latin typeface="Courier"/>
+              </a:rPr>
+              <a:t>1</a:t>
             </a:r>
             <a:r>
               <a:rPr>
@@ -6618,32 +9391,17 @@
                 </a:solidFill>
                 <a:latin typeface="Courier"/>
               </a:rPr>
-              <a:t>(emmeans)        </a:t>
-            </a:r>
-            <a:r>
-              <a:rPr>
-                <a:solidFill>
-                  <a:srgbClr val="5E5E5E"/>
-                </a:solidFill>
-                <a:latin typeface="Courier"/>
-              </a:rPr>
-              <a:t># post-hoc pairwise tests</a:t>
-            </a:r>
-          </a:p>
-          <a:p>
-            <a:pPr lvl="0" indent="0">
-              <a:buNone/>
-            </a:pPr>
-            <a:r>
-              <a:rPr>
-                <a:solidFill>
-                  <a:srgbClr val="5E5E5E"/>
-                </a:solidFill>
-                <a:latin typeface="Courier"/>
-              </a:rPr>
-              <a:t># Same model fit at the end of Lecture 13 --------------</a:t>
-            </a:r>
-            <a:br/>
+              <a:t>, </a:t>
+            </a:r>
+            <a:r>
+              <a:rPr>
+                <a:solidFill>
+                  <a:srgbClr val="AD0000"/>
+                </a:solidFill>
+                <a:latin typeface="Courier"/>
+              </a:rPr>
+              <a:t>1</a:t>
+            </a:r>
             <a:r>
               <a:rPr>
                 <a:solidFill>
@@ -6651,221 +9409,7 @@
                 </a:solidFill>
                 <a:latin typeface="Courier"/>
               </a:rPr>
-              <a:t>penguins_df &lt;- penguins </a:t>
-            </a:r>
-            <a:r>
-              <a:rPr>
-                <a:solidFill>
-                  <a:srgbClr val="5E5E5E"/>
-                </a:solidFill>
-                <a:latin typeface="Courier"/>
-              </a:rPr>
-              <a:t>%&gt;%</a:t>
-            </a:r>
-            <a:br/>
-            <a:r>
-              <a:rPr>
-                <a:solidFill>
-                  <a:srgbClr val="003B4F"/>
-                </a:solidFill>
-                <a:latin typeface="Courier"/>
-              </a:rPr>
-              <a:t>  </a:t>
-            </a:r>
-            <a:r>
-              <a:rPr>
-                <a:solidFill>
-                  <a:srgbClr val="4758AB"/>
-                </a:solidFill>
-                <a:latin typeface="Courier"/>
-              </a:rPr>
-              <a:t>drop_na</a:t>
-            </a:r>
-            <a:r>
-              <a:rPr>
-                <a:solidFill>
-                  <a:srgbClr val="003B4F"/>
-                </a:solidFill>
-                <a:latin typeface="Courier"/>
-              </a:rPr>
-              <a:t>(body_mass_g, species)</a:t>
-            </a:r>
-            <a:br/>
-            <a:br/>
-            <a:r>
-              <a:rPr>
-                <a:solidFill>
-                  <a:srgbClr val="003B4F"/>
-                </a:solidFill>
-                <a:latin typeface="Courier"/>
-              </a:rPr>
-              <a:t>mass_model &lt;- </a:t>
-            </a:r>
-            <a:r>
-              <a:rPr>
-                <a:solidFill>
-                  <a:srgbClr val="4758AB"/>
-                </a:solidFill>
-                <a:latin typeface="Courier"/>
-              </a:rPr>
-              <a:t>lm</a:t>
-            </a:r>
-            <a:r>
-              <a:rPr>
-                <a:solidFill>
-                  <a:srgbClr val="003B4F"/>
-                </a:solidFill>
-                <a:latin typeface="Courier"/>
-              </a:rPr>
-              <a:t>(body_mass_g </a:t>
-            </a:r>
-            <a:r>
-              <a:rPr>
-                <a:solidFill>
-                  <a:srgbClr val="5E5E5E"/>
-                </a:solidFill>
-                <a:latin typeface="Courier"/>
-              </a:rPr>
-              <a:t>~</a:t>
-            </a:r>
-            <a:r>
-              <a:rPr>
-                <a:solidFill>
-                  <a:srgbClr val="003B4F"/>
-                </a:solidFill>
-                <a:latin typeface="Courier"/>
-              </a:rPr>
-              <a:t> species, </a:t>
-            </a:r>
-            <a:r>
-              <a:rPr>
-                <a:solidFill>
-                  <a:srgbClr val="657422"/>
-                </a:solidFill>
-                <a:latin typeface="Courier"/>
-              </a:rPr>
-              <a:t>data =</a:t>
-            </a:r>
-            <a:r>
-              <a:rPr>
-                <a:solidFill>
-                  <a:srgbClr val="003B4F"/>
-                </a:solidFill>
-                <a:latin typeface="Courier"/>
-              </a:rPr>
-              <a:t> penguins_df)</a:t>
-            </a:r>
-          </a:p>
-          <a:p>
-            <a:pPr lvl="0" indent="0">
-              <a:buNone/>
-            </a:pPr>
-            <a:r>
-              <a:rPr>
-                <a:solidFill>
-                  <a:srgbClr val="5E5E5E"/>
-                </a:solidFill>
-                <a:latin typeface="Courier"/>
-              </a:rPr>
-              <a:t># Classic ANOVA table (Type I sums of squares) --------</a:t>
-            </a:r>
-            <a:br/>
-            <a:r>
-              <a:rPr>
-                <a:solidFill>
-                  <a:srgbClr val="003B4F"/>
-                </a:solidFill>
-                <a:latin typeface="Courier"/>
-              </a:rPr>
-              <a:t>mass_aov &lt;- </a:t>
-            </a:r>
-            <a:r>
-              <a:rPr>
-                <a:solidFill>
-                  <a:srgbClr val="4758AB"/>
-                </a:solidFill>
-                <a:latin typeface="Courier"/>
-              </a:rPr>
-              <a:t>aov</a:t>
-            </a:r>
-            <a:r>
-              <a:rPr>
-                <a:solidFill>
-                  <a:srgbClr val="003B4F"/>
-                </a:solidFill>
-                <a:latin typeface="Courier"/>
-              </a:rPr>
-              <a:t>(body_mass_g </a:t>
-            </a:r>
-            <a:r>
-              <a:rPr>
-                <a:solidFill>
-                  <a:srgbClr val="5E5E5E"/>
-                </a:solidFill>
-                <a:latin typeface="Courier"/>
-              </a:rPr>
-              <a:t>~</a:t>
-            </a:r>
-            <a:r>
-              <a:rPr>
-                <a:solidFill>
-                  <a:srgbClr val="003B4F"/>
-                </a:solidFill>
-                <a:latin typeface="Courier"/>
-              </a:rPr>
-              <a:t> species, </a:t>
-            </a:r>
-            <a:r>
-              <a:rPr>
-                <a:solidFill>
-                  <a:srgbClr val="657422"/>
-                </a:solidFill>
-                <a:latin typeface="Courier"/>
-              </a:rPr>
-              <a:t>data =</a:t>
-            </a:r>
-            <a:r>
-              <a:rPr>
-                <a:solidFill>
-                  <a:srgbClr val="003B4F"/>
-                </a:solidFill>
-                <a:latin typeface="Courier"/>
-              </a:rPr>
-              <a:t> penguins_df)</a:t>
-            </a:r>
-            <a:br/>
-            <a:r>
-              <a:rPr>
-                <a:solidFill>
-                  <a:srgbClr val="4758AB"/>
-                </a:solidFill>
-                <a:latin typeface="Courier"/>
-              </a:rPr>
-              <a:t>summary</a:t>
-            </a:r>
-            <a:r>
-              <a:rPr>
-                <a:solidFill>
-                  <a:srgbClr val="003B4F"/>
-                </a:solidFill>
-                <a:latin typeface="Courier"/>
-              </a:rPr>
-              <a:t>(mass_aov)</a:t>
-            </a:r>
-          </a:p>
-          <a:p>
-            <a:pPr lvl="0" indent="0">
-              <a:buNone/>
-            </a:pPr>
-            <a:r>
-              <a:rPr>
-                <a:latin typeface="Courier"/>
-              </a:rPr>
-              <a:t>             Df    Sum Sq  Mean Sq F value Pr(&gt;F)    
-species       2 146864214 73432107   343.6 &lt;2e-16 ***
-Residuals   339  72443483   213698                   
----
-Signif. codes:  0 '***' 0.001 '**' 0.01 '*' 0.05 '.' 0.1 ' ' 1</a:t>
+              <a:t>))</a:t>
             </a:r>
           </a:p>
         </p:txBody>
@@ -6885,229 +9429,62 @@
           <a:bodyPr/>
           <a:lstStyle/>
           <a:p>
-            <a:pPr lvl="0" indent="0" marL="0">
-              <a:buNone/>
-            </a:pPr>
+            <a:pPr lvl="0" indent="0" marL="1270000">
+              <a:buNone/>
+            </a:pPr>
+            <a:r>
+              <a:rPr sz="2000" b="1"/>
+              <a:t>Note</a:t>
+            </a:r>
+          </a:p>
+          <a:p>
+            <a:pPr lvl="0" indent="0" marL="1270000">
+              <a:buNone/>
+            </a:pPr>
+            <a:r>
+              <a:rPr sz="2000" b="1"/>
+              <a:t>🔮 Predict first:</a:t>
+            </a:r>
+            <a:r>
+              <a:rPr sz="2000"/>
+              <a:t> with ~340 penguins, will the Q-Q panel track the line?</a:t>
+            </a:r>
+          </a:p>
+          <a:p>
+            <a:pPr lvl="0"/>
             <a:r>
               <a:rPr b="1"/>
-              <a:t>Reading the table:</a:t>
-            </a:r>
-          </a:p>
-        </p:txBody>
-      </p:sp>
-      <p:graphicFrame>
-        <p:nvGraphicFramePr>
-          <p:cNvPr id="6" name="Content Placeholder 5"/>
-          <p:cNvGraphicFramePr>
-            <a:graphicFrameLocks noGrp="1"/>
-          </p:cNvGraphicFramePr>
-          <p:nvPr>
-            <p:ph idx="1"/>
-          </p:nvPr>
-        </p:nvGraphicFramePr>
-        <p:xfrm>
-          <a:off x="4749800" y="1295400"/>
-          <a:ext cx="4038600" cy="3276600"/>
-        </p:xfrm>
-        <a:graphic>
-          <a:graphicData uri="http://schemas.openxmlformats.org/drawingml/2006/table">
-            <a:tbl>
-              <a:tblPr firstRow="1" bandRow="1">
-                <a:tableStyleId>{5C22544A-7EE6-4342-B048-85BDC9FD1C3A}</a:tableStyleId>
-              </a:tblPr>
-              <a:tblGrid>
-                <a:gridCol w="2019300"/>
-                <a:gridCol w="2019300"/>
-              </a:tblGrid>
-              <a:tr h="0">
-                <a:tc>
-                  <a:txBody>
-                    <a:bodyPr/>
-                    <a:lstStyle/>
-                    <a:p>
-                      <a:pPr lvl="0" indent="0" marL="0">
-                        <a:buNone/>
-                      </a:pPr>
-                      <a:r>
-                        <a:rPr/>
-                        <a:t>Column</a:t>
-                      </a:r>
-                    </a:p>
-                  </a:txBody>
-                  <a:tcPr/>
-                </a:tc>
-                <a:tc>
-                  <a:txBody>
-                    <a:bodyPr/>
-                    <a:lstStyle/>
-                    <a:p>
-                      <a:pPr lvl="0" indent="0" marL="0">
-                        <a:buNone/>
-                      </a:pPr>
-                      <a:r>
-                        <a:rPr/>
-                        <a:t>Meaning</a:t>
-                      </a:r>
-                    </a:p>
-                  </a:txBody>
-                  <a:tcPr/>
-                </a:tc>
-              </a:tr>
-              <a:tr h="0">
-                <a:tc>
-                  <a:txBody>
-                    <a:bodyPr/>
-                    <a:lstStyle/>
-                    <a:p>
-                      <a:pPr lvl="0" indent="0" marL="0">
-                        <a:buNone/>
-                      </a:pPr>
-                      <a:r>
-                        <a:rPr>
-                          <a:latin typeface="Courier"/>
-                        </a:rPr>
-                        <a:t>Df</a:t>
-                      </a:r>
-                    </a:p>
-                  </a:txBody>
-                </a:tc>
-                <a:tc>
-                  <a:txBody>
-                    <a:bodyPr/>
-                    <a:lstStyle/>
-                    <a:p>
-                      <a:pPr lvl="0" indent="0" marL="0">
-                        <a:buNone/>
-                      </a:pPr>
-                      <a:r>
-                        <a:rPr/>
-                        <a:t>groups − 1, and residual df</a:t>
-                      </a:r>
-                    </a:p>
-                  </a:txBody>
-                </a:tc>
-              </a:tr>
-              <a:tr h="0">
-                <a:tc>
-                  <a:txBody>
-                    <a:bodyPr/>
-                    <a:lstStyle/>
-                    <a:p>
-                      <a:pPr lvl="0" indent="0" marL="0">
-                        <a:buNone/>
-                      </a:pPr>
-                      <a:r>
-                        <a:rPr>
-                          <a:latin typeface="Courier"/>
-                        </a:rPr>
-                        <a:t>F value</a:t>
-                      </a:r>
-                    </a:p>
-                  </a:txBody>
-                </a:tc>
-                <a:tc>
-                  <a:txBody>
-                    <a:bodyPr/>
-                    <a:lstStyle/>
-                    <a:p>
-                      <a:pPr lvl="0" indent="0" marL="0">
-                        <a:buNone/>
-                      </a:pPr>
-                      <a:r>
-                        <a:rPr/>
-                        <a:t>between ÷ within variance</a:t>
-                      </a:r>
-                    </a:p>
-                  </a:txBody>
-                </a:tc>
-              </a:tr>
-              <a:tr h="0">
-                <a:tc>
-                  <a:txBody>
-                    <a:bodyPr/>
-                    <a:lstStyle/>
-                    <a:p>
-                      <a:pPr lvl="0" indent="0" marL="0">
-                        <a:buNone/>
-                      </a:pPr>
-                      <a:r>
-                        <a:rPr>
-                          <a:latin typeface="Courier"/>
-                        </a:rPr>
-                        <a:t>Pr(&gt;F)</a:t>
-                      </a:r>
-                    </a:p>
-                  </a:txBody>
-                </a:tc>
-                <a:tc>
-                  <a:txBody>
-                    <a:bodyPr/>
-                    <a:lstStyle/>
-                    <a:p>
-                      <a:pPr lvl="0" indent="0" marL="0">
-                        <a:buNone/>
-                      </a:pPr>
-                      <a:r>
-                        <a:rPr/>
-                        <a:t>the </a:t>
-                      </a:r>
-                      <a:r>
-                        <a:rPr i="1"/>
-                        <a:t>p</a:t>
-                      </a:r>
-                      <a:r>
-                        <a:rPr/>
-                        <a:t>-value for H₀</a:t>
-                      </a:r>
-                    </a:p>
-                  </a:txBody>
-                </a:tc>
-              </a:tr>
-            </a:tbl>
-          </a:graphicData>
-        </a:graphic>
-      </p:graphicFrame>
-      <p:sp>
-        <p:nvSpPr>
-          <p:cNvPr id="6" name="Content Placeholder 5"/>
-          <p:cNvSpPr>
-            <a:spLocks noGrp="1"/>
-          </p:cNvSpPr>
-          <p:nvPr>
-            <p:ph idx="4" sz="quarter"/>
-          </p:nvPr>
-        </p:nvSpPr>
-        <p:spPr/>
-        <p:txBody>
-          <a:bodyPr/>
-          <a:lstStyle/>
-          <a:p>
-            <a:pPr lvl="0" indent="0" marL="0">
-              <a:buNone/>
-            </a:pPr>
-            <a:r>
-              <a:rPr i="1"/>
-              <a:t>p</a:t>
-            </a:r>
-            <a:r>
-              <a:rPr/>
-              <a:t> &lt; 0.05 → </a:t>
-            </a:r>
+              <a:t>Three vertical stripes</a:t>
+            </a:r>
+            <a:r>
+              <a:rPr/>
+              <a:t> in panels 1 and 3 — a categorical X has only three fitted values. Normal, not a problem</a:t>
+            </a:r>
+          </a:p>
+          <a:p>
+            <a:pPr lvl="0"/>
             <a:r>
               <a:rPr b="1"/>
-              <a:t>reject H₀</a:t>
-            </a:r>
-            <a:r>
-              <a:rPr/>
-              <a:t> → at least one species differs. But </a:t>
+              <a:t>Panel 2 (Normal Q-Q)</a:t>
+            </a:r>
+            <a:r>
+              <a:rPr/>
+              <a:t> is the normality check</a:t>
+            </a:r>
+          </a:p>
+          <a:p>
+            <a:pPr lvl="0"/>
+            <a:r>
+              <a:rPr/>
+              <a:t>Panels 1 &amp; 3 show whether the </a:t>
             </a:r>
             <a:r>
               <a:rPr b="1"/>
-              <a:t>which</a:t>
-            </a:r>
-            <a:r>
-              <a:rPr/>
-              <a:t>? Chunk 2.</a:t>
+              <a:t>stripe heights</a:t>
+            </a:r>
+            <a:r>
+              <a:rPr/>
+              <a:t> match — assumption 3 by eye</a:t>
             </a:r>
           </a:p>
         </p:txBody>
@@ -7162,7 +9539,7 @@
             </a:pPr>
             <a:r>
               <a:rPr/>
-              <a:t>Live Demo — Watch It Break (on purpose)</a:t>
+              <a:t>Normality — Shapiro-Wilk as the Backup</a:t>
             </a:r>
           </a:p>
         </p:txBody>
@@ -7182,216 +9559,89 @@
           <a:bodyPr/>
           <a:lstStyle/>
           <a:p>
+            <a:pPr lvl="0" indent="0">
+              <a:buNone/>
+            </a:pPr>
+            <a:r>
+              <a:rPr>
+                <a:solidFill>
+                  <a:srgbClr val="5E5E5E"/>
+                </a:solidFill>
+                <a:latin typeface="Courier"/>
+              </a:rPr>
+              <a:t># Shapiro-Wilk on the RESIDUALS -----------------------</a:t>
+            </a:r>
+            <a:br/>
+            <a:r>
+              <a:rPr>
+                <a:solidFill>
+                  <a:srgbClr val="4758AB"/>
+                </a:solidFill>
+                <a:latin typeface="Courier"/>
+              </a:rPr>
+              <a:t>shapiro.test</a:t>
+            </a:r>
+            <a:r>
+              <a:rPr>
+                <a:solidFill>
+                  <a:srgbClr val="003B4F"/>
+                </a:solidFill>
+                <a:latin typeface="Courier"/>
+              </a:rPr>
+              <a:t>(</a:t>
+            </a:r>
+            <a:r>
+              <a:rPr>
+                <a:solidFill>
+                  <a:srgbClr val="4758AB"/>
+                </a:solidFill>
+                <a:latin typeface="Courier"/>
+              </a:rPr>
+              <a:t>residuals</a:t>
+            </a:r>
+            <a:r>
+              <a:rPr>
+                <a:solidFill>
+                  <a:srgbClr val="003B4F"/>
+                </a:solidFill>
+                <a:latin typeface="Courier"/>
+              </a:rPr>
+              <a:t>(mass_model))</a:t>
+            </a:r>
+          </a:p>
+          <a:p>
+            <a:pPr lvl="0" indent="0">
+              <a:buNone/>
+            </a:pPr>
+            <a:r>
+              <a:rPr>
+                <a:latin typeface="Courier"/>
+              </a:rPr>
+              <a:t>
+    Shapiro-Wilk normality test
+data:  residuals(mass_model)
+W = 0.99166, p-value = 0.05118</a:t>
+            </a:r>
+          </a:p>
+          <a:p>
             <a:pPr lvl="0" indent="0" marL="0">
               <a:buNone/>
             </a:pPr>
             <a:r>
-              <a:rPr/>
-              <a:t>For </a:t>
-            </a:r>
-            <a:r>
               <a:rPr b="1"/>
-              <a:t>unbalanced</a:t>
-            </a:r>
-            <a:r>
-              <a:rPr/>
-              <a:t> data we prefer </a:t>
-            </a:r>
-            <a:r>
-              <a:rPr>
-                <a:latin typeface="Courier"/>
-              </a:rPr>
-              <a:t>car::Anova()</a:t>
-            </a:r>
-            <a:r>
-              <a:rPr/>
-              <a:t>. I’ll reach for it but type lowercase, and forget the package:</a:t>
-            </a:r>
-          </a:p>
-          <a:p>
-            <a:pPr lvl="0" indent="0">
-              <a:buNone/>
-            </a:pPr>
-            <a:r>
-              <a:rPr>
-                <a:solidFill>
-                  <a:srgbClr val="4758AB"/>
-                </a:solidFill>
-                <a:latin typeface="Courier"/>
-              </a:rPr>
-              <a:t>anova</a:t>
-            </a:r>
-            <a:r>
-              <a:rPr>
-                <a:solidFill>
-                  <a:srgbClr val="003B4F"/>
-                </a:solidFill>
-                <a:latin typeface="Courier"/>
-              </a:rPr>
-              <a:t>(mass_model)        </a:t>
-            </a:r>
-            <a:r>
-              <a:rPr>
-                <a:solidFill>
-                  <a:srgbClr val="5E5E5E"/>
-                </a:solidFill>
-                <a:latin typeface="Courier"/>
-              </a:rPr>
-              <a:t># base R — Type I, one model at a time</a:t>
-            </a:r>
-            <a:br/>
-            <a:r>
-              <a:rPr>
-                <a:solidFill>
-                  <a:srgbClr val="4758AB"/>
-                </a:solidFill>
-                <a:latin typeface="Courier"/>
-              </a:rPr>
-              <a:t>Anova</a:t>
-            </a:r>
-            <a:r>
-              <a:rPr>
-                <a:solidFill>
-                  <a:srgbClr val="003B4F"/>
-                </a:solidFill>
-                <a:latin typeface="Courier"/>
-              </a:rPr>
-              <a:t>(mass_model)        </a:t>
-            </a:r>
-            <a:r>
-              <a:rPr>
-                <a:solidFill>
-                  <a:srgbClr val="5E5E5E"/>
-                </a:solidFill>
-                <a:latin typeface="Courier"/>
-              </a:rPr>
-              <a:t># capital A — but car isn't loaded!</a:t>
-            </a:r>
-          </a:p>
-          <a:p>
-            <a:pPr lvl="0" indent="0" marL="0">
-              <a:buNone/>
-            </a:pPr>
-            <a:r>
-              <a:rPr/>
-              <a:t>R stops:</a:t>
-            </a:r>
-          </a:p>
-          <a:p>
-            <a:pPr lvl="0" indent="0">
-              <a:buNone/>
-            </a:pPr>
-            <a:r>
-              <a:rPr>
-                <a:latin typeface="Courier"/>
-              </a:rPr>
-              <a:t>Error in Anova(mass_model) :
-  could not find function "Anova"</a:t>
-            </a:r>
-          </a:p>
-          <a:p>
-            <a:pPr lvl="0" indent="0" marL="0">
-              <a:buNone/>
-            </a:pPr>
-            <a:r>
-              <a:rPr/>
-              <a:t>The fix — load </a:t>
-            </a:r>
-            <a:r>
-              <a:rPr>
-                <a:latin typeface="Courier"/>
-              </a:rPr>
-              <a:t>car</a:t>
-            </a:r>
-            <a:r>
-              <a:rPr/>
-              <a:t>, and mind the capital </a:t>
+              <a:t>W = 0.992, </a:t>
+            </a:r>
+            <a:r>
+              <a:rPr b="1" i="1"/>
+              <a:t>p</a:t>
             </a:r>
             <a:r>
               <a:rPr b="1"/>
-              <a:t>A</a:t>
-            </a:r>
-            <a:r>
-              <a:rPr/>
-              <a:t>:</a:t>
-            </a:r>
-          </a:p>
-          <a:p>
-            <a:pPr lvl="0" indent="0">
-              <a:buNone/>
-            </a:pPr>
-            <a:r>
-              <a:rPr>
-                <a:solidFill>
-                  <a:srgbClr val="4758AB"/>
-                </a:solidFill>
-                <a:latin typeface="Courier"/>
-              </a:rPr>
-              <a:t>library</a:t>
-            </a:r>
-            <a:r>
-              <a:rPr>
-                <a:solidFill>
-                  <a:srgbClr val="003B4F"/>
-                </a:solidFill>
-                <a:latin typeface="Courier"/>
-              </a:rPr>
-              <a:t>(car)</a:t>
-            </a:r>
-            <a:br/>
-            <a:r>
-              <a:rPr>
-                <a:solidFill>
-                  <a:srgbClr val="4758AB"/>
-                </a:solidFill>
-                <a:latin typeface="Courier"/>
-              </a:rPr>
-              <a:t>Anova</a:t>
-            </a:r>
-            <a:r>
-              <a:rPr>
-                <a:solidFill>
-                  <a:srgbClr val="003B4F"/>
-                </a:solidFill>
-                <a:latin typeface="Courier"/>
-              </a:rPr>
-              <a:t>(mass_model, </a:t>
-            </a:r>
-            <a:r>
-              <a:rPr>
-                <a:solidFill>
-                  <a:srgbClr val="657422"/>
-                </a:solidFill>
-                <a:latin typeface="Courier"/>
-              </a:rPr>
-              <a:t>type =</a:t>
-            </a:r>
-            <a:r>
-              <a:rPr>
-                <a:solidFill>
-                  <a:srgbClr val="003B4F"/>
-                </a:solidFill>
-                <a:latin typeface="Courier"/>
-              </a:rPr>
-              <a:t> </a:t>
-            </a:r>
-            <a:r>
-              <a:rPr>
-                <a:solidFill>
-                  <a:srgbClr val="20794D"/>
-                </a:solidFill>
-                <a:latin typeface="Courier"/>
-              </a:rPr>
-              <a:t>"II"</a:t>
-            </a:r>
-            <a:r>
-              <a:rPr>
-                <a:solidFill>
-                  <a:srgbClr val="003B4F"/>
-                </a:solidFill>
-                <a:latin typeface="Courier"/>
-              </a:rPr>
-              <a:t>)</a:t>
+              <a:t> = 0.051</a:t>
+            </a:r>
+            <a:r>
+              <a:rPr/>
+              <a:t> — just above 0.05.</a:t>
             </a:r>
           </a:p>
         </p:txBody>
@@ -7411,12 +9661,34 @@
           <a:bodyPr/>
           <a:lstStyle/>
           <a:p>
+            <a:pPr lvl="0"/>
+            <a:r>
+              <a:rPr b="1"/>
+              <a:t>H₀:</a:t>
+            </a:r>
+            <a:r>
+              <a:rPr/>
+              <a:t> the residuals are normal</a:t>
+            </a:r>
+          </a:p>
+          <a:p>
+            <a:pPr lvl="0"/>
+            <a:r>
+              <a:rPr i="1"/>
+              <a:t>p</a:t>
+            </a:r>
+            <a:r>
+              <a:rPr/>
+              <a:t> &gt; 0.05 → no evidence against normality</a:t>
+            </a:r>
+          </a:p>
+          <a:p>
             <a:pPr lvl="0" indent="0" marL="1270000">
               <a:buNone/>
             </a:pPr>
             <a:r>
               <a:rPr sz="2000" b="1"/>
-              <a:t>Tip</a:t>
+              <a:t>Important</a:t>
             </a:r>
           </a:p>
           <a:p>
@@ -7425,7 +9697,7 @@
             </a:pPr>
             <a:r>
               <a:rPr sz="2000" b="1"/>
-              <a:t>✅ Why show a broken run?</a:t>
+              <a:t>Large-sample caution</a:t>
             </a:r>
           </a:p>
           <a:p>
@@ -7433,24 +9705,32 @@
               <a:buNone/>
             </a:pPr>
             <a:r>
-              <a:rPr sz="2000">
-                <a:latin typeface="Courier"/>
-              </a:rPr>
-              <a:t>anova()</a:t>
-            </a:r>
-            <a:r>
               <a:rPr sz="2000"/>
-              <a:t> and </a:t>
-            </a:r>
-            <a:r>
-              <a:rPr sz="2000">
-                <a:latin typeface="Courier"/>
-              </a:rPr>
-              <a:t>Anova()</a:t>
+              <a:t>With ~340 birds Shapiro-Wilk flags </a:t>
+            </a:r>
+            <a:r>
+              <a:rPr sz="2000" i="1"/>
+              <a:t>tiny</a:t>
             </a:r>
             <a:r>
               <a:rPr sz="2000"/>
-              <a:t> are two entirely different functions that happen to differ by one capital letter — R will not guess which one you meant. Watching the exact error message land here means you’ll recognize it instantly instead of re-checking your spelling three times when it happens mid-assignment.</a:t>
+              <a:t> departures. A </a:t>
+            </a:r>
+            <a:r>
+              <a:rPr sz="2000" i="1"/>
+              <a:t>p</a:t>
+            </a:r>
+            <a:r>
+              <a:rPr sz="2000"/>
+              <a:t> of 0.051 is not “barely passed” — it is “the test is so sensitive at this n that it is nearly flagging a QQ plot that looks fine.” Trust the </a:t>
+            </a:r>
+            <a:r>
+              <a:rPr sz="2000" b="1"/>
+              <a:t>plot</a:t>
+            </a:r>
+            <a:r>
+              <a:rPr sz="2000"/>
+              <a:t>, use the test as a second opinion.</a:t>
             </a:r>
           </a:p>
         </p:txBody>
@@ -7504,14 +9784,8 @@
               <a:buNone/>
             </a:pPr>
             <a:r>
-              <a:rPr>
-                <a:latin typeface="Courier"/>
-              </a:rPr>
-              <a:t>car::Anova()</a:t>
-            </a:r>
-            <a:r>
-              <a:rPr/>
-              <a:t> — Type II for Unbalanced Data</a:t>
+              <a:rPr/>
+              <a:t>Assumption 3 — Equal Variance by Eye First</a:t>
             </a:r>
           </a:p>
         </p:txBody>
@@ -7541,17 +9815,45 @@
                 </a:solidFill>
                 <a:latin typeface="Courier"/>
               </a:rPr>
-              <a:t># Type II sums of squares — the right call here -------</a:t>
+              <a:t># The spread of each group ----------------------------</a:t>
             </a:r>
             <a:br/>
             <a:r>
               <a:rPr>
                 <a:solidFill>
+                  <a:srgbClr val="003B4F"/>
+                </a:solidFill>
+                <a:latin typeface="Courier"/>
+              </a:rPr>
+              <a:t>penguins_df </a:t>
+            </a:r>
+            <a:r>
+              <a:rPr>
+                <a:solidFill>
+                  <a:srgbClr val="5E5E5E"/>
+                </a:solidFill>
+                <a:latin typeface="Courier"/>
+              </a:rPr>
+              <a:t>%&gt;%</a:t>
+            </a:r>
+            <a:br/>
+            <a:r>
+              <a:rPr>
+                <a:solidFill>
+                  <a:srgbClr val="003B4F"/>
+                </a:solidFill>
+                <a:latin typeface="Courier"/>
+              </a:rPr>
+              <a:t>  </a:t>
+            </a:r>
+            <a:r>
+              <a:rPr>
+                <a:solidFill>
                   <a:srgbClr val="4758AB"/>
                 </a:solidFill>
                 <a:latin typeface="Courier"/>
               </a:rPr>
-              <a:t>Anova</a:t>
+              <a:t>group_by</a:t>
             </a:r>
             <a:r>
               <a:rPr>
@@ -7560,7 +9862,44 @@
                 </a:solidFill>
                 <a:latin typeface="Courier"/>
               </a:rPr>
-              <a:t>(mass_model, </a:t>
+              <a:t>(species) </a:t>
+            </a:r>
+            <a:r>
+              <a:rPr>
+                <a:solidFill>
+                  <a:srgbClr val="5E5E5E"/>
+                </a:solidFill>
+                <a:latin typeface="Courier"/>
+              </a:rPr>
+              <a:t>%&gt;%</a:t>
+            </a:r>
+            <a:br/>
+            <a:r>
+              <a:rPr>
+                <a:solidFill>
+                  <a:srgbClr val="003B4F"/>
+                </a:solidFill>
+                <a:latin typeface="Courier"/>
+              </a:rPr>
+              <a:t>  </a:t>
+            </a:r>
+            <a:r>
+              <a:rPr>
+                <a:solidFill>
+                  <a:srgbClr val="4758AB"/>
+                </a:solidFill>
+                <a:latin typeface="Courier"/>
+              </a:rPr>
+              <a:t>summarize</a:t>
+            </a:r>
+            <a:r>
+              <a:rPr>
+                <a:solidFill>
+                  <a:srgbClr val="003B4F"/>
+                </a:solidFill>
+                <a:latin typeface="Courier"/>
+              </a:rPr>
+              <a:t>(</a:t>
             </a:r>
             <a:r>
               <a:rPr>
@@ -7569,7 +9908,7 @@
                 </a:solidFill>
                 <a:latin typeface="Courier"/>
               </a:rPr>
-              <a:t>type =</a:t>
+              <a:t>n    =</a:t>
             </a:r>
             <a:r>
               <a:rPr>
@@ -7583,11 +9922,11 @@
             <a:r>
               <a:rPr>
                 <a:solidFill>
-                  <a:srgbClr val="20794D"/>
-                </a:solidFill>
-                <a:latin typeface="Courier"/>
-              </a:rPr>
-              <a:t>"II"</a:t>
+                  <a:srgbClr val="4758AB"/>
+                </a:solidFill>
+                <a:latin typeface="Courier"/>
+              </a:rPr>
+              <a:t>n</a:t>
             </a:r>
             <a:r>
               <a:rPr>
@@ -7596,7 +9935,99 @@
                 </a:solidFill>
                 <a:latin typeface="Courier"/>
               </a:rPr>
-              <a:t>)</a:t>
+              <a:t>(),</a:t>
+            </a:r>
+            <a:br/>
+            <a:r>
+              <a:rPr>
+                <a:solidFill>
+                  <a:srgbClr val="003B4F"/>
+                </a:solidFill>
+                <a:latin typeface="Courier"/>
+              </a:rPr>
+              <a:t>            </a:t>
+            </a:r>
+            <a:r>
+              <a:rPr>
+                <a:solidFill>
+                  <a:srgbClr val="657422"/>
+                </a:solidFill>
+                <a:latin typeface="Courier"/>
+              </a:rPr>
+              <a:t>mean =</a:t>
+            </a:r>
+            <a:r>
+              <a:rPr>
+                <a:solidFill>
+                  <a:srgbClr val="003B4F"/>
+                </a:solidFill>
+                <a:latin typeface="Courier"/>
+              </a:rPr>
+              <a:t> </a:t>
+            </a:r>
+            <a:r>
+              <a:rPr>
+                <a:solidFill>
+                  <a:srgbClr val="4758AB"/>
+                </a:solidFill>
+                <a:latin typeface="Courier"/>
+              </a:rPr>
+              <a:t>mean</a:t>
+            </a:r>
+            <a:r>
+              <a:rPr>
+                <a:solidFill>
+                  <a:srgbClr val="003B4F"/>
+                </a:solidFill>
+                <a:latin typeface="Courier"/>
+              </a:rPr>
+              <a:t>(body_mass_g),</a:t>
+            </a:r>
+            <a:br/>
+            <a:r>
+              <a:rPr>
+                <a:solidFill>
+                  <a:srgbClr val="003B4F"/>
+                </a:solidFill>
+                <a:latin typeface="Courier"/>
+              </a:rPr>
+              <a:t>            </a:t>
+            </a:r>
+            <a:r>
+              <a:rPr>
+                <a:solidFill>
+                  <a:srgbClr val="657422"/>
+                </a:solidFill>
+                <a:latin typeface="Courier"/>
+              </a:rPr>
+              <a:t>sd   =</a:t>
+            </a:r>
+            <a:r>
+              <a:rPr>
+                <a:solidFill>
+                  <a:srgbClr val="003B4F"/>
+                </a:solidFill>
+                <a:latin typeface="Courier"/>
+              </a:rPr>
+              <a:t> </a:t>
+            </a:r>
+            <a:r>
+              <a:rPr>
+                <a:solidFill>
+                  <a:srgbClr val="4758AB"/>
+                </a:solidFill>
+                <a:latin typeface="Courier"/>
+              </a:rPr>
+              <a:t>sd</a:t>
+            </a:r>
+            <a:r>
+              <a:rPr>
+                <a:solidFill>
+                  <a:srgbClr val="003B4F"/>
+                </a:solidFill>
+                <a:latin typeface="Courier"/>
+              </a:rPr>
+              <a:t>(body_mass_g))</a:t>
             </a:r>
           </a:p>
           <a:p>
@@ -7607,13 +10038,12 @@
               <a:rPr>
                 <a:latin typeface="Courier"/>
               </a:rPr>
-              <a:t>Anova Table (Type II tests)
-Response: body_mass_g
-             Sum Sq  Df F value    Pr(&gt;F)    
-species   146864214   2  343.63 &lt; 2.2e-16 ***
-Residuals  72443483 339                      
----
-Signif. codes:  0 '***' 0.001 '**' 0.01 '*' 0.05 '.' 0.1 ' ' 1</a:t>
+              <a:t># A tibble: 3 × 4
+  species       n  mean    sd
+  &lt;fct&gt;     &lt;int&gt; &lt;dbl&gt; &lt;dbl&gt;
+1 Adelie      151 3701.  459.
+2 Chinstrap    68 3733.  384.
+3 Gentoo      123 5076.  504.</a:t>
             </a:r>
           </a:p>
         </p:txBody>
@@ -7633,42 +10063,60 @@
           <a:bodyPr/>
           <a:lstStyle/>
           <a:p>
-            <a:pPr lvl="0" indent="0" marL="0">
-              <a:buNone/>
-            </a:pPr>
+            <a:pPr lvl="0"/>
+            <a:r>
+              <a:rPr/>
+              <a:t>Adelie </a:t>
+            </a:r>
             <a:r>
               <a:rPr b="1"/>
-              <a:t>Why Type II?</a:t>
+              <a:t>459</a:t>
+            </a:r>
+            <a:r>
+              <a:rPr/>
+              <a:t>, Chinstrap </a:t>
+            </a:r>
+            <a:r>
+              <a:rPr b="1"/>
+              <a:t>384</a:t>
+            </a:r>
+            <a:r>
+              <a:rPr/>
+              <a:t>, Gentoo </a:t>
+            </a:r>
+            <a:r>
+              <a:rPr b="1"/>
+              <a:t>504</a:t>
             </a:r>
           </a:p>
           <a:p>
             <a:pPr lvl="0"/>
             <a:r>
               <a:rPr/>
-              <a:t>Our groups have </a:t>
+              <a:t>The biggest sd is about </a:t>
             </a:r>
             <a:r>
               <a:rPr b="1"/>
-              <a:t>different n</a:t>
-            </a:r>
-            <a:r>
-              <a:rPr/>
-              <a:t> (unbalanced)</a:t>
+              <a:t>1.3×</a:t>
+            </a:r>
+            <a:r>
+              <a:rPr/>
+              <a:t> the smallest</a:t>
             </a:r>
           </a:p>
           <a:p>
             <a:pPr lvl="0"/>
             <a:r>
               <a:rPr/>
-              <a:t>With one predictor the F is the same, but Type II is the </a:t>
+              <a:t>Combined with </a:t>
             </a:r>
             <a:r>
               <a:rPr b="1"/>
-              <a:t>habit</a:t>
-            </a:r>
-            <a:r>
-              <a:rPr/>
-              <a:t> you want before you meet two-way ANOVA, where the type genuinely changes the answer</a:t>
+              <a:t>unbalanced</a:t>
+            </a:r>
+            <a:r>
+              <a:rPr/>
+              <a:t> n (151 / 68 / 123), that is the situation where unequal variance actually matters</a:t>
             </a:r>
           </a:p>
           <a:p>
@@ -7685,24 +10133,8 @@
               <a:buNone/>
             </a:pPr>
             <a:r>
-              <a:rPr sz="2000">
-                <a:latin typeface="Courier"/>
-              </a:rPr>
-              <a:t>anova()</a:t>
-            </a:r>
-            <a:r>
               <a:rPr sz="2000"/>
-              <a:t> = Type I (order-dependent). </a:t>
-            </a:r>
-            <a:r>
-              <a:rPr sz="2000">
-                <a:latin typeface="Courier"/>
-              </a:rPr>
-              <a:t>Anova(type = "II")</a:t>
-            </a:r>
-            <a:r>
-              <a:rPr sz="2000"/>
-              <a:t> = order-independent.</a:t>
+              <a:t>Rule of thumb: equal n makes ANOVA forgiving about unequal variance. Unequal n does not.</a:t>
             </a:r>
           </a:p>
         </p:txBody>

--- a/docs/content/one_way_anova_2/one_way_anova_2_lecture.pptx
+++ b/docs/content/one_way_anova_2/one_way_anova_2_lecture.pptx
@@ -3365,7 +3365,7 @@
             </a:pPr>
             <a:r>
               <a:rPr/>
-              <a:t>2026-10-19</a:t>
+              <a:t>2026-10-22</a:t>
             </a:r>
           </a:p>
         </p:txBody>
